--- a/UNIT_offres_restaurants.pptx
+++ b/UNIT_offres_restaurants.pptx
@@ -15,6 +15,7 @@
     <p:sldId id="263" r:id="rId14"/>
     <p:sldId id="264" r:id="rId15"/>
     <p:sldId id="265" r:id="rId16"/>
+    <p:sldId id="266" r:id="rId17"/>
   </p:sldIdLst>
   <p:sldSz cx="12191695" cy="6858000" type="screen4x3"/>
   <p:notesSz cx="6858000" cy="9144000"/>
@@ -3725,6 +3726,889 @@
                 </a:solidFill>
                 <a:latin typeface="Cambria"/>
               </a:rPr>
+              <a:t>1 / 2</a:t>
+            </a:r>
+          </a:p>
+        </p:txBody>
+      </p:sp>
+      <p:sp>
+        <p:nvSpPr>
+          <p:cNvPr id="7" name="Rounded Rectangle 6"/>
+          <p:cNvSpPr/>
+          <p:nvPr/>
+        </p:nvSpPr>
+        <p:spPr>
+          <a:xfrm>
+            <a:off x="777240" y="1965960"/>
+            <a:ext cx="5349240" cy="1965960"/>
+          </a:xfrm>
+          <a:prstGeom prst="roundRect">
+            <a:avLst>
+              <a:gd name="adj" fmla="val 5000"/>
+            </a:avLst>
+          </a:prstGeom>
+          <a:solidFill>
+            <a:srgbClr val="FFFDFA"/>
+          </a:solidFill>
+          <a:ln w="12700">
+            <a:solidFill>
+              <a:srgbClr val="E8E0D2"/>
+            </a:solidFill>
+          </a:ln>
+          <a:effectLst/>
+        </p:spPr>
+        <p:style>
+          <a:lnRef idx="1">
+            <a:schemeClr val="accent1"/>
+          </a:lnRef>
+          <a:fillRef idx="3">
+            <a:schemeClr val="accent1"/>
+          </a:fillRef>
+          <a:effectRef idx="2">
+            <a:schemeClr val="accent1"/>
+          </a:effectRef>
+          <a:fontRef idx="minor">
+            <a:schemeClr val="lt1"/>
+          </a:fontRef>
+        </p:style>
+        <p:txBody>
+          <a:bodyPr rtlCol="0" anchor="ctr"/>
+          <a:lstStyle/>
+          <a:p>
+            <a:pPr algn="ctr"/>
+          </a:p>
+        </p:txBody>
+      </p:sp>
+      <p:sp>
+        <p:nvSpPr>
+          <p:cNvPr id="8" name="TextBox 7"/>
+          <p:cNvSpPr txBox="1"/>
+          <p:nvPr/>
+        </p:nvSpPr>
+        <p:spPr>
+          <a:xfrm>
+            <a:off x="1161288" y="2221991"/>
+            <a:ext cx="4581144" cy="548640"/>
+          </a:xfrm>
+          <a:prstGeom prst="rect">
+            <a:avLst/>
+          </a:prstGeom>
+          <a:noFill/>
+        </p:spPr>
+        <p:txBody>
+          <a:bodyPr wrap="square" anchor="t" lIns="0" rIns="0" tIns="0" bIns="0">
+            <a:spAutoFit/>
+          </a:bodyPr>
+          <a:lstStyle/>
+          <a:p>
+            <a:pPr algn="l">
+              <a:lnSpc>
+                <a:spcPct val="102000"/>
+              </a:lnSpc>
+            </a:pPr>
+            <a:r>
+              <a:rPr sz="1550" b="1" i="1">
+                <a:solidFill>
+                  <a:srgbClr val="2B2620"/>
+                </a:solidFill>
+                <a:latin typeface="Cambria"/>
+              </a:rPr>
+              <a:t>« C'est trop cher. »</a:t>
+            </a:r>
+          </a:p>
+        </p:txBody>
+      </p:sp>
+      <p:sp>
+        <p:nvSpPr>
+          <p:cNvPr id="9" name="TextBox 8"/>
+          <p:cNvSpPr txBox="1"/>
+          <p:nvPr/>
+        </p:nvSpPr>
+        <p:spPr>
+          <a:xfrm>
+            <a:off x="1161288" y="2807208"/>
+            <a:ext cx="4581144" cy="274320"/>
+          </a:xfrm>
+          <a:prstGeom prst="rect">
+            <a:avLst/>
+          </a:prstGeom>
+          <a:noFill/>
+        </p:spPr>
+        <p:txBody>
+          <a:bodyPr wrap="square" anchor="t" lIns="0" rIns="0" tIns="0" bIns="0">
+            <a:spAutoFit/>
+          </a:bodyPr>
+          <a:lstStyle/>
+          <a:p>
+            <a:pPr algn="l">
+              <a:lnSpc>
+                <a:spcPct val="100000"/>
+              </a:lnSpc>
+            </a:pPr>
+            <a:r>
+              <a:rPr sz="1050" b="1" i="0">
+                <a:solidFill>
+                  <a:srgbClr val="E8641B"/>
+                </a:solidFill>
+                <a:latin typeface="Calibri"/>
+              </a:rPr>
+              <a:t>VOTRE RÉPONSE</a:t>
+            </a:r>
+          </a:p>
+        </p:txBody>
+      </p:sp>
+      <p:sp>
+        <p:nvSpPr>
+          <p:cNvPr id="10" name="TextBox 9"/>
+          <p:cNvSpPr txBox="1"/>
+          <p:nvPr/>
+        </p:nvSpPr>
+        <p:spPr>
+          <a:xfrm>
+            <a:off x="1161288" y="3063239"/>
+            <a:ext cx="4617720" cy="822960"/>
+          </a:xfrm>
+          <a:prstGeom prst="rect">
+            <a:avLst/>
+          </a:prstGeom>
+          <a:noFill/>
+        </p:spPr>
+        <p:txBody>
+          <a:bodyPr wrap="square" anchor="t" lIns="0" rIns="0" tIns="0" bIns="0">
+            <a:spAutoFit/>
+          </a:bodyPr>
+          <a:lstStyle/>
+          <a:p>
+            <a:pPr algn="l">
+              <a:lnSpc>
+                <a:spcPct val="110000"/>
+              </a:lnSpc>
+            </a:pPr>
+            <a:r>
+              <a:rPr sz="1200" b="0" i="0">
+                <a:solidFill>
+                  <a:srgbClr val="6E665A"/>
+                </a:solidFill>
+                <a:latin typeface="Calibri"/>
+              </a:rPr>
+              <a:t>Une seule table réservée en plus par semaine rembourse le site dans l'année. Ce n'est pas une dépense : c'est un commercial qui travaille 24/7 — garanties incluses, sans surcoût caché.</a:t>
+            </a:r>
+          </a:p>
+        </p:txBody>
+      </p:sp>
+      <p:sp>
+        <p:nvSpPr>
+          <p:cNvPr id="11" name="Rounded Rectangle 10"/>
+          <p:cNvSpPr/>
+          <p:nvPr/>
+        </p:nvSpPr>
+        <p:spPr>
+          <a:xfrm>
+            <a:off x="6492240" y="1965960"/>
+            <a:ext cx="5349240" cy="1965960"/>
+          </a:xfrm>
+          <a:prstGeom prst="roundRect">
+            <a:avLst>
+              <a:gd name="adj" fmla="val 5000"/>
+            </a:avLst>
+          </a:prstGeom>
+          <a:solidFill>
+            <a:srgbClr val="FFFDFA"/>
+          </a:solidFill>
+          <a:ln w="12700">
+            <a:solidFill>
+              <a:srgbClr val="E8E0D2"/>
+            </a:solidFill>
+          </a:ln>
+          <a:effectLst/>
+        </p:spPr>
+        <p:style>
+          <a:lnRef idx="1">
+            <a:schemeClr val="accent1"/>
+          </a:lnRef>
+          <a:fillRef idx="3">
+            <a:schemeClr val="accent1"/>
+          </a:fillRef>
+          <a:effectRef idx="2">
+            <a:schemeClr val="accent1"/>
+          </a:effectRef>
+          <a:fontRef idx="minor">
+            <a:schemeClr val="lt1"/>
+          </a:fontRef>
+        </p:style>
+        <p:txBody>
+          <a:bodyPr rtlCol="0" anchor="ctr"/>
+          <a:lstStyle/>
+          <a:p>
+            <a:pPr algn="ctr"/>
+          </a:p>
+        </p:txBody>
+      </p:sp>
+      <p:sp>
+        <p:nvSpPr>
+          <p:cNvPr id="12" name="TextBox 11"/>
+          <p:cNvSpPr txBox="1"/>
+          <p:nvPr/>
+        </p:nvSpPr>
+        <p:spPr>
+          <a:xfrm>
+            <a:off x="6876288" y="2221991"/>
+            <a:ext cx="4581144" cy="548640"/>
+          </a:xfrm>
+          <a:prstGeom prst="rect">
+            <a:avLst/>
+          </a:prstGeom>
+          <a:noFill/>
+        </p:spPr>
+        <p:txBody>
+          <a:bodyPr wrap="square" anchor="t" lIns="0" rIns="0" tIns="0" bIns="0">
+            <a:spAutoFit/>
+          </a:bodyPr>
+          <a:lstStyle/>
+          <a:p>
+            <a:pPr algn="l">
+              <a:lnSpc>
+                <a:spcPct val="102000"/>
+              </a:lnSpc>
+            </a:pPr>
+            <a:r>
+              <a:rPr sz="1550" b="1" i="1">
+                <a:solidFill>
+                  <a:srgbClr val="2B2620"/>
+                </a:solidFill>
+                <a:latin typeface="Cambria"/>
+              </a:rPr>
+              <a:t>« J'ai déjà Facebook / Insta, ça suffit. »</a:t>
+            </a:r>
+          </a:p>
+        </p:txBody>
+      </p:sp>
+      <p:sp>
+        <p:nvSpPr>
+          <p:cNvPr id="13" name="TextBox 12"/>
+          <p:cNvSpPr txBox="1"/>
+          <p:nvPr/>
+        </p:nvSpPr>
+        <p:spPr>
+          <a:xfrm>
+            <a:off x="6876288" y="2807208"/>
+            <a:ext cx="4581144" cy="274320"/>
+          </a:xfrm>
+          <a:prstGeom prst="rect">
+            <a:avLst/>
+          </a:prstGeom>
+          <a:noFill/>
+        </p:spPr>
+        <p:txBody>
+          <a:bodyPr wrap="square" anchor="t" lIns="0" rIns="0" tIns="0" bIns="0">
+            <a:spAutoFit/>
+          </a:bodyPr>
+          <a:lstStyle/>
+          <a:p>
+            <a:pPr algn="l">
+              <a:lnSpc>
+                <a:spcPct val="100000"/>
+              </a:lnSpc>
+            </a:pPr>
+            <a:r>
+              <a:rPr sz="1050" b="1" i="0">
+                <a:solidFill>
+                  <a:srgbClr val="E8641B"/>
+                </a:solidFill>
+                <a:latin typeface="Calibri"/>
+              </a:rPr>
+              <a:t>VOTRE RÉPONSE</a:t>
+            </a:r>
+          </a:p>
+        </p:txBody>
+      </p:sp>
+      <p:sp>
+        <p:nvSpPr>
+          <p:cNvPr id="14" name="TextBox 13"/>
+          <p:cNvSpPr txBox="1"/>
+          <p:nvPr/>
+        </p:nvSpPr>
+        <p:spPr>
+          <a:xfrm>
+            <a:off x="6876288" y="3063239"/>
+            <a:ext cx="4617720" cy="822960"/>
+          </a:xfrm>
+          <a:prstGeom prst="rect">
+            <a:avLst/>
+          </a:prstGeom>
+          <a:noFill/>
+        </p:spPr>
+        <p:txBody>
+          <a:bodyPr wrap="square" anchor="t" lIns="0" rIns="0" tIns="0" bIns="0">
+            <a:spAutoFit/>
+          </a:bodyPr>
+          <a:lstStyle/>
+          <a:p>
+            <a:pPr algn="l">
+              <a:lnSpc>
+                <a:spcPct val="110000"/>
+              </a:lnSpc>
+            </a:pPr>
+            <a:r>
+              <a:rPr sz="1200" b="0" i="0">
+                <a:solidFill>
+                  <a:srgbClr val="6E665A"/>
+                </a:solidFill>
+                <a:latin typeface="Calibri"/>
+              </a:rPr>
+              <a:t>Les réseaux, c'est loué : l'algorithme décide qui vous voit. Votre site, c'est chez vous — en tête de Google quand on cherche un resto dans votre ville, menu et réservation en un clic.</a:t>
+            </a:r>
+          </a:p>
+        </p:txBody>
+      </p:sp>
+      <p:sp>
+        <p:nvSpPr>
+          <p:cNvPr id="15" name="Rounded Rectangle 14"/>
+          <p:cNvSpPr/>
+          <p:nvPr/>
+        </p:nvSpPr>
+        <p:spPr>
+          <a:xfrm>
+            <a:off x="777240" y="4242816"/>
+            <a:ext cx="5349240" cy="1965960"/>
+          </a:xfrm>
+          <a:prstGeom prst="roundRect">
+            <a:avLst>
+              <a:gd name="adj" fmla="val 5000"/>
+            </a:avLst>
+          </a:prstGeom>
+          <a:solidFill>
+            <a:srgbClr val="FFFDFA"/>
+          </a:solidFill>
+          <a:ln w="12700">
+            <a:solidFill>
+              <a:srgbClr val="E8E0D2"/>
+            </a:solidFill>
+          </a:ln>
+          <a:effectLst/>
+        </p:spPr>
+        <p:style>
+          <a:lnRef idx="1">
+            <a:schemeClr val="accent1"/>
+          </a:lnRef>
+          <a:fillRef idx="3">
+            <a:schemeClr val="accent1"/>
+          </a:fillRef>
+          <a:effectRef idx="2">
+            <a:schemeClr val="accent1"/>
+          </a:effectRef>
+          <a:fontRef idx="minor">
+            <a:schemeClr val="lt1"/>
+          </a:fontRef>
+        </p:style>
+        <p:txBody>
+          <a:bodyPr rtlCol="0" anchor="ctr"/>
+          <a:lstStyle/>
+          <a:p>
+            <a:pPr algn="ctr"/>
+          </a:p>
+        </p:txBody>
+      </p:sp>
+      <p:sp>
+        <p:nvSpPr>
+          <p:cNvPr id="16" name="TextBox 15"/>
+          <p:cNvSpPr txBox="1"/>
+          <p:nvPr/>
+        </p:nvSpPr>
+        <p:spPr>
+          <a:xfrm>
+            <a:off x="1161288" y="4498848"/>
+            <a:ext cx="4581144" cy="548640"/>
+          </a:xfrm>
+          <a:prstGeom prst="rect">
+            <a:avLst/>
+          </a:prstGeom>
+          <a:noFill/>
+        </p:spPr>
+        <p:txBody>
+          <a:bodyPr wrap="square" anchor="t" lIns="0" rIns="0" tIns="0" bIns="0">
+            <a:spAutoFit/>
+          </a:bodyPr>
+          <a:lstStyle/>
+          <a:p>
+            <a:pPr algn="l">
+              <a:lnSpc>
+                <a:spcPct val="102000"/>
+              </a:lnSpc>
+            </a:pPr>
+            <a:r>
+              <a:rPr sz="1550" b="1" i="1">
+                <a:solidFill>
+                  <a:srgbClr val="2B2620"/>
+                </a:solidFill>
+                <a:latin typeface="Cambria"/>
+              </a:rPr>
+              <a:t>« Je n'ai pas le temps de m'en occuper. »</a:t>
+            </a:r>
+          </a:p>
+        </p:txBody>
+      </p:sp>
+      <p:sp>
+        <p:nvSpPr>
+          <p:cNvPr id="17" name="TextBox 16"/>
+          <p:cNvSpPr txBox="1"/>
+          <p:nvPr/>
+        </p:nvSpPr>
+        <p:spPr>
+          <a:xfrm>
+            <a:off x="1161288" y="5084064"/>
+            <a:ext cx="4581144" cy="274320"/>
+          </a:xfrm>
+          <a:prstGeom prst="rect">
+            <a:avLst/>
+          </a:prstGeom>
+          <a:noFill/>
+        </p:spPr>
+        <p:txBody>
+          <a:bodyPr wrap="square" anchor="t" lIns="0" rIns="0" tIns="0" bIns="0">
+            <a:spAutoFit/>
+          </a:bodyPr>
+          <a:lstStyle/>
+          <a:p>
+            <a:pPr algn="l">
+              <a:lnSpc>
+                <a:spcPct val="100000"/>
+              </a:lnSpc>
+            </a:pPr>
+            <a:r>
+              <a:rPr sz="1050" b="1" i="0">
+                <a:solidFill>
+                  <a:srgbClr val="E8641B"/>
+                </a:solidFill>
+                <a:latin typeface="Calibri"/>
+              </a:rPr>
+              <a:t>VOTRE RÉPONSE</a:t>
+            </a:r>
+          </a:p>
+        </p:txBody>
+      </p:sp>
+      <p:sp>
+        <p:nvSpPr>
+          <p:cNvPr id="18" name="TextBox 17"/>
+          <p:cNvSpPr txBox="1"/>
+          <p:nvPr/>
+        </p:nvSpPr>
+        <p:spPr>
+          <a:xfrm>
+            <a:off x="1161288" y="5340096"/>
+            <a:ext cx="4617720" cy="822960"/>
+          </a:xfrm>
+          <a:prstGeom prst="rect">
+            <a:avLst/>
+          </a:prstGeom>
+          <a:noFill/>
+        </p:spPr>
+        <p:txBody>
+          <a:bodyPr wrap="square" anchor="t" lIns="0" rIns="0" tIns="0" bIns="0">
+            <a:spAutoFit/>
+          </a:bodyPr>
+          <a:lstStyle/>
+          <a:p>
+            <a:pPr algn="l">
+              <a:lnSpc>
+                <a:spcPct val="110000"/>
+              </a:lnSpc>
+            </a:pPr>
+            <a:r>
+              <a:rPr sz="1200" b="0" i="0">
+                <a:solidFill>
+                  <a:srgbClr val="6E665A"/>
+                </a:solidFill>
+                <a:latin typeface="Calibri"/>
+              </a:rPr>
+              <a:t>C'est justement notre métier : vous ne touchez à rien. Nouveau menu, photo, promo ? Un simple message, on s'en occupe. Zéro charge pour vous.</a:t>
+            </a:r>
+          </a:p>
+        </p:txBody>
+      </p:sp>
+      <p:sp>
+        <p:nvSpPr>
+          <p:cNvPr id="19" name="Rounded Rectangle 18"/>
+          <p:cNvSpPr/>
+          <p:nvPr/>
+        </p:nvSpPr>
+        <p:spPr>
+          <a:xfrm>
+            <a:off x="6492240" y="4242816"/>
+            <a:ext cx="5349240" cy="1965960"/>
+          </a:xfrm>
+          <a:prstGeom prst="roundRect">
+            <a:avLst>
+              <a:gd name="adj" fmla="val 5000"/>
+            </a:avLst>
+          </a:prstGeom>
+          <a:solidFill>
+            <a:srgbClr val="FFFDFA"/>
+          </a:solidFill>
+          <a:ln w="12700">
+            <a:solidFill>
+              <a:srgbClr val="E8E0D2"/>
+            </a:solidFill>
+          </a:ln>
+          <a:effectLst/>
+        </p:spPr>
+        <p:style>
+          <a:lnRef idx="1">
+            <a:schemeClr val="accent1"/>
+          </a:lnRef>
+          <a:fillRef idx="3">
+            <a:schemeClr val="accent1"/>
+          </a:fillRef>
+          <a:effectRef idx="2">
+            <a:schemeClr val="accent1"/>
+          </a:effectRef>
+          <a:fontRef idx="minor">
+            <a:schemeClr val="lt1"/>
+          </a:fontRef>
+        </p:style>
+        <p:txBody>
+          <a:bodyPr rtlCol="0" anchor="ctr"/>
+          <a:lstStyle/>
+          <a:p>
+            <a:pPr algn="ctr"/>
+          </a:p>
+        </p:txBody>
+      </p:sp>
+      <p:sp>
+        <p:nvSpPr>
+          <p:cNvPr id="20" name="TextBox 19"/>
+          <p:cNvSpPr txBox="1"/>
+          <p:nvPr/>
+        </p:nvSpPr>
+        <p:spPr>
+          <a:xfrm>
+            <a:off x="6876288" y="4498848"/>
+            <a:ext cx="4581144" cy="548640"/>
+          </a:xfrm>
+          <a:prstGeom prst="rect">
+            <a:avLst/>
+          </a:prstGeom>
+          <a:noFill/>
+        </p:spPr>
+        <p:txBody>
+          <a:bodyPr wrap="square" anchor="t" lIns="0" rIns="0" tIns="0" bIns="0">
+            <a:spAutoFit/>
+          </a:bodyPr>
+          <a:lstStyle/>
+          <a:p>
+            <a:pPr algn="l">
+              <a:lnSpc>
+                <a:spcPct val="102000"/>
+              </a:lnSpc>
+            </a:pPr>
+            <a:r>
+              <a:rPr sz="1550" b="1" i="1">
+                <a:solidFill>
+                  <a:srgbClr val="2B2620"/>
+                </a:solidFill>
+                <a:latin typeface="Cambria"/>
+              </a:rPr>
+              <a:t>« Mes clients sont des habitués. »</a:t>
+            </a:r>
+          </a:p>
+        </p:txBody>
+      </p:sp>
+      <p:sp>
+        <p:nvSpPr>
+          <p:cNvPr id="21" name="TextBox 20"/>
+          <p:cNvSpPr txBox="1"/>
+          <p:nvPr/>
+        </p:nvSpPr>
+        <p:spPr>
+          <a:xfrm>
+            <a:off x="6876288" y="5084064"/>
+            <a:ext cx="4581144" cy="274320"/>
+          </a:xfrm>
+          <a:prstGeom prst="rect">
+            <a:avLst/>
+          </a:prstGeom>
+          <a:noFill/>
+        </p:spPr>
+        <p:txBody>
+          <a:bodyPr wrap="square" anchor="t" lIns="0" rIns="0" tIns="0" bIns="0">
+            <a:spAutoFit/>
+          </a:bodyPr>
+          <a:lstStyle/>
+          <a:p>
+            <a:pPr algn="l">
+              <a:lnSpc>
+                <a:spcPct val="100000"/>
+              </a:lnSpc>
+            </a:pPr>
+            <a:r>
+              <a:rPr sz="1050" b="1" i="0">
+                <a:solidFill>
+                  <a:srgbClr val="E8641B"/>
+                </a:solidFill>
+                <a:latin typeface="Calibri"/>
+              </a:rPr>
+              <a:t>VOTRE RÉPONSE</a:t>
+            </a:r>
+          </a:p>
+        </p:txBody>
+      </p:sp>
+      <p:sp>
+        <p:nvSpPr>
+          <p:cNvPr id="22" name="TextBox 21"/>
+          <p:cNvSpPr txBox="1"/>
+          <p:nvPr/>
+        </p:nvSpPr>
+        <p:spPr>
+          <a:xfrm>
+            <a:off x="6876288" y="5340096"/>
+            <a:ext cx="4617720" cy="822960"/>
+          </a:xfrm>
+          <a:prstGeom prst="rect">
+            <a:avLst/>
+          </a:prstGeom>
+          <a:noFill/>
+        </p:spPr>
+        <p:txBody>
+          <a:bodyPr wrap="square" anchor="t" lIns="0" rIns="0" tIns="0" bIns="0">
+            <a:spAutoFit/>
+          </a:bodyPr>
+          <a:lstStyle/>
+          <a:p>
+            <a:pPr algn="l">
+              <a:lnSpc>
+                <a:spcPct val="110000"/>
+              </a:lnSpc>
+            </a:pPr>
+            <a:r>
+              <a:rPr sz="1200" b="0" i="0">
+                <a:solidFill>
+                  <a:srgbClr val="6E665A"/>
+                </a:solidFill>
+                <a:latin typeface="Calibri"/>
+              </a:rPr>
+              <a:t>Les habitués font tourner la boutique, les nouveaux la font grandir. Et 8 clients sur 10 regardent le menu et les avis en ligne avant de pousser la porte.</a:t>
+            </a:r>
+          </a:p>
+        </p:txBody>
+      </p:sp>
+    </p:spTree>
+  </p:cSld>
+  <p:clrMapOvr>
+    <a:masterClrMapping/>
+  </p:clrMapOvr>
+</p:sld>
+</file>
+
+<file path=ppt/slides/slide11.xml><?xml version="1.0" encoding="utf-8"?>
+<p:sld xmlns:a="http://schemas.openxmlformats.org/drawingml/2006/main" xmlns:p="http://schemas.openxmlformats.org/presentationml/2006/main" xmlns:r="http://schemas.openxmlformats.org/officeDocument/2006/relationships">
+  <p:cSld>
+    <p:spTree>
+      <p:nvGrpSpPr>
+        <p:cNvPr id="1" name=""/>
+        <p:cNvGrpSpPr/>
+        <p:nvPr/>
+      </p:nvGrpSpPr>
+      <p:grpSpPr/>
+      <p:sp>
+        <p:nvSpPr>
+          <p:cNvPr id="2" name="Rectangle 1"/>
+          <p:cNvSpPr/>
+          <p:nvPr/>
+        </p:nvSpPr>
+        <p:spPr>
+          <a:xfrm>
+            <a:off x="0" y="0"/>
+            <a:ext cx="12191695" cy="6858000"/>
+          </a:xfrm>
+          <a:prstGeom prst="rect">
+            <a:avLst/>
+          </a:prstGeom>
+          <a:solidFill>
+            <a:srgbClr val="F4EEE3"/>
+          </a:solidFill>
+          <a:ln>
+            <a:noFill/>
+          </a:ln>
+          <a:effectLst/>
+        </p:spPr>
+        <p:style>
+          <a:lnRef idx="1">
+            <a:schemeClr val="accent1"/>
+          </a:lnRef>
+          <a:fillRef idx="3">
+            <a:schemeClr val="accent1"/>
+          </a:fillRef>
+          <a:effectRef idx="2">
+            <a:schemeClr val="accent1"/>
+          </a:effectRef>
+          <a:fontRef idx="minor">
+            <a:schemeClr val="lt1"/>
+          </a:fontRef>
+        </p:style>
+        <p:txBody>
+          <a:bodyPr rtlCol="0" anchor="ctr"/>
+          <a:lstStyle/>
+          <a:p>
+            <a:pPr algn="ctr"/>
+          </a:p>
+        </p:txBody>
+      </p:sp>
+      <p:sp>
+        <p:nvSpPr>
+          <p:cNvPr id="3" name="Oval 2"/>
+          <p:cNvSpPr/>
+          <p:nvPr/>
+        </p:nvSpPr>
+        <p:spPr>
+          <a:xfrm>
+            <a:off x="777240" y="594360"/>
+            <a:ext cx="100584" cy="100584"/>
+          </a:xfrm>
+          <a:prstGeom prst="ellipse">
+            <a:avLst/>
+          </a:prstGeom>
+          <a:solidFill>
+            <a:srgbClr val="E8641B"/>
+          </a:solidFill>
+          <a:ln>
+            <a:noFill/>
+          </a:ln>
+          <a:effectLst/>
+        </p:spPr>
+        <p:style>
+          <a:lnRef idx="1">
+            <a:schemeClr val="accent1"/>
+          </a:lnRef>
+          <a:fillRef idx="3">
+            <a:schemeClr val="accent1"/>
+          </a:fillRef>
+          <a:effectRef idx="2">
+            <a:schemeClr val="accent1"/>
+          </a:effectRef>
+          <a:fontRef idx="minor">
+            <a:schemeClr val="lt1"/>
+          </a:fontRef>
+        </p:style>
+        <p:txBody>
+          <a:bodyPr rtlCol="0" anchor="ctr"/>
+          <a:lstStyle/>
+          <a:p>
+            <a:pPr algn="ctr"/>
+          </a:p>
+        </p:txBody>
+      </p:sp>
+      <p:sp>
+        <p:nvSpPr>
+          <p:cNvPr id="4" name="TextBox 3"/>
+          <p:cNvSpPr txBox="1"/>
+          <p:nvPr/>
+        </p:nvSpPr>
+        <p:spPr>
+          <a:xfrm>
+            <a:off x="996695" y="521207"/>
+            <a:ext cx="5486400" cy="274320"/>
+          </a:xfrm>
+          <a:prstGeom prst="rect">
+            <a:avLst/>
+          </a:prstGeom>
+          <a:noFill/>
+        </p:spPr>
+        <p:txBody>
+          <a:bodyPr wrap="square" anchor="t" lIns="0" rIns="0" tIns="0" bIns="0">
+            <a:spAutoFit/>
+          </a:bodyPr>
+          <a:lstStyle/>
+          <a:p>
+            <a:pPr algn="l">
+              <a:lnSpc>
+                <a:spcPct val="100000"/>
+              </a:lnSpc>
+            </a:pPr>
+            <a:r>
+              <a:rPr sz="1250" b="1" i="0">
+                <a:solidFill>
+                  <a:srgbClr val="E8641B"/>
+                </a:solidFill>
+                <a:latin typeface="Calibri"/>
+              </a:rPr>
+              <a:t>FACE AUX OBJECTIONS</a:t>
+            </a:r>
+          </a:p>
+        </p:txBody>
+      </p:sp>
+      <p:sp>
+        <p:nvSpPr>
+          <p:cNvPr id="5" name="TextBox 4"/>
+          <p:cNvSpPr txBox="1"/>
+          <p:nvPr/>
+        </p:nvSpPr>
+        <p:spPr>
+          <a:xfrm>
+            <a:off x="777240" y="886968"/>
+            <a:ext cx="8229600" cy="640080"/>
+          </a:xfrm>
+          <a:prstGeom prst="rect">
+            <a:avLst/>
+          </a:prstGeom>
+          <a:noFill/>
+        </p:spPr>
+        <p:txBody>
+          <a:bodyPr wrap="square" anchor="t" lIns="0" rIns="0" tIns="0" bIns="0">
+            <a:spAutoFit/>
+          </a:bodyPr>
+          <a:lstStyle/>
+          <a:p>
+            <a:pPr algn="l">
+              <a:lnSpc>
+                <a:spcPct val="100000"/>
+              </a:lnSpc>
+            </a:pPr>
+            <a:r>
+              <a:rPr sz="3200" b="1" i="0">
+                <a:solidFill>
+                  <a:srgbClr val="2B2620"/>
+                </a:solidFill>
+                <a:latin typeface="Cambria"/>
+              </a:rPr>
+              <a:t>Objection → Réponse</a:t>
+            </a:r>
+          </a:p>
+        </p:txBody>
+      </p:sp>
+      <p:sp>
+        <p:nvSpPr>
+          <p:cNvPr id="6" name="TextBox 5"/>
+          <p:cNvSpPr txBox="1"/>
+          <p:nvPr/>
+        </p:nvSpPr>
+        <p:spPr>
+          <a:xfrm>
+            <a:off x="10149840" y="1024128"/>
+            <a:ext cx="1463040" cy="457200"/>
+          </a:xfrm>
+          <a:prstGeom prst="rect">
+            <a:avLst/>
+          </a:prstGeom>
+          <a:noFill/>
+        </p:spPr>
+        <p:txBody>
+          <a:bodyPr wrap="square" anchor="t" lIns="0" rIns="0" tIns="0" bIns="0">
+            <a:spAutoFit/>
+          </a:bodyPr>
+          <a:lstStyle/>
+          <a:p>
+            <a:pPr algn="r">
+              <a:lnSpc>
+                <a:spcPct val="100000"/>
+              </a:lnSpc>
+            </a:pPr>
+            <a:r>
+              <a:rPr sz="1500" b="1" i="0">
+                <a:solidFill>
+                  <a:srgbClr val="8C8478"/>
+                </a:solidFill>
+                <a:latin typeface="Cambria"/>
+              </a:rPr>
               <a:t>2 / 2</a:t>
             </a:r>
           </a:p>
@@ -6491,7 +7375,7 @@
             <a:avLst/>
           </a:prstGeom>
           <a:solidFill>
-            <a:srgbClr val="2B2620"/>
+            <a:srgbClr val="F4EEE3"/>
           </a:solidFill>
           <a:ln>
             <a:noFill/>
@@ -6528,7 +7412,7 @@
         </p:nvSpPr>
         <p:spPr>
           <a:xfrm>
-            <a:off x="777240" y="649224"/>
+            <a:off x="777240" y="594360"/>
             <a:ext cx="100584" cy="100584"/>
           </a:xfrm>
           <a:prstGeom prst="ellipse">
@@ -6572,7 +7456,7 @@
         </p:nvSpPr>
         <p:spPr>
           <a:xfrm>
-            <a:off x="996695" y="576072"/>
+            <a:off x="996695" y="521207"/>
             <a:ext cx="5486400" cy="274320"/>
           </a:xfrm>
           <a:prstGeom prst="rect">
@@ -6598,7 +7482,7 @@
                 </a:solidFill>
                 <a:latin typeface="Calibri"/>
               </a:rPr>
-              <a:t>LA DIFFÉRENCE UNIT</a:t>
+              <a:t>OPTIONS À LA CARTE</a:t>
             </a:r>
           </a:p>
         </p:txBody>
@@ -6611,8 +7495,8 @@
         </p:nvSpPr>
         <p:spPr>
           <a:xfrm>
-            <a:off x="777240" y="941832"/>
-            <a:ext cx="10607040" cy="731520"/>
+            <a:off x="777240" y="886968"/>
+            <a:ext cx="10058400" cy="640080"/>
           </a:xfrm>
           <a:prstGeom prst="rect">
             <a:avLst/>
@@ -6633,11 +7517,11 @@
             <a:r>
               <a:rPr sz="3300" b="1" i="0">
                 <a:solidFill>
-                  <a:srgbClr val="F7F1E6"/>
+                  <a:srgbClr val="2B2620"/>
                 </a:solidFill>
                 <a:latin typeface="Cambria"/>
               </a:rPr>
-              <a:t>On ne livre pas un site. On s'en occupe.</a:t>
+              <a:t>À ajouter à votre formule</a:t>
             </a:r>
           </a:p>
         </p:txBody>
@@ -6650,7 +7534,7 @@
         </p:nvSpPr>
         <p:spPr>
           <a:xfrm>
-            <a:off x="795528" y="1627632"/>
+            <a:off x="795528" y="1554480"/>
             <a:ext cx="10424160" cy="457200"/>
           </a:xfrm>
           <a:prstGeom prst="rect">
@@ -6672,11 +7556,11 @@
             <a:r>
               <a:rPr sz="1550" b="0" i="0">
                 <a:solidFill>
-                  <a:srgbClr val="B7AE9E"/>
+                  <a:srgbClr val="6E665A"/>
                 </a:solidFill>
                 <a:latin typeface="Calibri"/>
               </a:rPr>
-              <a:t>Là où les autres vous laissent seul après la mise en ligne, UNIT reste à vos côtés.</a:t>
+              <a:t>Chaque site peut être enrichi selon vos besoins — sans changer de formule.</a:t>
             </a:r>
           </a:p>
         </p:txBody>
@@ -6690,19 +7574,19 @@
         <p:spPr>
           <a:xfrm>
             <a:off x="777240" y="2331720"/>
-            <a:ext cx="5074920" cy="1572768"/>
+            <a:ext cx="3401568" cy="3200400"/>
           </a:xfrm>
           <a:prstGeom prst="roundRect">
             <a:avLst>
-              <a:gd name="adj" fmla="val 7000"/>
+              <a:gd name="adj" fmla="val 5000"/>
             </a:avLst>
           </a:prstGeom>
           <a:solidFill>
-            <a:srgbClr val="332E27"/>
+            <a:srgbClr val="FFFDFA"/>
           </a:solidFill>
           <a:ln w="12700">
             <a:solidFill>
-              <a:srgbClr val="474036"/>
+              <a:srgbClr val="E8E0D2"/>
             </a:solidFill>
           </a:ln>
           <a:effectLst/>
@@ -6731,7 +7615,7 @@
       </p:sp>
       <p:pic>
         <p:nvPicPr>
-          <p:cNvPr id="8" name="Picture 7" descr="refresh.png"/>
+          <p:cNvPr id="8" name="Picture 7" descr="calendar.png"/>
           <p:cNvPicPr>
             <a:picLocks noChangeAspect="1"/>
           </p:cNvPicPr>
@@ -6745,8 +7629,8 @@
         </p:blipFill>
         <p:spPr>
           <a:xfrm>
-            <a:off x="1106424" y="2715768"/>
-            <a:ext cx="804672" cy="804672"/>
+            <a:off x="1161288" y="2715768"/>
+            <a:ext cx="868680" cy="868680"/>
           </a:xfrm>
           <a:prstGeom prst="rect">
             <a:avLst/>
@@ -6761,8 +7645,8 @@
         </p:nvSpPr>
         <p:spPr>
           <a:xfrm>
-            <a:off x="2148840" y="2633472"/>
-            <a:ext cx="3520439" cy="365760"/>
+            <a:off x="1161288" y="3794760"/>
+            <a:ext cx="2633472" cy="457200"/>
           </a:xfrm>
           <a:prstGeom prst="rect">
             <a:avLst/>
@@ -6781,13 +7665,13 @@
               </a:lnSpc>
             </a:pPr>
             <a:r>
-              <a:rPr sz="1800" b="1" i="0">
-                <a:solidFill>
-                  <a:srgbClr val="F7F1E6"/>
+              <a:rPr sz="1900" b="1" i="0">
+                <a:solidFill>
+                  <a:srgbClr val="2B2620"/>
                 </a:solidFill>
                 <a:latin typeface="Cambria"/>
               </a:rPr>
-              <a:t>Mises à jour</a:t>
+              <a:t>Réservation en ligne</a:t>
             </a:r>
           </a:p>
         </p:txBody>
@@ -6800,8 +7684,8 @@
         </p:nvSpPr>
         <p:spPr>
           <a:xfrm>
-            <a:off x="2148840" y="3090672"/>
-            <a:ext cx="3474720" cy="731520"/>
+            <a:off x="1161288" y="4270248"/>
+            <a:ext cx="2633472" cy="457200"/>
           </a:xfrm>
           <a:prstGeom prst="rect">
             <a:avLst/>
@@ -6816,44 +7700,40 @@
           <a:p>
             <a:pPr algn="l">
               <a:lnSpc>
-                <a:spcPct val="110000"/>
-              </a:lnSpc>
-            </a:pPr>
-            <a:r>
-              <a:rPr sz="1350" b="0" i="0">
-                <a:solidFill>
-                  <a:srgbClr val="B7AE9E"/>
-                </a:solidFill>
-                <a:latin typeface="Calibri"/>
-              </a:rPr>
-              <a:t>Menus, photos, horaires, promos : votre site reste toujours à jour.</a:t>
-            </a:r>
-          </a:p>
-        </p:txBody>
-      </p:sp>
-      <p:sp>
-        <p:nvSpPr>
-          <p:cNvPr id="11" name="Rounded Rectangle 10"/>
+                <a:spcPct val="100000"/>
+              </a:lnSpc>
+            </a:pPr>
+            <a:r>
+              <a:rPr sz="2000" b="1" i="0">
+                <a:solidFill>
+                  <a:srgbClr val="E8641B"/>
+                </a:solidFill>
+                <a:latin typeface="Cambria"/>
+              </a:rPr>
+              <a:t>+ 300 €</a:t>
+            </a:r>
+          </a:p>
+        </p:txBody>
+      </p:sp>
+      <p:sp>
+        <p:nvSpPr>
+          <p:cNvPr id="11" name="Rectangle 10"/>
           <p:cNvSpPr/>
           <p:nvPr/>
         </p:nvSpPr>
         <p:spPr>
           <a:xfrm>
-            <a:off x="6263640" y="2331720"/>
-            <a:ext cx="5074920" cy="1572768"/>
-          </a:xfrm>
-          <a:prstGeom prst="roundRect">
-            <a:avLst>
-              <a:gd name="adj" fmla="val 7000"/>
-            </a:avLst>
+            <a:off x="1161288" y="4818888"/>
+            <a:ext cx="2633472" cy="12801"/>
+          </a:xfrm>
+          <a:prstGeom prst="rect">
+            <a:avLst/>
           </a:prstGeom>
           <a:solidFill>
-            <a:srgbClr val="332E27"/>
+            <a:srgbClr val="E8E0D2"/>
           </a:solidFill>
-          <a:ln w="12700">
-            <a:solidFill>
-              <a:srgbClr val="474036"/>
-            </a:solidFill>
+          <a:ln>
+            <a:noFill/>
           </a:ln>
           <a:effectLst/>
         </p:spPr>
@@ -6879,9 +7759,96 @@
           </a:p>
         </p:txBody>
       </p:sp>
+      <p:sp>
+        <p:nvSpPr>
+          <p:cNvPr id="12" name="TextBox 11"/>
+          <p:cNvSpPr txBox="1"/>
+          <p:nvPr/>
+        </p:nvSpPr>
+        <p:spPr>
+          <a:xfrm>
+            <a:off x="1161288" y="4983479"/>
+            <a:ext cx="2670048" cy="914400"/>
+          </a:xfrm>
+          <a:prstGeom prst="rect">
+            <a:avLst/>
+          </a:prstGeom>
+          <a:noFill/>
+        </p:spPr>
+        <p:txBody>
+          <a:bodyPr wrap="square" anchor="t" lIns="0" rIns="0" tIns="0" bIns="0">
+            <a:spAutoFit/>
+          </a:bodyPr>
+          <a:lstStyle/>
+          <a:p>
+            <a:pPr algn="l">
+              <a:lnSpc>
+                <a:spcPct val="112000"/>
+              </a:lnSpc>
+            </a:pPr>
+            <a:r>
+              <a:rPr sz="1300" b="0" i="0">
+                <a:solidFill>
+                  <a:srgbClr val="6E665A"/>
+                </a:solidFill>
+                <a:latin typeface="Calibri"/>
+              </a:rPr>
+              <a:t>Vos clients réservent leur table directement sur le site, 24h/24.</a:t>
+            </a:r>
+          </a:p>
+        </p:txBody>
+      </p:sp>
+      <p:sp>
+        <p:nvSpPr>
+          <p:cNvPr id="13" name="Rounded Rectangle 12"/>
+          <p:cNvSpPr/>
+          <p:nvPr/>
+        </p:nvSpPr>
+        <p:spPr>
+          <a:xfrm>
+            <a:off x="4562856" y="2331720"/>
+            <a:ext cx="3401568" cy="3200400"/>
+          </a:xfrm>
+          <a:prstGeom prst="roundRect">
+            <a:avLst>
+              <a:gd name="adj" fmla="val 5000"/>
+            </a:avLst>
+          </a:prstGeom>
+          <a:solidFill>
+            <a:srgbClr val="FFFDFA"/>
+          </a:solidFill>
+          <a:ln w="12700">
+            <a:solidFill>
+              <a:srgbClr val="E8E0D2"/>
+            </a:solidFill>
+          </a:ln>
+          <a:effectLst/>
+        </p:spPr>
+        <p:style>
+          <a:lnRef idx="1">
+            <a:schemeClr val="accent1"/>
+          </a:lnRef>
+          <a:fillRef idx="3">
+            <a:schemeClr val="accent1"/>
+          </a:fillRef>
+          <a:effectRef idx="2">
+            <a:schemeClr val="accent1"/>
+          </a:effectRef>
+          <a:fontRef idx="minor">
+            <a:schemeClr val="lt1"/>
+          </a:fontRef>
+        </p:style>
+        <p:txBody>
+          <a:bodyPr rtlCol="0" anchor="ctr"/>
+          <a:lstStyle/>
+          <a:p>
+            <a:pPr algn="ctr"/>
+          </a:p>
+        </p:txBody>
+      </p:sp>
       <p:pic>
         <p:nvPicPr>
-          <p:cNvPr id="12" name="Picture 11" descr="pencil.png"/>
+          <p:cNvPr id="14" name="Picture 13" descr="globe.png"/>
           <p:cNvPicPr>
             <a:picLocks noChangeAspect="1"/>
           </p:cNvPicPr>
@@ -6895,8 +7862,8 @@
         </p:blipFill>
         <p:spPr>
           <a:xfrm>
-            <a:off x="6592824" y="2715768"/>
-            <a:ext cx="804672" cy="804672"/>
+            <a:off x="4946904" y="2715768"/>
+            <a:ext cx="868680" cy="868680"/>
           </a:xfrm>
           <a:prstGeom prst="rect">
             <a:avLst/>
@@ -6905,14 +7872,14 @@
       </p:pic>
       <p:sp>
         <p:nvSpPr>
-          <p:cNvPr id="13" name="TextBox 12"/>
-          <p:cNvSpPr txBox="1"/>
-          <p:nvPr/>
-        </p:nvSpPr>
-        <p:spPr>
-          <a:xfrm>
-            <a:off x="7635240" y="2633472"/>
-            <a:ext cx="3520439" cy="365760"/>
+          <p:cNvPr id="15" name="TextBox 14"/>
+          <p:cNvSpPr txBox="1"/>
+          <p:nvPr/>
+        </p:nvSpPr>
+        <p:spPr>
+          <a:xfrm>
+            <a:off x="4946904" y="3794760"/>
+            <a:ext cx="2633472" cy="457200"/>
           </a:xfrm>
           <a:prstGeom prst="rect">
             <a:avLst/>
@@ -6931,27 +7898,27 @@
               </a:lnSpc>
             </a:pPr>
             <a:r>
-              <a:rPr sz="1800" b="1" i="0">
-                <a:solidFill>
-                  <a:srgbClr val="F7F1E6"/>
+              <a:rPr sz="1900" b="1" i="0">
+                <a:solidFill>
+                  <a:srgbClr val="2B2620"/>
                 </a:solidFill>
                 <a:latin typeface="Cambria"/>
               </a:rPr>
-              <a:t>Modifications</a:t>
-            </a:r>
-          </a:p>
-        </p:txBody>
-      </p:sp>
-      <p:sp>
-        <p:nvSpPr>
-          <p:cNvPr id="14" name="TextBox 13"/>
-          <p:cNvSpPr txBox="1"/>
-          <p:nvPr/>
-        </p:nvSpPr>
-        <p:spPr>
-          <a:xfrm>
-            <a:off x="7635240" y="3090672"/>
-            <a:ext cx="3474720" cy="731520"/>
+              <a:t>Site multilingue</a:t>
+            </a:r>
+          </a:p>
+        </p:txBody>
+      </p:sp>
+      <p:sp>
+        <p:nvSpPr>
+          <p:cNvPr id="16" name="TextBox 15"/>
+          <p:cNvSpPr txBox="1"/>
+          <p:nvPr/>
+        </p:nvSpPr>
+        <p:spPr>
+          <a:xfrm>
+            <a:off x="4946904" y="4270248"/>
+            <a:ext cx="2633472" cy="457200"/>
           </a:xfrm>
           <a:prstGeom prst="rect">
             <a:avLst/>
@@ -6966,44 +7933,40 @@
           <a:p>
             <a:pPr algn="l">
               <a:lnSpc>
-                <a:spcPct val="110000"/>
-              </a:lnSpc>
-            </a:pPr>
-            <a:r>
-              <a:rPr sz="1350" b="0" i="0">
-                <a:solidFill>
-                  <a:srgbClr val="B7AE9E"/>
-                </a:solidFill>
-                <a:latin typeface="Calibri"/>
-              </a:rPr>
-              <a:t>Un changement à faire ? On l'applique vite, sans surcoût surprise.</a:t>
-            </a:r>
-          </a:p>
-        </p:txBody>
-      </p:sp>
-      <p:sp>
-        <p:nvSpPr>
-          <p:cNvPr id="15" name="Rounded Rectangle 14"/>
+                <a:spcPct val="100000"/>
+              </a:lnSpc>
+            </a:pPr>
+            <a:r>
+              <a:rPr sz="2000" b="1" i="0">
+                <a:solidFill>
+                  <a:srgbClr val="E8641B"/>
+                </a:solidFill>
+                <a:latin typeface="Cambria"/>
+              </a:rPr>
+              <a:t>+ 300 €</a:t>
+            </a:r>
+          </a:p>
+        </p:txBody>
+      </p:sp>
+      <p:sp>
+        <p:nvSpPr>
+          <p:cNvPr id="17" name="Rectangle 16"/>
           <p:cNvSpPr/>
           <p:nvPr/>
         </p:nvSpPr>
         <p:spPr>
           <a:xfrm>
-            <a:off x="777240" y="4251960"/>
-            <a:ext cx="5074920" cy="1572768"/>
-          </a:xfrm>
-          <a:prstGeom prst="roundRect">
-            <a:avLst>
-              <a:gd name="adj" fmla="val 7000"/>
-            </a:avLst>
+            <a:off x="4946904" y="4818888"/>
+            <a:ext cx="2633472" cy="12801"/>
+          </a:xfrm>
+          <a:prstGeom prst="rect">
+            <a:avLst/>
           </a:prstGeom>
           <a:solidFill>
-            <a:srgbClr val="332E27"/>
+            <a:srgbClr val="E8E0D2"/>
           </a:solidFill>
-          <a:ln w="12700">
-            <a:solidFill>
-              <a:srgbClr val="474036"/>
-            </a:solidFill>
+          <a:ln>
+            <a:noFill/>
           </a:ln>
           <a:effectLst/>
         </p:spPr>
@@ -7029,9 +7992,96 @@
           </a:p>
         </p:txBody>
       </p:sp>
+      <p:sp>
+        <p:nvSpPr>
+          <p:cNvPr id="18" name="TextBox 17"/>
+          <p:cNvSpPr txBox="1"/>
+          <p:nvPr/>
+        </p:nvSpPr>
+        <p:spPr>
+          <a:xfrm>
+            <a:off x="4946904" y="4983479"/>
+            <a:ext cx="2670048" cy="914400"/>
+          </a:xfrm>
+          <a:prstGeom prst="rect">
+            <a:avLst/>
+          </a:prstGeom>
+          <a:noFill/>
+        </p:spPr>
+        <p:txBody>
+          <a:bodyPr wrap="square" anchor="t" lIns="0" rIns="0" tIns="0" bIns="0">
+            <a:spAutoFit/>
+          </a:bodyPr>
+          <a:lstStyle/>
+          <a:p>
+            <a:pPr algn="l">
+              <a:lnSpc>
+                <a:spcPct val="112000"/>
+              </a:lnSpc>
+            </a:pPr>
+            <a:r>
+              <a:rPr sz="1300" b="0" i="0">
+                <a:solidFill>
+                  <a:srgbClr val="6E665A"/>
+                </a:solidFill>
+                <a:latin typeface="Calibri"/>
+              </a:rPr>
+              <a:t>Touchez la clientèle touristique : votre site disponible en plusieurs langues.</a:t>
+            </a:r>
+          </a:p>
+        </p:txBody>
+      </p:sp>
+      <p:sp>
+        <p:nvSpPr>
+          <p:cNvPr id="19" name="Rounded Rectangle 18"/>
+          <p:cNvSpPr/>
+          <p:nvPr/>
+        </p:nvSpPr>
+        <p:spPr>
+          <a:xfrm>
+            <a:off x="8348472" y="2331720"/>
+            <a:ext cx="3401568" cy="3200400"/>
+          </a:xfrm>
+          <a:prstGeom prst="roundRect">
+            <a:avLst>
+              <a:gd name="adj" fmla="val 5000"/>
+            </a:avLst>
+          </a:prstGeom>
+          <a:solidFill>
+            <a:srgbClr val="FFFDFA"/>
+          </a:solidFill>
+          <a:ln w="12700">
+            <a:solidFill>
+              <a:srgbClr val="E8E0D2"/>
+            </a:solidFill>
+          </a:ln>
+          <a:effectLst/>
+        </p:spPr>
+        <p:style>
+          <a:lnRef idx="1">
+            <a:schemeClr val="accent1"/>
+          </a:lnRef>
+          <a:fillRef idx="3">
+            <a:schemeClr val="accent1"/>
+          </a:fillRef>
+          <a:effectRef idx="2">
+            <a:schemeClr val="accent1"/>
+          </a:effectRef>
+          <a:fontRef idx="minor">
+            <a:schemeClr val="lt1"/>
+          </a:fontRef>
+        </p:style>
+        <p:txBody>
+          <a:bodyPr rtlCol="0" anchor="ctr"/>
+          <a:lstStyle/>
+          <a:p>
+            <a:pPr algn="ctr"/>
+          </a:p>
+        </p:txBody>
+      </p:sp>
       <p:pic>
         <p:nvPicPr>
-          <p:cNvPr id="16" name="Picture 15" descr="gear.png"/>
+          <p:cNvPr id="20" name="Picture 19" descr="card.png"/>
           <p:cNvPicPr>
             <a:picLocks noChangeAspect="1"/>
           </p:cNvPicPr>
@@ -7045,8 +8095,8 @@
         </p:blipFill>
         <p:spPr>
           <a:xfrm>
-            <a:off x="1106424" y="4636008"/>
-            <a:ext cx="804672" cy="804672"/>
+            <a:off x="8732520" y="2715768"/>
+            <a:ext cx="868680" cy="868680"/>
           </a:xfrm>
           <a:prstGeom prst="rect">
             <a:avLst/>
@@ -7055,14 +8105,14 @@
       </p:pic>
       <p:sp>
         <p:nvSpPr>
-          <p:cNvPr id="17" name="TextBox 16"/>
-          <p:cNvSpPr txBox="1"/>
-          <p:nvPr/>
-        </p:nvSpPr>
-        <p:spPr>
-          <a:xfrm>
-            <a:off x="2148840" y="4553712"/>
-            <a:ext cx="3520439" cy="365760"/>
+          <p:cNvPr id="21" name="TextBox 20"/>
+          <p:cNvSpPr txBox="1"/>
+          <p:nvPr/>
+        </p:nvSpPr>
+        <p:spPr>
+          <a:xfrm>
+            <a:off x="8732520" y="3794760"/>
+            <a:ext cx="2633472" cy="457200"/>
           </a:xfrm>
           <a:prstGeom prst="rect">
             <a:avLst/>
@@ -7081,27 +8131,27 @@
               </a:lnSpc>
             </a:pPr>
             <a:r>
-              <a:rPr sz="1800" b="1" i="0">
-                <a:solidFill>
-                  <a:srgbClr val="F7F1E6"/>
+              <a:rPr sz="1900" b="1" i="0">
+                <a:solidFill>
+                  <a:srgbClr val="2B2620"/>
                 </a:solidFill>
                 <a:latin typeface="Cambria"/>
               </a:rPr>
-              <a:t>Maintenance</a:t>
-            </a:r>
-          </a:p>
-        </p:txBody>
-      </p:sp>
-      <p:sp>
-        <p:nvSpPr>
-          <p:cNvPr id="18" name="TextBox 17"/>
-          <p:cNvSpPr txBox="1"/>
-          <p:nvPr/>
-        </p:nvSpPr>
-        <p:spPr>
-          <a:xfrm>
-            <a:off x="2148840" y="5010912"/>
-            <a:ext cx="3474720" cy="731520"/>
+              <a:t>Paiement en ligne</a:t>
+            </a:r>
+          </a:p>
+        </p:txBody>
+      </p:sp>
+      <p:sp>
+        <p:nvSpPr>
+          <p:cNvPr id="22" name="TextBox 21"/>
+          <p:cNvSpPr txBox="1"/>
+          <p:nvPr/>
+        </p:nvSpPr>
+        <p:spPr>
+          <a:xfrm>
+            <a:off x="8732520" y="4270248"/>
+            <a:ext cx="2633472" cy="457200"/>
           </a:xfrm>
           <a:prstGeom prst="rect">
             <a:avLst/>
@@ -7116,44 +8166,40 @@
           <a:p>
             <a:pPr algn="l">
               <a:lnSpc>
-                <a:spcPct val="110000"/>
-              </a:lnSpc>
-            </a:pPr>
-            <a:r>
-              <a:rPr sz="1350" b="0" i="0">
-                <a:solidFill>
-                  <a:srgbClr val="B7AE9E"/>
-                </a:solidFill>
-                <a:latin typeface="Calibri"/>
-              </a:rPr>
-              <a:t>Sécurité, sauvegardes et performances suivies en continu.</a:t>
-            </a:r>
-          </a:p>
-        </p:txBody>
-      </p:sp>
-      <p:sp>
-        <p:nvSpPr>
-          <p:cNvPr id="19" name="Rounded Rectangle 18"/>
+                <a:spcPct val="100000"/>
+              </a:lnSpc>
+            </a:pPr>
+            <a:r>
+              <a:rPr sz="2000" b="1" i="0">
+                <a:solidFill>
+                  <a:srgbClr val="E8641B"/>
+                </a:solidFill>
+                <a:latin typeface="Cambria"/>
+              </a:rPr>
+              <a:t>+ 200 €</a:t>
+            </a:r>
+          </a:p>
+        </p:txBody>
+      </p:sp>
+      <p:sp>
+        <p:nvSpPr>
+          <p:cNvPr id="23" name="Rectangle 22"/>
           <p:cNvSpPr/>
           <p:nvPr/>
         </p:nvSpPr>
         <p:spPr>
           <a:xfrm>
-            <a:off x="6263640" y="4251960"/>
-            <a:ext cx="5074920" cy="1572768"/>
-          </a:xfrm>
-          <a:prstGeom prst="roundRect">
-            <a:avLst>
-              <a:gd name="adj" fmla="val 7000"/>
-            </a:avLst>
+            <a:off x="8732520" y="4818888"/>
+            <a:ext cx="2633472" cy="12801"/>
+          </a:xfrm>
+          <a:prstGeom prst="rect">
+            <a:avLst/>
           </a:prstGeom>
           <a:solidFill>
-            <a:srgbClr val="332E27"/>
+            <a:srgbClr val="E8E0D2"/>
           </a:solidFill>
-          <a:ln w="12700">
-            <a:solidFill>
-              <a:srgbClr val="474036"/>
-            </a:solidFill>
+          <a:ln>
+            <a:noFill/>
           </a:ln>
           <a:effectLst/>
         </p:spPr>
@@ -7179,40 +8225,16 @@
           </a:p>
         </p:txBody>
       </p:sp>
-      <p:pic>
-        <p:nvPicPr>
-          <p:cNvPr id="20" name="Picture 19" descr="ticket.png"/>
-          <p:cNvPicPr>
-            <a:picLocks noChangeAspect="1"/>
-          </p:cNvPicPr>
-          <p:nvPr/>
-        </p:nvPicPr>
-        <p:blipFill>
-          <a:blip r:embed="rId5"/>
-          <a:stretch>
-            <a:fillRect/>
-          </a:stretch>
-        </p:blipFill>
-        <p:spPr>
-          <a:xfrm>
-            <a:off x="6592824" y="4636008"/>
-            <a:ext cx="804672" cy="804672"/>
-          </a:xfrm>
-          <a:prstGeom prst="rect">
-            <a:avLst/>
-          </a:prstGeom>
-        </p:spPr>
-      </p:pic>
-      <p:sp>
-        <p:nvSpPr>
-          <p:cNvPr id="21" name="TextBox 20"/>
-          <p:cNvSpPr txBox="1"/>
-          <p:nvPr/>
-        </p:nvSpPr>
-        <p:spPr>
-          <a:xfrm>
-            <a:off x="7635240" y="4553712"/>
-            <a:ext cx="3520439" cy="365760"/>
+      <p:sp>
+        <p:nvSpPr>
+          <p:cNvPr id="24" name="TextBox 23"/>
+          <p:cNvSpPr txBox="1"/>
+          <p:nvPr/>
+        </p:nvSpPr>
+        <p:spPr>
+          <a:xfrm>
+            <a:off x="8732520" y="4983479"/>
+            <a:ext cx="2670048" cy="914400"/>
           </a:xfrm>
           <a:prstGeom prst="rect">
             <a:avLst/>
@@ -7227,56 +8249,56 @@
           <a:p>
             <a:pPr algn="l">
               <a:lnSpc>
+                <a:spcPct val="112000"/>
+              </a:lnSpc>
+            </a:pPr>
+            <a:r>
+              <a:rPr sz="1300" b="0" i="0">
+                <a:solidFill>
+                  <a:srgbClr val="6E665A"/>
+                </a:solidFill>
+                <a:latin typeface="Calibri"/>
+              </a:rPr>
+              <a:t>Acompte à la réservation ou paiement à la commande, en toute sécurité.</a:t>
+            </a:r>
+          </a:p>
+        </p:txBody>
+      </p:sp>
+      <p:sp>
+        <p:nvSpPr>
+          <p:cNvPr id="25" name="TextBox 24"/>
+          <p:cNvSpPr txBox="1"/>
+          <p:nvPr/>
+        </p:nvSpPr>
+        <p:spPr>
+          <a:xfrm>
+            <a:off x="777240" y="5806440"/>
+            <a:ext cx="10607040" cy="365760"/>
+          </a:xfrm>
+          <a:prstGeom prst="rect">
+            <a:avLst/>
+          </a:prstGeom>
+          <a:noFill/>
+        </p:spPr>
+        <p:txBody>
+          <a:bodyPr wrap="square" anchor="t" lIns="0" rIns="0" tIns="0" bIns="0">
+            <a:spAutoFit/>
+          </a:bodyPr>
+          <a:lstStyle/>
+          <a:p>
+            <a:pPr algn="l">
+              <a:lnSpc>
                 <a:spcPct val="100000"/>
               </a:lnSpc>
             </a:pPr>
             <a:r>
-              <a:rPr sz="1800" b="1" i="0">
-                <a:solidFill>
-                  <a:srgbClr val="F7F1E6"/>
-                </a:solidFill>
-                <a:latin typeface="Cambria"/>
-              </a:rPr>
-              <a:t>Tickets support</a:t>
-            </a:r>
-          </a:p>
-        </p:txBody>
-      </p:sp>
-      <p:sp>
-        <p:nvSpPr>
-          <p:cNvPr id="22" name="TextBox 21"/>
-          <p:cNvSpPr txBox="1"/>
-          <p:nvPr/>
-        </p:nvSpPr>
-        <p:spPr>
-          <a:xfrm>
-            <a:off x="7635240" y="5010912"/>
-            <a:ext cx="3474720" cy="731520"/>
-          </a:xfrm>
-          <a:prstGeom prst="rect">
-            <a:avLst/>
-          </a:prstGeom>
-          <a:noFill/>
-        </p:spPr>
-        <p:txBody>
-          <a:bodyPr wrap="square" anchor="t" lIns="0" rIns="0" tIns="0" bIns="0">
-            <a:spAutoFit/>
-          </a:bodyPr>
-          <a:lstStyle/>
-          <a:p>
-            <a:pPr algn="l">
-              <a:lnSpc>
-                <a:spcPct val="110000"/>
-              </a:lnSpc>
-            </a:pPr>
-            <a:r>
-              <a:rPr sz="1350" b="0" i="0">
-                <a:solidFill>
-                  <a:srgbClr val="B7AE9E"/>
+              <a:rPr sz="1250" b="0" i="1">
+                <a:solidFill>
+                  <a:srgbClr val="8C8478"/>
                 </a:solidFill>
                 <a:latin typeface="Calibri"/>
               </a:rPr>
-              <a:t>Un souci ? Vous ouvrez un ticket, on le prend en charge, on le résout.</a:t>
+              <a:t>Boutique e-commerce disponible sur devis (projets hors restauration).</a:t>
             </a:r>
           </a:p>
         </p:txBody>
@@ -7314,7 +8336,7 @@
             <a:avLst/>
           </a:prstGeom>
           <a:solidFill>
-            <a:srgbClr val="F4EEE3"/>
+            <a:srgbClr val="2B2620"/>
           </a:solidFill>
           <a:ln>
             <a:noFill/>
@@ -7351,7 +8373,7 @@
         </p:nvSpPr>
         <p:spPr>
           <a:xfrm>
-            <a:off x="777240" y="667512"/>
+            <a:off x="777240" y="649224"/>
             <a:ext cx="100584" cy="100584"/>
           </a:xfrm>
           <a:prstGeom prst="ellipse">
@@ -7395,7 +8417,7 @@
         </p:nvSpPr>
         <p:spPr>
           <a:xfrm>
-            <a:off x="996695" y="594359"/>
+            <a:off x="996695" y="576072"/>
             <a:ext cx="5486400" cy="274320"/>
           </a:xfrm>
           <a:prstGeom prst="rect">
@@ -7421,7 +8443,7 @@
                 </a:solidFill>
                 <a:latin typeface="Calibri"/>
               </a:rPr>
-              <a:t>SUPPORT INCLUS</a:t>
+              <a:t>LA DIFFÉRENCE UNIT</a:t>
             </a:r>
           </a:p>
         </p:txBody>
@@ -7434,7 +8456,7 @@
         </p:nvSpPr>
         <p:spPr>
           <a:xfrm>
-            <a:off x="777240" y="960120"/>
+            <a:off x="777240" y="941832"/>
             <a:ext cx="10607040" cy="731520"/>
           </a:xfrm>
           <a:prstGeom prst="rect">
@@ -7456,34 +8478,77 @@
             <a:r>
               <a:rPr sz="3300" b="1" i="0">
                 <a:solidFill>
-                  <a:srgbClr val="2B2620"/>
+                  <a:srgbClr val="F7F1E6"/>
                 </a:solidFill>
                 <a:latin typeface="Cambria"/>
               </a:rPr>
-              <a:t>Un problème ? Un ticket. Point final.</a:t>
-            </a:r>
-          </a:p>
-        </p:txBody>
-      </p:sp>
-      <p:sp>
-        <p:nvSpPr>
-          <p:cNvPr id="6" name="Rectangle 5"/>
+              <a:t>On ne livre pas un site. On s'en occupe.</a:t>
+            </a:r>
+          </a:p>
+        </p:txBody>
+      </p:sp>
+      <p:sp>
+        <p:nvSpPr>
+          <p:cNvPr id="6" name="TextBox 5"/>
+          <p:cNvSpPr txBox="1"/>
+          <p:nvPr/>
+        </p:nvSpPr>
+        <p:spPr>
+          <a:xfrm>
+            <a:off x="795528" y="1627632"/>
+            <a:ext cx="10424160" cy="457200"/>
+          </a:xfrm>
+          <a:prstGeom prst="rect">
+            <a:avLst/>
+          </a:prstGeom>
+          <a:noFill/>
+        </p:spPr>
+        <p:txBody>
+          <a:bodyPr wrap="square" anchor="t" lIns="0" rIns="0" tIns="0" bIns="0">
+            <a:spAutoFit/>
+          </a:bodyPr>
+          <a:lstStyle/>
+          <a:p>
+            <a:pPr algn="l">
+              <a:lnSpc>
+                <a:spcPct val="100000"/>
+              </a:lnSpc>
+            </a:pPr>
+            <a:r>
+              <a:rPr sz="1550" b="0" i="0">
+                <a:solidFill>
+                  <a:srgbClr val="B7AE9E"/>
+                </a:solidFill>
+                <a:latin typeface="Calibri"/>
+              </a:rPr>
+              <a:t>Là où les autres vous laissent seul après la mise en ligne, UNIT reste à vos côtés.</a:t>
+            </a:r>
+          </a:p>
+        </p:txBody>
+      </p:sp>
+      <p:sp>
+        <p:nvSpPr>
+          <p:cNvPr id="7" name="Rounded Rectangle 6"/>
           <p:cNvSpPr/>
           <p:nvPr/>
         </p:nvSpPr>
         <p:spPr>
           <a:xfrm>
-            <a:off x="1325880" y="3611880"/>
-            <a:ext cx="8723376" cy="18288"/>
-          </a:xfrm>
-          <a:prstGeom prst="rect">
-            <a:avLst/>
+            <a:off x="777240" y="2331720"/>
+            <a:ext cx="5074920" cy="1572768"/>
+          </a:xfrm>
+          <a:prstGeom prst="roundRect">
+            <a:avLst>
+              <a:gd name="adj" fmla="val 7000"/>
+            </a:avLst>
           </a:prstGeom>
           <a:solidFill>
-            <a:srgbClr val="E8E0D2"/>
+            <a:srgbClr val="332E27"/>
           </a:solidFill>
-          <a:ln>
-            <a:noFill/>
+          <a:ln w="12700">
+            <a:solidFill>
+              <a:srgbClr val="474036"/>
+            </a:solidFill>
           </a:ln>
           <a:effectLst/>
         </p:spPr>
@@ -7509,57 +8574,9 @@
           </a:p>
         </p:txBody>
       </p:sp>
-      <p:sp>
-        <p:nvSpPr>
-          <p:cNvPr id="7" name="Rounded Rectangle 6"/>
-          <p:cNvSpPr/>
-          <p:nvPr/>
-        </p:nvSpPr>
-        <p:spPr>
-          <a:xfrm>
-            <a:off x="777240" y="2468880"/>
-            <a:ext cx="2615184" cy="3566160"/>
-          </a:xfrm>
-          <a:prstGeom prst="roundRect">
-            <a:avLst>
-              <a:gd name="adj" fmla="val 6000"/>
-            </a:avLst>
-          </a:prstGeom>
-          <a:solidFill>
-            <a:srgbClr val="FFFDFA"/>
-          </a:solidFill>
-          <a:ln w="12700">
-            <a:solidFill>
-              <a:srgbClr val="E8E0D2"/>
-            </a:solidFill>
-          </a:ln>
-          <a:effectLst/>
-        </p:spPr>
-        <p:style>
-          <a:lnRef idx="1">
-            <a:schemeClr val="accent1"/>
-          </a:lnRef>
-          <a:fillRef idx="3">
-            <a:schemeClr val="accent1"/>
-          </a:fillRef>
-          <a:effectRef idx="2">
-            <a:schemeClr val="accent1"/>
-          </a:effectRef>
-          <a:fontRef idx="minor">
-            <a:schemeClr val="lt1"/>
-          </a:fontRef>
-        </p:style>
-        <p:txBody>
-          <a:bodyPr rtlCol="0" anchor="ctr"/>
-          <a:lstStyle/>
-          <a:p>
-            <a:pPr algn="ctr"/>
-          </a:p>
-        </p:txBody>
-      </p:sp>
       <p:pic>
         <p:nvPicPr>
-          <p:cNvPr id="8" name="Picture 7" descr="bell.png"/>
+          <p:cNvPr id="8" name="Picture 7" descr="refresh.png"/>
           <p:cNvPicPr>
             <a:picLocks noChangeAspect="1"/>
           </p:cNvPicPr>
@@ -7573,8 +8590,8 @@
         </p:blipFill>
         <p:spPr>
           <a:xfrm>
-            <a:off x="1627631" y="2926080"/>
-            <a:ext cx="914400" cy="914400"/>
+            <a:off x="1106424" y="2715768"/>
+            <a:ext cx="804672" cy="804672"/>
           </a:xfrm>
           <a:prstGeom prst="rect">
             <a:avLst/>
@@ -7589,137 +8606,98 @@
         </p:nvSpPr>
         <p:spPr>
           <a:xfrm>
-            <a:off x="777240" y="3931920"/>
-            <a:ext cx="2615184" cy="365760"/>
-          </a:xfrm>
-          <a:prstGeom prst="rect">
-            <a:avLst/>
-          </a:prstGeom>
-          <a:noFill/>
-        </p:spPr>
-        <p:txBody>
-          <a:bodyPr wrap="square" anchor="t" lIns="0" rIns="0" tIns="0" bIns="0">
-            <a:spAutoFit/>
-          </a:bodyPr>
-          <a:lstStyle/>
-          <a:p>
-            <a:pPr algn="ctr">
+            <a:off x="2148840" y="2633472"/>
+            <a:ext cx="3520439" cy="365760"/>
+          </a:xfrm>
+          <a:prstGeom prst="rect">
+            <a:avLst/>
+          </a:prstGeom>
+          <a:noFill/>
+        </p:spPr>
+        <p:txBody>
+          <a:bodyPr wrap="square" anchor="t" lIns="0" rIns="0" tIns="0" bIns="0">
+            <a:spAutoFit/>
+          </a:bodyPr>
+          <a:lstStyle/>
+          <a:p>
+            <a:pPr algn="l">
               <a:lnSpc>
                 <a:spcPct val="100000"/>
               </a:lnSpc>
             </a:pPr>
             <a:r>
-              <a:rPr sz="1150" b="1" i="0">
-                <a:solidFill>
-                  <a:srgbClr val="E8641B"/>
+              <a:rPr sz="1800" b="1" i="0">
+                <a:solidFill>
+                  <a:srgbClr val="F7F1E6"/>
+                </a:solidFill>
+                <a:latin typeface="Cambria"/>
+              </a:rPr>
+              <a:t>Mises à jour</a:t>
+            </a:r>
+          </a:p>
+        </p:txBody>
+      </p:sp>
+      <p:sp>
+        <p:nvSpPr>
+          <p:cNvPr id="10" name="TextBox 9"/>
+          <p:cNvSpPr txBox="1"/>
+          <p:nvPr/>
+        </p:nvSpPr>
+        <p:spPr>
+          <a:xfrm>
+            <a:off x="2148840" y="3090672"/>
+            <a:ext cx="3474720" cy="731520"/>
+          </a:xfrm>
+          <a:prstGeom prst="rect">
+            <a:avLst/>
+          </a:prstGeom>
+          <a:noFill/>
+        </p:spPr>
+        <p:txBody>
+          <a:bodyPr wrap="square" anchor="t" lIns="0" rIns="0" tIns="0" bIns="0">
+            <a:spAutoFit/>
+          </a:bodyPr>
+          <a:lstStyle/>
+          <a:p>
+            <a:pPr algn="l">
+              <a:lnSpc>
+                <a:spcPct val="110000"/>
+              </a:lnSpc>
+            </a:pPr>
+            <a:r>
+              <a:rPr sz="1350" b="0" i="0">
+                <a:solidFill>
+                  <a:srgbClr val="B7AE9E"/>
                 </a:solidFill>
                 <a:latin typeface="Calibri"/>
               </a:rPr>
-              <a:t>ÉTAPE 1</a:t>
-            </a:r>
-          </a:p>
-        </p:txBody>
-      </p:sp>
-      <p:sp>
-        <p:nvSpPr>
-          <p:cNvPr id="10" name="TextBox 9"/>
-          <p:cNvSpPr txBox="1"/>
-          <p:nvPr/>
-        </p:nvSpPr>
-        <p:spPr>
-          <a:xfrm>
-            <a:off x="777240" y="4251960"/>
-            <a:ext cx="2615184" cy="457200"/>
-          </a:xfrm>
-          <a:prstGeom prst="rect">
-            <a:avLst/>
-          </a:prstGeom>
-          <a:noFill/>
-        </p:spPr>
-        <p:txBody>
-          <a:bodyPr wrap="square" anchor="t" lIns="0" rIns="0" tIns="0" bIns="0">
-            <a:spAutoFit/>
-          </a:bodyPr>
-          <a:lstStyle/>
-          <a:p>
-            <a:pPr algn="ctr">
-              <a:lnSpc>
-                <a:spcPct val="100000"/>
-              </a:lnSpc>
-            </a:pPr>
-            <a:r>
-              <a:rPr sz="1700" b="1" i="0">
-                <a:solidFill>
-                  <a:srgbClr val="2B2620"/>
-                </a:solidFill>
-                <a:latin typeface="Cambria"/>
-              </a:rPr>
-              <a:t>Signalement</a:t>
-            </a:r>
-          </a:p>
-        </p:txBody>
-      </p:sp>
-      <p:sp>
-        <p:nvSpPr>
-          <p:cNvPr id="11" name="TextBox 10"/>
-          <p:cNvSpPr txBox="1"/>
-          <p:nvPr/>
-        </p:nvSpPr>
-        <p:spPr>
-          <a:xfrm>
-            <a:off x="1051560" y="4800600"/>
-            <a:ext cx="2066543" cy="1005840"/>
-          </a:xfrm>
-          <a:prstGeom prst="rect">
-            <a:avLst/>
-          </a:prstGeom>
-          <a:noFill/>
-        </p:spPr>
-        <p:txBody>
-          <a:bodyPr wrap="square" anchor="t" lIns="0" rIns="0" tIns="0" bIns="0">
-            <a:spAutoFit/>
-          </a:bodyPr>
-          <a:lstStyle/>
-          <a:p>
-            <a:pPr algn="ctr">
-              <a:lnSpc>
-                <a:spcPct val="112000"/>
-              </a:lnSpc>
-            </a:pPr>
-            <a:r>
-              <a:rPr sz="1300" b="0" i="0">
-                <a:solidFill>
-                  <a:srgbClr val="6E665A"/>
-                </a:solidFill>
-                <a:latin typeface="Calibri"/>
-              </a:rPr>
-              <a:t>Vous ouvrez un ticket en un clic, à tout moment.</a:t>
-            </a:r>
-          </a:p>
-        </p:txBody>
-      </p:sp>
-      <p:sp>
-        <p:nvSpPr>
-          <p:cNvPr id="12" name="Rounded Rectangle 11"/>
+              <a:t>Menus, photos, horaires, promos : votre site reste toujours à jour.</a:t>
+            </a:r>
+          </a:p>
+        </p:txBody>
+      </p:sp>
+      <p:sp>
+        <p:nvSpPr>
+          <p:cNvPr id="11" name="Rounded Rectangle 10"/>
           <p:cNvSpPr/>
           <p:nvPr/>
         </p:nvSpPr>
         <p:spPr>
           <a:xfrm>
-            <a:off x="3685031" y="2468880"/>
-            <a:ext cx="2615184" cy="3566160"/>
+            <a:off x="6263640" y="2331720"/>
+            <a:ext cx="5074920" cy="1572768"/>
           </a:xfrm>
           <a:prstGeom prst="roundRect">
             <a:avLst>
-              <a:gd name="adj" fmla="val 6000"/>
+              <a:gd name="adj" fmla="val 7000"/>
             </a:avLst>
           </a:prstGeom>
           <a:solidFill>
-            <a:srgbClr val="FFFDFA"/>
+            <a:srgbClr val="332E27"/>
           </a:solidFill>
           <a:ln w="12700">
             <a:solidFill>
-              <a:srgbClr val="E8E0D2"/>
+              <a:srgbClr val="474036"/>
             </a:solidFill>
           </a:ln>
           <a:effectLst/>
@@ -7748,7 +8726,7 @@
       </p:sp>
       <p:pic>
         <p:nvPicPr>
-          <p:cNvPr id="13" name="Picture 12" descr="person.png"/>
+          <p:cNvPr id="12" name="Picture 11" descr="pencil.png"/>
           <p:cNvPicPr>
             <a:picLocks noChangeAspect="1"/>
           </p:cNvPicPr>
@@ -7762,8 +8740,8 @@
         </p:blipFill>
         <p:spPr>
           <a:xfrm>
-            <a:off x="4535423" y="2926080"/>
-            <a:ext cx="914400" cy="914400"/>
+            <a:off x="6592824" y="2715768"/>
+            <a:ext cx="804672" cy="804672"/>
           </a:xfrm>
           <a:prstGeom prst="rect">
             <a:avLst/>
@@ -7772,143 +8750,104 @@
       </p:pic>
       <p:sp>
         <p:nvSpPr>
+          <p:cNvPr id="13" name="TextBox 12"/>
+          <p:cNvSpPr txBox="1"/>
+          <p:nvPr/>
+        </p:nvSpPr>
+        <p:spPr>
+          <a:xfrm>
+            <a:off x="7635240" y="2633472"/>
+            <a:ext cx="3520439" cy="365760"/>
+          </a:xfrm>
+          <a:prstGeom prst="rect">
+            <a:avLst/>
+          </a:prstGeom>
+          <a:noFill/>
+        </p:spPr>
+        <p:txBody>
+          <a:bodyPr wrap="square" anchor="t" lIns="0" rIns="0" tIns="0" bIns="0">
+            <a:spAutoFit/>
+          </a:bodyPr>
+          <a:lstStyle/>
+          <a:p>
+            <a:pPr algn="l">
+              <a:lnSpc>
+                <a:spcPct val="100000"/>
+              </a:lnSpc>
+            </a:pPr>
+            <a:r>
+              <a:rPr sz="1800" b="1" i="0">
+                <a:solidFill>
+                  <a:srgbClr val="F7F1E6"/>
+                </a:solidFill>
+                <a:latin typeface="Cambria"/>
+              </a:rPr>
+              <a:t>Modifications</a:t>
+            </a:r>
+          </a:p>
+        </p:txBody>
+      </p:sp>
+      <p:sp>
+        <p:nvSpPr>
           <p:cNvPr id="14" name="TextBox 13"/>
           <p:cNvSpPr txBox="1"/>
           <p:nvPr/>
         </p:nvSpPr>
         <p:spPr>
           <a:xfrm>
-            <a:off x="3685031" y="3931920"/>
-            <a:ext cx="2615184" cy="365760"/>
-          </a:xfrm>
-          <a:prstGeom prst="rect">
-            <a:avLst/>
-          </a:prstGeom>
-          <a:noFill/>
-        </p:spPr>
-        <p:txBody>
-          <a:bodyPr wrap="square" anchor="t" lIns="0" rIns="0" tIns="0" bIns="0">
-            <a:spAutoFit/>
-          </a:bodyPr>
-          <a:lstStyle/>
-          <a:p>
-            <a:pPr algn="ctr">
-              <a:lnSpc>
-                <a:spcPct val="100000"/>
-              </a:lnSpc>
-            </a:pPr>
-            <a:r>
-              <a:rPr sz="1150" b="1" i="0">
-                <a:solidFill>
-                  <a:srgbClr val="E8641B"/>
+            <a:off x="7635240" y="3090672"/>
+            <a:ext cx="3474720" cy="731520"/>
+          </a:xfrm>
+          <a:prstGeom prst="rect">
+            <a:avLst/>
+          </a:prstGeom>
+          <a:noFill/>
+        </p:spPr>
+        <p:txBody>
+          <a:bodyPr wrap="square" anchor="t" lIns="0" rIns="0" tIns="0" bIns="0">
+            <a:spAutoFit/>
+          </a:bodyPr>
+          <a:lstStyle/>
+          <a:p>
+            <a:pPr algn="l">
+              <a:lnSpc>
+                <a:spcPct val="110000"/>
+              </a:lnSpc>
+            </a:pPr>
+            <a:r>
+              <a:rPr sz="1350" b="0" i="0">
+                <a:solidFill>
+                  <a:srgbClr val="B7AE9E"/>
                 </a:solidFill>
                 <a:latin typeface="Calibri"/>
               </a:rPr>
-              <a:t>ÉTAPE 2</a:t>
-            </a:r>
-          </a:p>
-        </p:txBody>
-      </p:sp>
-      <p:sp>
-        <p:nvSpPr>
-          <p:cNvPr id="15" name="TextBox 14"/>
-          <p:cNvSpPr txBox="1"/>
-          <p:nvPr/>
-        </p:nvSpPr>
-        <p:spPr>
-          <a:xfrm>
-            <a:off x="3685031" y="4251960"/>
-            <a:ext cx="2615184" cy="457200"/>
-          </a:xfrm>
-          <a:prstGeom prst="rect">
-            <a:avLst/>
-          </a:prstGeom>
-          <a:noFill/>
-        </p:spPr>
-        <p:txBody>
-          <a:bodyPr wrap="square" anchor="t" lIns="0" rIns="0" tIns="0" bIns="0">
-            <a:spAutoFit/>
-          </a:bodyPr>
-          <a:lstStyle/>
-          <a:p>
-            <a:pPr algn="ctr">
-              <a:lnSpc>
-                <a:spcPct val="100000"/>
-              </a:lnSpc>
-            </a:pPr>
-            <a:r>
-              <a:rPr sz="1700" b="1" i="0">
-                <a:solidFill>
-                  <a:srgbClr val="2B2620"/>
-                </a:solidFill>
-                <a:latin typeface="Cambria"/>
-              </a:rPr>
-              <a:t>Prise en charge</a:t>
-            </a:r>
-          </a:p>
-        </p:txBody>
-      </p:sp>
-      <p:sp>
-        <p:nvSpPr>
-          <p:cNvPr id="16" name="TextBox 15"/>
-          <p:cNvSpPr txBox="1"/>
-          <p:nvPr/>
-        </p:nvSpPr>
-        <p:spPr>
-          <a:xfrm>
-            <a:off x="3959351" y="4800600"/>
-            <a:ext cx="2066543" cy="1005840"/>
-          </a:xfrm>
-          <a:prstGeom prst="rect">
-            <a:avLst/>
-          </a:prstGeom>
-          <a:noFill/>
-        </p:spPr>
-        <p:txBody>
-          <a:bodyPr wrap="square" anchor="t" lIns="0" rIns="0" tIns="0" bIns="0">
-            <a:spAutoFit/>
-          </a:bodyPr>
-          <a:lstStyle/>
-          <a:p>
-            <a:pPr algn="ctr">
-              <a:lnSpc>
-                <a:spcPct val="112000"/>
-              </a:lnSpc>
-            </a:pPr>
-            <a:r>
-              <a:rPr sz="1300" b="0" i="0">
-                <a:solidFill>
-                  <a:srgbClr val="6E665A"/>
-                </a:solidFill>
-                <a:latin typeface="Calibri"/>
-              </a:rPr>
-              <a:t>Votre demande est reçue et priorisée par l'équipe.</a:t>
-            </a:r>
-          </a:p>
-        </p:txBody>
-      </p:sp>
-      <p:sp>
-        <p:nvSpPr>
-          <p:cNvPr id="17" name="Rounded Rectangle 16"/>
+              <a:t>Un changement à faire ? On l'applique vite, sans surcoût surprise.</a:t>
+            </a:r>
+          </a:p>
+        </p:txBody>
+      </p:sp>
+      <p:sp>
+        <p:nvSpPr>
+          <p:cNvPr id="15" name="Rounded Rectangle 14"/>
           <p:cNvSpPr/>
           <p:nvPr/>
         </p:nvSpPr>
         <p:spPr>
           <a:xfrm>
-            <a:off x="6592823" y="2468880"/>
-            <a:ext cx="2615184" cy="3566160"/>
+            <a:off x="777240" y="4251960"/>
+            <a:ext cx="5074920" cy="1572768"/>
           </a:xfrm>
           <a:prstGeom prst="roundRect">
             <a:avLst>
-              <a:gd name="adj" fmla="val 6000"/>
+              <a:gd name="adj" fmla="val 7000"/>
             </a:avLst>
           </a:prstGeom>
           <a:solidFill>
-            <a:srgbClr val="FFFDFA"/>
+            <a:srgbClr val="332E27"/>
           </a:solidFill>
           <a:ln w="12700">
             <a:solidFill>
-              <a:srgbClr val="E8E0D2"/>
+              <a:srgbClr val="474036"/>
             </a:solidFill>
           </a:ln>
           <a:effectLst/>
@@ -7937,7 +8876,7 @@
       </p:sp>
       <p:pic>
         <p:nvPicPr>
-          <p:cNvPr id="18" name="Picture 17" descr="check.png"/>
+          <p:cNvPr id="16" name="Picture 15" descr="gear.png"/>
           <p:cNvPicPr>
             <a:picLocks noChangeAspect="1"/>
           </p:cNvPicPr>
@@ -7951,8 +8890,8 @@
         </p:blipFill>
         <p:spPr>
           <a:xfrm>
-            <a:off x="7443215" y="2926080"/>
-            <a:ext cx="914400" cy="914400"/>
+            <a:off x="1106424" y="4636008"/>
+            <a:ext cx="804672" cy="804672"/>
           </a:xfrm>
           <a:prstGeom prst="rect">
             <a:avLst/>
@@ -7961,143 +8900,104 @@
       </p:pic>
       <p:sp>
         <p:nvSpPr>
-          <p:cNvPr id="19" name="TextBox 18"/>
-          <p:cNvSpPr txBox="1"/>
-          <p:nvPr/>
-        </p:nvSpPr>
-        <p:spPr>
-          <a:xfrm>
-            <a:off x="6592823" y="3931920"/>
-            <a:ext cx="2615184" cy="365760"/>
-          </a:xfrm>
-          <a:prstGeom prst="rect">
-            <a:avLst/>
-          </a:prstGeom>
-          <a:noFill/>
-        </p:spPr>
-        <p:txBody>
-          <a:bodyPr wrap="square" anchor="t" lIns="0" rIns="0" tIns="0" bIns="0">
-            <a:spAutoFit/>
-          </a:bodyPr>
-          <a:lstStyle/>
-          <a:p>
-            <a:pPr algn="ctr">
+          <p:cNvPr id="17" name="TextBox 16"/>
+          <p:cNvSpPr txBox="1"/>
+          <p:nvPr/>
+        </p:nvSpPr>
+        <p:spPr>
+          <a:xfrm>
+            <a:off x="2148840" y="4553712"/>
+            <a:ext cx="3520439" cy="365760"/>
+          </a:xfrm>
+          <a:prstGeom prst="rect">
+            <a:avLst/>
+          </a:prstGeom>
+          <a:noFill/>
+        </p:spPr>
+        <p:txBody>
+          <a:bodyPr wrap="square" anchor="t" lIns="0" rIns="0" tIns="0" bIns="0">
+            <a:spAutoFit/>
+          </a:bodyPr>
+          <a:lstStyle/>
+          <a:p>
+            <a:pPr algn="l">
               <a:lnSpc>
                 <a:spcPct val="100000"/>
               </a:lnSpc>
             </a:pPr>
             <a:r>
-              <a:rPr sz="1150" b="1" i="0">
-                <a:solidFill>
-                  <a:srgbClr val="E8641B"/>
+              <a:rPr sz="1800" b="1" i="0">
+                <a:solidFill>
+                  <a:srgbClr val="F7F1E6"/>
+                </a:solidFill>
+                <a:latin typeface="Cambria"/>
+              </a:rPr>
+              <a:t>Maintenance</a:t>
+            </a:r>
+          </a:p>
+        </p:txBody>
+      </p:sp>
+      <p:sp>
+        <p:nvSpPr>
+          <p:cNvPr id="18" name="TextBox 17"/>
+          <p:cNvSpPr txBox="1"/>
+          <p:nvPr/>
+        </p:nvSpPr>
+        <p:spPr>
+          <a:xfrm>
+            <a:off x="2148840" y="5010912"/>
+            <a:ext cx="3474720" cy="731520"/>
+          </a:xfrm>
+          <a:prstGeom prst="rect">
+            <a:avLst/>
+          </a:prstGeom>
+          <a:noFill/>
+        </p:spPr>
+        <p:txBody>
+          <a:bodyPr wrap="square" anchor="t" lIns="0" rIns="0" tIns="0" bIns="0">
+            <a:spAutoFit/>
+          </a:bodyPr>
+          <a:lstStyle/>
+          <a:p>
+            <a:pPr algn="l">
+              <a:lnSpc>
+                <a:spcPct val="110000"/>
+              </a:lnSpc>
+            </a:pPr>
+            <a:r>
+              <a:rPr sz="1350" b="0" i="0">
+                <a:solidFill>
+                  <a:srgbClr val="B7AE9E"/>
                 </a:solidFill>
                 <a:latin typeface="Calibri"/>
               </a:rPr>
-              <a:t>ÉTAPE 3</a:t>
-            </a:r>
-          </a:p>
-        </p:txBody>
-      </p:sp>
-      <p:sp>
-        <p:nvSpPr>
-          <p:cNvPr id="20" name="TextBox 19"/>
-          <p:cNvSpPr txBox="1"/>
-          <p:nvPr/>
-        </p:nvSpPr>
-        <p:spPr>
-          <a:xfrm>
-            <a:off x="6592823" y="4251960"/>
-            <a:ext cx="2615184" cy="457200"/>
-          </a:xfrm>
-          <a:prstGeom prst="rect">
-            <a:avLst/>
-          </a:prstGeom>
-          <a:noFill/>
-        </p:spPr>
-        <p:txBody>
-          <a:bodyPr wrap="square" anchor="t" lIns="0" rIns="0" tIns="0" bIns="0">
-            <a:spAutoFit/>
-          </a:bodyPr>
-          <a:lstStyle/>
-          <a:p>
-            <a:pPr algn="ctr">
-              <a:lnSpc>
-                <a:spcPct val="100000"/>
-              </a:lnSpc>
-            </a:pPr>
-            <a:r>
-              <a:rPr sz="1700" b="1" i="0">
-                <a:solidFill>
-                  <a:srgbClr val="2B2620"/>
-                </a:solidFill>
-                <a:latin typeface="Cambria"/>
-              </a:rPr>
-              <a:t>Résolution</a:t>
-            </a:r>
-          </a:p>
-        </p:txBody>
-      </p:sp>
-      <p:sp>
-        <p:nvSpPr>
-          <p:cNvPr id="21" name="TextBox 20"/>
-          <p:cNvSpPr txBox="1"/>
-          <p:nvPr/>
-        </p:nvSpPr>
-        <p:spPr>
-          <a:xfrm>
-            <a:off x="6867143" y="4800600"/>
-            <a:ext cx="2066543" cy="1005840"/>
-          </a:xfrm>
-          <a:prstGeom prst="rect">
-            <a:avLst/>
-          </a:prstGeom>
-          <a:noFill/>
-        </p:spPr>
-        <p:txBody>
-          <a:bodyPr wrap="square" anchor="t" lIns="0" rIns="0" tIns="0" bIns="0">
-            <a:spAutoFit/>
-          </a:bodyPr>
-          <a:lstStyle/>
-          <a:p>
-            <a:pPr algn="ctr">
-              <a:lnSpc>
-                <a:spcPct val="112000"/>
-              </a:lnSpc>
-            </a:pPr>
-            <a:r>
-              <a:rPr sz="1300" b="0" i="0">
-                <a:solidFill>
-                  <a:srgbClr val="6E665A"/>
-                </a:solidFill>
-                <a:latin typeface="Calibri"/>
-              </a:rPr>
-              <a:t>On corrige, on teste, on met en ligne.</a:t>
-            </a:r>
-          </a:p>
-        </p:txBody>
-      </p:sp>
-      <p:sp>
-        <p:nvSpPr>
-          <p:cNvPr id="22" name="Rounded Rectangle 21"/>
+              <a:t>Sécurité, sauvegardes et performances suivies en continu.</a:t>
+            </a:r>
+          </a:p>
+        </p:txBody>
+      </p:sp>
+      <p:sp>
+        <p:nvSpPr>
+          <p:cNvPr id="19" name="Rounded Rectangle 18"/>
           <p:cNvSpPr/>
           <p:nvPr/>
         </p:nvSpPr>
         <p:spPr>
           <a:xfrm>
-            <a:off x="9500615" y="2468880"/>
-            <a:ext cx="2615184" cy="3566160"/>
+            <a:off x="6263640" y="4251960"/>
+            <a:ext cx="5074920" cy="1572768"/>
           </a:xfrm>
           <a:prstGeom prst="roundRect">
             <a:avLst>
-              <a:gd name="adj" fmla="val 6000"/>
+              <a:gd name="adj" fmla="val 7000"/>
             </a:avLst>
           </a:prstGeom>
           <a:solidFill>
-            <a:srgbClr val="FFFDFA"/>
+            <a:srgbClr val="332E27"/>
           </a:solidFill>
           <a:ln w="12700">
             <a:solidFill>
-              <a:srgbClr val="E8E0D2"/>
+              <a:srgbClr val="474036"/>
             </a:solidFill>
           </a:ln>
           <a:effectLst/>
@@ -8126,7 +9026,7 @@
       </p:sp>
       <p:pic>
         <p:nvPicPr>
-          <p:cNvPr id="23" name="Picture 22" descr="eye.png"/>
+          <p:cNvPr id="20" name="Picture 19" descr="ticket.png"/>
           <p:cNvPicPr>
             <a:picLocks noChangeAspect="1"/>
           </p:cNvPicPr>
@@ -8140,8 +9040,8 @@
         </p:blipFill>
         <p:spPr>
           <a:xfrm>
-            <a:off x="10351007" y="2926080"/>
-            <a:ext cx="914400" cy="914400"/>
+            <a:off x="6592824" y="4636008"/>
+            <a:ext cx="804672" cy="804672"/>
           </a:xfrm>
           <a:prstGeom prst="rect">
             <a:avLst/>
@@ -8150,117 +9050,78 @@
       </p:pic>
       <p:sp>
         <p:nvSpPr>
-          <p:cNvPr id="24" name="TextBox 23"/>
-          <p:cNvSpPr txBox="1"/>
-          <p:nvPr/>
-        </p:nvSpPr>
-        <p:spPr>
-          <a:xfrm>
-            <a:off x="9500615" y="3931920"/>
-            <a:ext cx="2615184" cy="365760"/>
-          </a:xfrm>
-          <a:prstGeom prst="rect">
-            <a:avLst/>
-          </a:prstGeom>
-          <a:noFill/>
-        </p:spPr>
-        <p:txBody>
-          <a:bodyPr wrap="square" anchor="t" lIns="0" rIns="0" tIns="0" bIns="0">
-            <a:spAutoFit/>
-          </a:bodyPr>
-          <a:lstStyle/>
-          <a:p>
-            <a:pPr algn="ctr">
+          <p:cNvPr id="21" name="TextBox 20"/>
+          <p:cNvSpPr txBox="1"/>
+          <p:nvPr/>
+        </p:nvSpPr>
+        <p:spPr>
+          <a:xfrm>
+            <a:off x="7635240" y="4553712"/>
+            <a:ext cx="3520439" cy="365760"/>
+          </a:xfrm>
+          <a:prstGeom prst="rect">
+            <a:avLst/>
+          </a:prstGeom>
+          <a:noFill/>
+        </p:spPr>
+        <p:txBody>
+          <a:bodyPr wrap="square" anchor="t" lIns="0" rIns="0" tIns="0" bIns="0">
+            <a:spAutoFit/>
+          </a:bodyPr>
+          <a:lstStyle/>
+          <a:p>
+            <a:pPr algn="l">
               <a:lnSpc>
                 <a:spcPct val="100000"/>
               </a:lnSpc>
             </a:pPr>
             <a:r>
-              <a:rPr sz="1150" b="1" i="0">
-                <a:solidFill>
-                  <a:srgbClr val="E8641B"/>
+              <a:rPr sz="1800" b="1" i="0">
+                <a:solidFill>
+                  <a:srgbClr val="F7F1E6"/>
+                </a:solidFill>
+                <a:latin typeface="Cambria"/>
+              </a:rPr>
+              <a:t>Tickets support</a:t>
+            </a:r>
+          </a:p>
+        </p:txBody>
+      </p:sp>
+      <p:sp>
+        <p:nvSpPr>
+          <p:cNvPr id="22" name="TextBox 21"/>
+          <p:cNvSpPr txBox="1"/>
+          <p:nvPr/>
+        </p:nvSpPr>
+        <p:spPr>
+          <a:xfrm>
+            <a:off x="7635240" y="5010912"/>
+            <a:ext cx="3474720" cy="731520"/>
+          </a:xfrm>
+          <a:prstGeom prst="rect">
+            <a:avLst/>
+          </a:prstGeom>
+          <a:noFill/>
+        </p:spPr>
+        <p:txBody>
+          <a:bodyPr wrap="square" anchor="t" lIns="0" rIns="0" tIns="0" bIns="0">
+            <a:spAutoFit/>
+          </a:bodyPr>
+          <a:lstStyle/>
+          <a:p>
+            <a:pPr algn="l">
+              <a:lnSpc>
+                <a:spcPct val="110000"/>
+              </a:lnSpc>
+            </a:pPr>
+            <a:r>
+              <a:rPr sz="1350" b="0" i="0">
+                <a:solidFill>
+                  <a:srgbClr val="B7AE9E"/>
                 </a:solidFill>
                 <a:latin typeface="Calibri"/>
               </a:rPr>
-              <a:t>ÉTAPE 4</a:t>
-            </a:r>
-          </a:p>
-        </p:txBody>
-      </p:sp>
-      <p:sp>
-        <p:nvSpPr>
-          <p:cNvPr id="25" name="TextBox 24"/>
-          <p:cNvSpPr txBox="1"/>
-          <p:nvPr/>
-        </p:nvSpPr>
-        <p:spPr>
-          <a:xfrm>
-            <a:off x="9500615" y="4251960"/>
-            <a:ext cx="2615184" cy="457200"/>
-          </a:xfrm>
-          <a:prstGeom prst="rect">
-            <a:avLst/>
-          </a:prstGeom>
-          <a:noFill/>
-        </p:spPr>
-        <p:txBody>
-          <a:bodyPr wrap="square" anchor="t" lIns="0" rIns="0" tIns="0" bIns="0">
-            <a:spAutoFit/>
-          </a:bodyPr>
-          <a:lstStyle/>
-          <a:p>
-            <a:pPr algn="ctr">
-              <a:lnSpc>
-                <a:spcPct val="100000"/>
-              </a:lnSpc>
-            </a:pPr>
-            <a:r>
-              <a:rPr sz="1700" b="1" i="0">
-                <a:solidFill>
-                  <a:srgbClr val="2B2620"/>
-                </a:solidFill>
-                <a:latin typeface="Cambria"/>
-              </a:rPr>
-              <a:t>Suivi</a:t>
-            </a:r>
-          </a:p>
-        </p:txBody>
-      </p:sp>
-      <p:sp>
-        <p:nvSpPr>
-          <p:cNvPr id="26" name="TextBox 25"/>
-          <p:cNvSpPr txBox="1"/>
-          <p:nvPr/>
-        </p:nvSpPr>
-        <p:spPr>
-          <a:xfrm>
-            <a:off x="9774936" y="4800600"/>
-            <a:ext cx="2066543" cy="1005840"/>
-          </a:xfrm>
-          <a:prstGeom prst="rect">
-            <a:avLst/>
-          </a:prstGeom>
-          <a:noFill/>
-        </p:spPr>
-        <p:txBody>
-          <a:bodyPr wrap="square" anchor="t" lIns="0" rIns="0" tIns="0" bIns="0">
-            <a:spAutoFit/>
-          </a:bodyPr>
-          <a:lstStyle/>
-          <a:p>
-            <a:pPr algn="ctr">
-              <a:lnSpc>
-                <a:spcPct val="112000"/>
-              </a:lnSpc>
-            </a:pPr>
-            <a:r>
-              <a:rPr sz="1300" b="0" i="0">
-                <a:solidFill>
-                  <a:srgbClr val="6E665A"/>
-                </a:solidFill>
-                <a:latin typeface="Calibri"/>
-              </a:rPr>
-              <a:t>Vous êtes tenu informé jusqu'à validation finale.</a:t>
+              <a:t>Un souci ? Vous ouvrez un ticket, on le prend en charge, on le résout.</a:t>
             </a:r>
           </a:p>
         </p:txBody>
@@ -8335,7 +9196,7 @@
         </p:nvSpPr>
         <p:spPr>
           <a:xfrm>
-            <a:off x="777240" y="576072"/>
+            <a:off x="777240" y="667512"/>
             <a:ext cx="100584" cy="100584"/>
           </a:xfrm>
           <a:prstGeom prst="ellipse">
@@ -8379,7 +9240,7 @@
         </p:nvSpPr>
         <p:spPr>
           <a:xfrm>
-            <a:off x="996695" y="502919"/>
+            <a:off x="996695" y="594359"/>
             <a:ext cx="5486400" cy="274320"/>
           </a:xfrm>
           <a:prstGeom prst="rect">
@@ -8405,7 +9266,7 @@
                 </a:solidFill>
                 <a:latin typeface="Calibri"/>
               </a:rPr>
-              <a:t>ALLER PLUS LOIN</a:t>
+              <a:t>SUPPORT INCLUS</a:t>
             </a:r>
           </a:p>
         </p:txBody>
@@ -8418,8 +9279,8 @@
         </p:nvSpPr>
         <p:spPr>
           <a:xfrm>
-            <a:off x="777240" y="868680"/>
-            <a:ext cx="10058400" cy="640080"/>
+            <a:off x="777240" y="960120"/>
+            <a:ext cx="10607040" cy="731520"/>
           </a:xfrm>
           <a:prstGeom prst="rect">
             <a:avLst/>
@@ -8444,47 +9305,52 @@
                 </a:solidFill>
                 <a:latin typeface="Cambria"/>
               </a:rPr>
-              <a:t>Votre site n'est que le début</a:t>
-            </a:r>
-          </a:p>
-        </p:txBody>
-      </p:sp>
-      <p:sp>
-        <p:nvSpPr>
-          <p:cNvPr id="6" name="TextBox 5"/>
-          <p:cNvSpPr txBox="1"/>
-          <p:nvPr/>
-        </p:nvSpPr>
-        <p:spPr>
-          <a:xfrm>
-            <a:off x="795528" y="1536192"/>
-            <a:ext cx="10424160" cy="457200"/>
-          </a:xfrm>
-          <a:prstGeom prst="rect">
-            <a:avLst/>
-          </a:prstGeom>
-          <a:noFill/>
-        </p:spPr>
-        <p:txBody>
-          <a:bodyPr wrap="square" anchor="t" lIns="0" rIns="0" tIns="0" bIns="0">
-            <a:spAutoFit/>
-          </a:bodyPr>
-          <a:lstStyle/>
-          <a:p>
-            <a:pPr algn="l">
-              <a:lnSpc>
-                <a:spcPct val="100000"/>
-              </a:lnSpc>
-            </a:pPr>
-            <a:r>
-              <a:rPr sz="1550" b="0" i="0">
-                <a:solidFill>
-                  <a:srgbClr val="6E665A"/>
-                </a:solidFill>
-                <a:latin typeface="Calibri"/>
-              </a:rPr>
-              <a:t>Quand vous êtes prêt à attirer plus de clients, on active la machine.</a:t>
-            </a:r>
+              <a:t>Un problème ? Un ticket. Point final.</a:t>
+            </a:r>
+          </a:p>
+        </p:txBody>
+      </p:sp>
+      <p:sp>
+        <p:nvSpPr>
+          <p:cNvPr id="6" name="Rectangle 5"/>
+          <p:cNvSpPr/>
+          <p:nvPr/>
+        </p:nvSpPr>
+        <p:spPr>
+          <a:xfrm>
+            <a:off x="1325880" y="3611880"/>
+            <a:ext cx="8723376" cy="18288"/>
+          </a:xfrm>
+          <a:prstGeom prst="rect">
+            <a:avLst/>
+          </a:prstGeom>
+          <a:solidFill>
+            <a:srgbClr val="E8E0D2"/>
+          </a:solidFill>
+          <a:ln>
+            <a:noFill/>
+          </a:ln>
+          <a:effectLst/>
+        </p:spPr>
+        <p:style>
+          <a:lnRef idx="1">
+            <a:schemeClr val="accent1"/>
+          </a:lnRef>
+          <a:fillRef idx="3">
+            <a:schemeClr val="accent1"/>
+          </a:fillRef>
+          <a:effectRef idx="2">
+            <a:schemeClr val="accent1"/>
+          </a:effectRef>
+          <a:fontRef idx="minor">
+            <a:schemeClr val="lt1"/>
+          </a:fontRef>
+        </p:style>
+        <p:txBody>
+          <a:bodyPr rtlCol="0" anchor="ctr"/>
+          <a:lstStyle/>
+          <a:p>
+            <a:pPr algn="ctr"/>
           </a:p>
         </p:txBody>
       </p:sp>
@@ -8496,12 +9362,12 @@
         </p:nvSpPr>
         <p:spPr>
           <a:xfrm>
-            <a:off x="777240" y="2286000"/>
-            <a:ext cx="3401568" cy="1572768"/>
+            <a:off x="777240" y="2468880"/>
+            <a:ext cx="2615184" cy="3566160"/>
           </a:xfrm>
           <a:prstGeom prst="roundRect">
             <a:avLst>
-              <a:gd name="adj" fmla="val 7000"/>
+              <a:gd name="adj" fmla="val 6000"/>
             </a:avLst>
           </a:prstGeom>
           <a:solidFill>
@@ -8538,7 +9404,7 @@
       </p:sp>
       <p:pic>
         <p:nvPicPr>
-          <p:cNvPr id="8" name="Picture 7" descr="funnel.png"/>
+          <p:cNvPr id="8" name="Picture 7" descr="bell.png"/>
           <p:cNvPicPr>
             <a:picLocks noChangeAspect="1"/>
           </p:cNvPicPr>
@@ -8552,8 +9418,8 @@
         </p:blipFill>
         <p:spPr>
           <a:xfrm>
-            <a:off x="1088136" y="2651760"/>
-            <a:ext cx="822960" cy="822960"/>
+            <a:off x="1627631" y="2926080"/>
+            <a:ext cx="914400" cy="914400"/>
           </a:xfrm>
           <a:prstGeom prst="rect">
             <a:avLst/>
@@ -8568,90 +9434,129 @@
         </p:nvSpPr>
         <p:spPr>
           <a:xfrm>
-            <a:off x="2057400" y="2596896"/>
-            <a:ext cx="1984248" cy="365760"/>
-          </a:xfrm>
-          <a:prstGeom prst="rect">
-            <a:avLst/>
-          </a:prstGeom>
-          <a:noFill/>
-        </p:spPr>
-        <p:txBody>
-          <a:bodyPr wrap="square" anchor="t" lIns="0" rIns="0" tIns="0" bIns="0">
-            <a:spAutoFit/>
-          </a:bodyPr>
-          <a:lstStyle/>
-          <a:p>
-            <a:pPr algn="l">
+            <a:off x="777240" y="3931920"/>
+            <a:ext cx="2615184" cy="365760"/>
+          </a:xfrm>
+          <a:prstGeom prst="rect">
+            <a:avLst/>
+          </a:prstGeom>
+          <a:noFill/>
+        </p:spPr>
+        <p:txBody>
+          <a:bodyPr wrap="square" anchor="t" lIns="0" rIns="0" tIns="0" bIns="0">
+            <a:spAutoFit/>
+          </a:bodyPr>
+          <a:lstStyle/>
+          <a:p>
+            <a:pPr algn="ctr">
               <a:lnSpc>
                 <a:spcPct val="100000"/>
               </a:lnSpc>
             </a:pPr>
             <a:r>
-              <a:rPr sz="1650" b="1" i="0">
+              <a:rPr sz="1150" b="1" i="0">
+                <a:solidFill>
+                  <a:srgbClr val="E8641B"/>
+                </a:solidFill>
+                <a:latin typeface="Calibri"/>
+              </a:rPr>
+              <a:t>ÉTAPE 1</a:t>
+            </a:r>
+          </a:p>
+        </p:txBody>
+      </p:sp>
+      <p:sp>
+        <p:nvSpPr>
+          <p:cNvPr id="10" name="TextBox 9"/>
+          <p:cNvSpPr txBox="1"/>
+          <p:nvPr/>
+        </p:nvSpPr>
+        <p:spPr>
+          <a:xfrm>
+            <a:off x="777240" y="4251960"/>
+            <a:ext cx="2615184" cy="457200"/>
+          </a:xfrm>
+          <a:prstGeom prst="rect">
+            <a:avLst/>
+          </a:prstGeom>
+          <a:noFill/>
+        </p:spPr>
+        <p:txBody>
+          <a:bodyPr wrap="square" anchor="t" lIns="0" rIns="0" tIns="0" bIns="0">
+            <a:spAutoFit/>
+          </a:bodyPr>
+          <a:lstStyle/>
+          <a:p>
+            <a:pPr algn="ctr">
+              <a:lnSpc>
+                <a:spcPct val="100000"/>
+              </a:lnSpc>
+            </a:pPr>
+            <a:r>
+              <a:rPr sz="1700" b="1" i="0">
                 <a:solidFill>
                   <a:srgbClr val="2B2620"/>
                 </a:solidFill>
                 <a:latin typeface="Cambria"/>
               </a:rPr>
-              <a:t>Tunnel de vente</a:t>
-            </a:r>
-          </a:p>
-        </p:txBody>
-      </p:sp>
-      <p:sp>
-        <p:nvSpPr>
-          <p:cNvPr id="10" name="TextBox 9"/>
-          <p:cNvSpPr txBox="1"/>
-          <p:nvPr/>
-        </p:nvSpPr>
-        <p:spPr>
-          <a:xfrm>
-            <a:off x="2057400" y="3035808"/>
-            <a:ext cx="1938528" cy="731520"/>
-          </a:xfrm>
-          <a:prstGeom prst="rect">
-            <a:avLst/>
-          </a:prstGeom>
-          <a:noFill/>
-        </p:spPr>
-        <p:txBody>
-          <a:bodyPr wrap="square" anchor="t" lIns="0" rIns="0" tIns="0" bIns="0">
-            <a:spAutoFit/>
-          </a:bodyPr>
-          <a:lstStyle/>
-          <a:p>
-            <a:pPr algn="l">
-              <a:lnSpc>
-                <a:spcPct val="108000"/>
-              </a:lnSpc>
-            </a:pPr>
-            <a:r>
-              <a:rPr sz="1250" b="0" i="0">
+              <a:t>Signalement</a:t>
+            </a:r>
+          </a:p>
+        </p:txBody>
+      </p:sp>
+      <p:sp>
+        <p:nvSpPr>
+          <p:cNvPr id="11" name="TextBox 10"/>
+          <p:cNvSpPr txBox="1"/>
+          <p:nvPr/>
+        </p:nvSpPr>
+        <p:spPr>
+          <a:xfrm>
+            <a:off x="1051560" y="4800600"/>
+            <a:ext cx="2066543" cy="1005840"/>
+          </a:xfrm>
+          <a:prstGeom prst="rect">
+            <a:avLst/>
+          </a:prstGeom>
+          <a:noFill/>
+        </p:spPr>
+        <p:txBody>
+          <a:bodyPr wrap="square" anchor="t" lIns="0" rIns="0" tIns="0" bIns="0">
+            <a:spAutoFit/>
+          </a:bodyPr>
+          <a:lstStyle/>
+          <a:p>
+            <a:pPr algn="ctr">
+              <a:lnSpc>
+                <a:spcPct val="112000"/>
+              </a:lnSpc>
+            </a:pPr>
+            <a:r>
+              <a:rPr sz="1300" b="0" i="0">
                 <a:solidFill>
                   <a:srgbClr val="6E665A"/>
                 </a:solidFill>
                 <a:latin typeface="Calibri"/>
               </a:rPr>
-              <a:t>Un parcours pensé pour transformer le visiteur en client.</a:t>
-            </a:r>
-          </a:p>
-        </p:txBody>
-      </p:sp>
-      <p:sp>
-        <p:nvSpPr>
-          <p:cNvPr id="11" name="Rounded Rectangle 10"/>
+              <a:t>Vous ouvrez un ticket en un clic, à tout moment.</a:t>
+            </a:r>
+          </a:p>
+        </p:txBody>
+      </p:sp>
+      <p:sp>
+        <p:nvSpPr>
+          <p:cNvPr id="12" name="Rounded Rectangle 11"/>
           <p:cNvSpPr/>
           <p:nvPr/>
         </p:nvSpPr>
         <p:spPr>
           <a:xfrm>
-            <a:off x="4526280" y="2286000"/>
-            <a:ext cx="3401568" cy="1572768"/>
+            <a:off x="3685031" y="2468880"/>
+            <a:ext cx="2615184" cy="3566160"/>
           </a:xfrm>
           <a:prstGeom prst="roundRect">
             <a:avLst>
-              <a:gd name="adj" fmla="val 7000"/>
+              <a:gd name="adj" fmla="val 6000"/>
             </a:avLst>
           </a:prstGeom>
           <a:solidFill>
@@ -8688,7 +9593,7 @@
       </p:sp>
       <p:pic>
         <p:nvPicPr>
-          <p:cNvPr id="12" name="Picture 11" descr="play.png"/>
+          <p:cNvPr id="13" name="Picture 12" descr="person.png"/>
           <p:cNvPicPr>
             <a:picLocks noChangeAspect="1"/>
           </p:cNvPicPr>
@@ -8702,8 +9607,8 @@
         </p:blipFill>
         <p:spPr>
           <a:xfrm>
-            <a:off x="4837176" y="2651760"/>
-            <a:ext cx="822960" cy="822960"/>
+            <a:off x="4535423" y="2926080"/>
+            <a:ext cx="914400" cy="914400"/>
           </a:xfrm>
           <a:prstGeom prst="rect">
             <a:avLst/>
@@ -8712,96 +9617,135 @@
       </p:pic>
       <p:sp>
         <p:nvSpPr>
-          <p:cNvPr id="13" name="TextBox 12"/>
-          <p:cNvSpPr txBox="1"/>
-          <p:nvPr/>
-        </p:nvSpPr>
-        <p:spPr>
-          <a:xfrm>
-            <a:off x="5806440" y="2596896"/>
-            <a:ext cx="1984248" cy="365760"/>
-          </a:xfrm>
-          <a:prstGeom prst="rect">
-            <a:avLst/>
-          </a:prstGeom>
-          <a:noFill/>
-        </p:spPr>
-        <p:txBody>
-          <a:bodyPr wrap="square" anchor="t" lIns="0" rIns="0" tIns="0" bIns="0">
-            <a:spAutoFit/>
-          </a:bodyPr>
-          <a:lstStyle/>
-          <a:p>
-            <a:pPr algn="l">
+          <p:cNvPr id="14" name="TextBox 13"/>
+          <p:cNvSpPr txBox="1"/>
+          <p:nvPr/>
+        </p:nvSpPr>
+        <p:spPr>
+          <a:xfrm>
+            <a:off x="3685031" y="3931920"/>
+            <a:ext cx="2615184" cy="365760"/>
+          </a:xfrm>
+          <a:prstGeom prst="rect">
+            <a:avLst/>
+          </a:prstGeom>
+          <a:noFill/>
+        </p:spPr>
+        <p:txBody>
+          <a:bodyPr wrap="square" anchor="t" lIns="0" rIns="0" tIns="0" bIns="0">
+            <a:spAutoFit/>
+          </a:bodyPr>
+          <a:lstStyle/>
+          <a:p>
+            <a:pPr algn="ctr">
               <a:lnSpc>
                 <a:spcPct val="100000"/>
               </a:lnSpc>
             </a:pPr>
             <a:r>
-              <a:rPr sz="1650" b="1" i="0">
+              <a:rPr sz="1150" b="1" i="0">
+                <a:solidFill>
+                  <a:srgbClr val="E8641B"/>
+                </a:solidFill>
+                <a:latin typeface="Calibri"/>
+              </a:rPr>
+              <a:t>ÉTAPE 2</a:t>
+            </a:r>
+          </a:p>
+        </p:txBody>
+      </p:sp>
+      <p:sp>
+        <p:nvSpPr>
+          <p:cNvPr id="15" name="TextBox 14"/>
+          <p:cNvSpPr txBox="1"/>
+          <p:nvPr/>
+        </p:nvSpPr>
+        <p:spPr>
+          <a:xfrm>
+            <a:off x="3685031" y="4251960"/>
+            <a:ext cx="2615184" cy="457200"/>
+          </a:xfrm>
+          <a:prstGeom prst="rect">
+            <a:avLst/>
+          </a:prstGeom>
+          <a:noFill/>
+        </p:spPr>
+        <p:txBody>
+          <a:bodyPr wrap="square" anchor="t" lIns="0" rIns="0" tIns="0" bIns="0">
+            <a:spAutoFit/>
+          </a:bodyPr>
+          <a:lstStyle/>
+          <a:p>
+            <a:pPr algn="ctr">
+              <a:lnSpc>
+                <a:spcPct val="100000"/>
+              </a:lnSpc>
+            </a:pPr>
+            <a:r>
+              <a:rPr sz="1700" b="1" i="0">
                 <a:solidFill>
                   <a:srgbClr val="2B2620"/>
                 </a:solidFill>
                 <a:latin typeface="Cambria"/>
               </a:rPr>
-              <a:t>VSL</a:t>
-            </a:r>
-          </a:p>
-        </p:txBody>
-      </p:sp>
-      <p:sp>
-        <p:nvSpPr>
-          <p:cNvPr id="14" name="TextBox 13"/>
-          <p:cNvSpPr txBox="1"/>
-          <p:nvPr/>
-        </p:nvSpPr>
-        <p:spPr>
-          <a:xfrm>
-            <a:off x="5806440" y="3035808"/>
-            <a:ext cx="1938528" cy="731520"/>
-          </a:xfrm>
-          <a:prstGeom prst="rect">
-            <a:avLst/>
-          </a:prstGeom>
-          <a:noFill/>
-        </p:spPr>
-        <p:txBody>
-          <a:bodyPr wrap="square" anchor="t" lIns="0" rIns="0" tIns="0" bIns="0">
-            <a:spAutoFit/>
-          </a:bodyPr>
-          <a:lstStyle/>
-          <a:p>
-            <a:pPr algn="l">
-              <a:lnSpc>
-                <a:spcPct val="108000"/>
-              </a:lnSpc>
-            </a:pPr>
-            <a:r>
-              <a:rPr sz="1250" b="0" i="0">
+              <a:t>Prise en charge</a:t>
+            </a:r>
+          </a:p>
+        </p:txBody>
+      </p:sp>
+      <p:sp>
+        <p:nvSpPr>
+          <p:cNvPr id="16" name="TextBox 15"/>
+          <p:cNvSpPr txBox="1"/>
+          <p:nvPr/>
+        </p:nvSpPr>
+        <p:spPr>
+          <a:xfrm>
+            <a:off x="3959351" y="4800600"/>
+            <a:ext cx="2066543" cy="1005840"/>
+          </a:xfrm>
+          <a:prstGeom prst="rect">
+            <a:avLst/>
+          </a:prstGeom>
+          <a:noFill/>
+        </p:spPr>
+        <p:txBody>
+          <a:bodyPr wrap="square" anchor="t" lIns="0" rIns="0" tIns="0" bIns="0">
+            <a:spAutoFit/>
+          </a:bodyPr>
+          <a:lstStyle/>
+          <a:p>
+            <a:pPr algn="ctr">
+              <a:lnSpc>
+                <a:spcPct val="112000"/>
+              </a:lnSpc>
+            </a:pPr>
+            <a:r>
+              <a:rPr sz="1300" b="0" i="0">
                 <a:solidFill>
                   <a:srgbClr val="6E665A"/>
                 </a:solidFill>
                 <a:latin typeface="Calibri"/>
               </a:rPr>
-              <a:t>Une vidéo qui vend votre restaurant à votre place.</a:t>
-            </a:r>
-          </a:p>
-        </p:txBody>
-      </p:sp>
-      <p:sp>
-        <p:nvSpPr>
-          <p:cNvPr id="15" name="Rounded Rectangle 14"/>
+              <a:t>Votre demande est reçue et priorisée par l'équipe.</a:t>
+            </a:r>
+          </a:p>
+        </p:txBody>
+      </p:sp>
+      <p:sp>
+        <p:nvSpPr>
+          <p:cNvPr id="17" name="Rounded Rectangle 16"/>
           <p:cNvSpPr/>
           <p:nvPr/>
         </p:nvSpPr>
         <p:spPr>
           <a:xfrm>
-            <a:off x="8275320" y="2286000"/>
-            <a:ext cx="3401568" cy="1572768"/>
+            <a:off x="6592823" y="2468880"/>
+            <a:ext cx="2615184" cy="3566160"/>
           </a:xfrm>
           <a:prstGeom prst="roundRect">
             <a:avLst>
-              <a:gd name="adj" fmla="val 7000"/>
+              <a:gd name="adj" fmla="val 6000"/>
             </a:avLst>
           </a:prstGeom>
           <a:solidFill>
@@ -8838,7 +9782,7 @@
       </p:sp>
       <p:pic>
         <p:nvPicPr>
-          <p:cNvPr id="16" name="Picture 15" descr="doc.png"/>
+          <p:cNvPr id="18" name="Picture 17" descr="check.png"/>
           <p:cNvPicPr>
             <a:picLocks noChangeAspect="1"/>
           </p:cNvPicPr>
@@ -8852,8 +9796,8 @@
         </p:blipFill>
         <p:spPr>
           <a:xfrm>
-            <a:off x="8586216" y="2651760"/>
-            <a:ext cx="822960" cy="822960"/>
+            <a:off x="7443215" y="2926080"/>
+            <a:ext cx="914400" cy="914400"/>
           </a:xfrm>
           <a:prstGeom prst="rect">
             <a:avLst/>
@@ -8862,96 +9806,135 @@
       </p:pic>
       <p:sp>
         <p:nvSpPr>
-          <p:cNvPr id="17" name="TextBox 16"/>
-          <p:cNvSpPr txBox="1"/>
-          <p:nvPr/>
-        </p:nvSpPr>
-        <p:spPr>
-          <a:xfrm>
-            <a:off x="9555480" y="2596896"/>
-            <a:ext cx="1984248" cy="365760"/>
-          </a:xfrm>
-          <a:prstGeom prst="rect">
-            <a:avLst/>
-          </a:prstGeom>
-          <a:noFill/>
-        </p:spPr>
-        <p:txBody>
-          <a:bodyPr wrap="square" anchor="t" lIns="0" rIns="0" tIns="0" bIns="0">
-            <a:spAutoFit/>
-          </a:bodyPr>
-          <a:lstStyle/>
-          <a:p>
-            <a:pPr algn="l">
+          <p:cNvPr id="19" name="TextBox 18"/>
+          <p:cNvSpPr txBox="1"/>
+          <p:nvPr/>
+        </p:nvSpPr>
+        <p:spPr>
+          <a:xfrm>
+            <a:off x="6592823" y="3931920"/>
+            <a:ext cx="2615184" cy="365760"/>
+          </a:xfrm>
+          <a:prstGeom prst="rect">
+            <a:avLst/>
+          </a:prstGeom>
+          <a:noFill/>
+        </p:spPr>
+        <p:txBody>
+          <a:bodyPr wrap="square" anchor="t" lIns="0" rIns="0" tIns="0" bIns="0">
+            <a:spAutoFit/>
+          </a:bodyPr>
+          <a:lstStyle/>
+          <a:p>
+            <a:pPr algn="ctr">
               <a:lnSpc>
                 <a:spcPct val="100000"/>
               </a:lnSpc>
             </a:pPr>
             <a:r>
-              <a:rPr sz="1650" b="1" i="0">
+              <a:rPr sz="1150" b="1" i="0">
+                <a:solidFill>
+                  <a:srgbClr val="E8641B"/>
+                </a:solidFill>
+                <a:latin typeface="Calibri"/>
+              </a:rPr>
+              <a:t>ÉTAPE 3</a:t>
+            </a:r>
+          </a:p>
+        </p:txBody>
+      </p:sp>
+      <p:sp>
+        <p:nvSpPr>
+          <p:cNvPr id="20" name="TextBox 19"/>
+          <p:cNvSpPr txBox="1"/>
+          <p:nvPr/>
+        </p:nvSpPr>
+        <p:spPr>
+          <a:xfrm>
+            <a:off x="6592823" y="4251960"/>
+            <a:ext cx="2615184" cy="457200"/>
+          </a:xfrm>
+          <a:prstGeom prst="rect">
+            <a:avLst/>
+          </a:prstGeom>
+          <a:noFill/>
+        </p:spPr>
+        <p:txBody>
+          <a:bodyPr wrap="square" anchor="t" lIns="0" rIns="0" tIns="0" bIns="0">
+            <a:spAutoFit/>
+          </a:bodyPr>
+          <a:lstStyle/>
+          <a:p>
+            <a:pPr algn="ctr">
+              <a:lnSpc>
+                <a:spcPct val="100000"/>
+              </a:lnSpc>
+            </a:pPr>
+            <a:r>
+              <a:rPr sz="1700" b="1" i="0">
                 <a:solidFill>
                   <a:srgbClr val="2B2620"/>
                 </a:solidFill>
                 <a:latin typeface="Cambria"/>
               </a:rPr>
-              <a:t>Copywriting</a:t>
-            </a:r>
-          </a:p>
-        </p:txBody>
-      </p:sp>
-      <p:sp>
-        <p:nvSpPr>
-          <p:cNvPr id="18" name="TextBox 17"/>
-          <p:cNvSpPr txBox="1"/>
-          <p:nvPr/>
-        </p:nvSpPr>
-        <p:spPr>
-          <a:xfrm>
-            <a:off x="9555480" y="3035808"/>
-            <a:ext cx="1938528" cy="731520"/>
-          </a:xfrm>
-          <a:prstGeom prst="rect">
-            <a:avLst/>
-          </a:prstGeom>
-          <a:noFill/>
-        </p:spPr>
-        <p:txBody>
-          <a:bodyPr wrap="square" anchor="t" lIns="0" rIns="0" tIns="0" bIns="0">
-            <a:spAutoFit/>
-          </a:bodyPr>
-          <a:lstStyle/>
-          <a:p>
-            <a:pPr algn="l">
-              <a:lnSpc>
-                <a:spcPct val="108000"/>
-              </a:lnSpc>
-            </a:pPr>
-            <a:r>
-              <a:rPr sz="1250" b="0" i="0">
+              <a:t>Résolution</a:t>
+            </a:r>
+          </a:p>
+        </p:txBody>
+      </p:sp>
+      <p:sp>
+        <p:nvSpPr>
+          <p:cNvPr id="21" name="TextBox 20"/>
+          <p:cNvSpPr txBox="1"/>
+          <p:nvPr/>
+        </p:nvSpPr>
+        <p:spPr>
+          <a:xfrm>
+            <a:off x="6867143" y="4800600"/>
+            <a:ext cx="2066543" cy="1005840"/>
+          </a:xfrm>
+          <a:prstGeom prst="rect">
+            <a:avLst/>
+          </a:prstGeom>
+          <a:noFill/>
+        </p:spPr>
+        <p:txBody>
+          <a:bodyPr wrap="square" anchor="t" lIns="0" rIns="0" tIns="0" bIns="0">
+            <a:spAutoFit/>
+          </a:bodyPr>
+          <a:lstStyle/>
+          <a:p>
+            <a:pPr algn="ctr">
+              <a:lnSpc>
+                <a:spcPct val="112000"/>
+              </a:lnSpc>
+            </a:pPr>
+            <a:r>
+              <a:rPr sz="1300" b="0" i="0">
                 <a:solidFill>
                   <a:srgbClr val="6E665A"/>
                 </a:solidFill>
                 <a:latin typeface="Calibri"/>
               </a:rPr>
-              <a:t>Les mots justes qui donnent envie de réserver.</a:t>
-            </a:r>
-          </a:p>
-        </p:txBody>
-      </p:sp>
-      <p:sp>
-        <p:nvSpPr>
-          <p:cNvPr id="19" name="Rounded Rectangle 18"/>
+              <a:t>On corrige, on teste, on met en ligne.</a:t>
+            </a:r>
+          </a:p>
+        </p:txBody>
+      </p:sp>
+      <p:sp>
+        <p:nvSpPr>
+          <p:cNvPr id="22" name="Rounded Rectangle 21"/>
           <p:cNvSpPr/>
           <p:nvPr/>
         </p:nvSpPr>
         <p:spPr>
           <a:xfrm>
-            <a:off x="777240" y="4169664"/>
-            <a:ext cx="3401568" cy="1572768"/>
+            <a:off x="9500615" y="2468880"/>
+            <a:ext cx="2615184" cy="3566160"/>
           </a:xfrm>
           <a:prstGeom prst="roundRect">
             <a:avLst>
-              <a:gd name="adj" fmla="val 7000"/>
+              <a:gd name="adj" fmla="val 6000"/>
             </a:avLst>
           </a:prstGeom>
           <a:solidFill>
@@ -8988,7 +9971,7 @@
       </p:sp>
       <p:pic>
         <p:nvPicPr>
-          <p:cNvPr id="20" name="Picture 19" descr="megaphone.png"/>
+          <p:cNvPr id="23" name="Picture 22" descr="eye.png"/>
           <p:cNvPicPr>
             <a:picLocks noChangeAspect="1"/>
           </p:cNvPicPr>
@@ -9002,8 +9985,8 @@
         </p:blipFill>
         <p:spPr>
           <a:xfrm>
-            <a:off x="1088136" y="4535424"/>
-            <a:ext cx="822960" cy="822960"/>
+            <a:off x="10351007" y="2926080"/>
+            <a:ext cx="914400" cy="914400"/>
           </a:xfrm>
           <a:prstGeom prst="rect">
             <a:avLst/>
@@ -9012,378 +9995,117 @@
       </p:pic>
       <p:sp>
         <p:nvSpPr>
-          <p:cNvPr id="21" name="TextBox 20"/>
-          <p:cNvSpPr txBox="1"/>
-          <p:nvPr/>
-        </p:nvSpPr>
-        <p:spPr>
-          <a:xfrm>
-            <a:off x="2057400" y="4480560"/>
-            <a:ext cx="1984248" cy="365760"/>
-          </a:xfrm>
-          <a:prstGeom prst="rect">
-            <a:avLst/>
-          </a:prstGeom>
-          <a:noFill/>
-        </p:spPr>
-        <p:txBody>
-          <a:bodyPr wrap="square" anchor="t" lIns="0" rIns="0" tIns="0" bIns="0">
-            <a:spAutoFit/>
-          </a:bodyPr>
-          <a:lstStyle/>
-          <a:p>
-            <a:pPr algn="l">
+          <p:cNvPr id="24" name="TextBox 23"/>
+          <p:cNvSpPr txBox="1"/>
+          <p:nvPr/>
+        </p:nvSpPr>
+        <p:spPr>
+          <a:xfrm>
+            <a:off x="9500615" y="3931920"/>
+            <a:ext cx="2615184" cy="365760"/>
+          </a:xfrm>
+          <a:prstGeom prst="rect">
+            <a:avLst/>
+          </a:prstGeom>
+          <a:noFill/>
+        </p:spPr>
+        <p:txBody>
+          <a:bodyPr wrap="square" anchor="t" lIns="0" rIns="0" tIns="0" bIns="0">
+            <a:spAutoFit/>
+          </a:bodyPr>
+          <a:lstStyle/>
+          <a:p>
+            <a:pPr algn="ctr">
               <a:lnSpc>
                 <a:spcPct val="100000"/>
               </a:lnSpc>
             </a:pPr>
             <a:r>
-              <a:rPr sz="1650" b="1" i="0">
+              <a:rPr sz="1150" b="1" i="0">
+                <a:solidFill>
+                  <a:srgbClr val="E8641B"/>
+                </a:solidFill>
+                <a:latin typeface="Calibri"/>
+              </a:rPr>
+              <a:t>ÉTAPE 4</a:t>
+            </a:r>
+          </a:p>
+        </p:txBody>
+      </p:sp>
+      <p:sp>
+        <p:nvSpPr>
+          <p:cNvPr id="25" name="TextBox 24"/>
+          <p:cNvSpPr txBox="1"/>
+          <p:nvPr/>
+        </p:nvSpPr>
+        <p:spPr>
+          <a:xfrm>
+            <a:off x="9500615" y="4251960"/>
+            <a:ext cx="2615184" cy="457200"/>
+          </a:xfrm>
+          <a:prstGeom prst="rect">
+            <a:avLst/>
+          </a:prstGeom>
+          <a:noFill/>
+        </p:spPr>
+        <p:txBody>
+          <a:bodyPr wrap="square" anchor="t" lIns="0" rIns="0" tIns="0" bIns="0">
+            <a:spAutoFit/>
+          </a:bodyPr>
+          <a:lstStyle/>
+          <a:p>
+            <a:pPr algn="ctr">
+              <a:lnSpc>
+                <a:spcPct val="100000"/>
+              </a:lnSpc>
+            </a:pPr>
+            <a:r>
+              <a:rPr sz="1700" b="1" i="0">
                 <a:solidFill>
                   <a:srgbClr val="2B2620"/>
                 </a:solidFill>
                 <a:latin typeface="Cambria"/>
               </a:rPr>
-              <a:t>Publicité / Ads</a:t>
-            </a:r>
-          </a:p>
-        </p:txBody>
-      </p:sp>
-      <p:sp>
-        <p:nvSpPr>
-          <p:cNvPr id="22" name="TextBox 21"/>
-          <p:cNvSpPr txBox="1"/>
-          <p:nvPr/>
-        </p:nvSpPr>
-        <p:spPr>
-          <a:xfrm>
-            <a:off x="2057400" y="4919472"/>
-            <a:ext cx="1938528" cy="731520"/>
-          </a:xfrm>
-          <a:prstGeom prst="rect">
-            <a:avLst/>
-          </a:prstGeom>
-          <a:noFill/>
-        </p:spPr>
-        <p:txBody>
-          <a:bodyPr wrap="square" anchor="t" lIns="0" rIns="0" tIns="0" bIns="0">
-            <a:spAutoFit/>
-          </a:bodyPr>
-          <a:lstStyle/>
-          <a:p>
-            <a:pPr algn="l">
-              <a:lnSpc>
-                <a:spcPct val="108000"/>
-              </a:lnSpc>
-            </a:pPr>
-            <a:r>
-              <a:rPr sz="1250" b="0" i="0">
+              <a:t>Suivi</a:t>
+            </a:r>
+          </a:p>
+        </p:txBody>
+      </p:sp>
+      <p:sp>
+        <p:nvSpPr>
+          <p:cNvPr id="26" name="TextBox 25"/>
+          <p:cNvSpPr txBox="1"/>
+          <p:nvPr/>
+        </p:nvSpPr>
+        <p:spPr>
+          <a:xfrm>
+            <a:off x="9774936" y="4800600"/>
+            <a:ext cx="2066543" cy="1005840"/>
+          </a:xfrm>
+          <a:prstGeom prst="rect">
+            <a:avLst/>
+          </a:prstGeom>
+          <a:noFill/>
+        </p:spPr>
+        <p:txBody>
+          <a:bodyPr wrap="square" anchor="t" lIns="0" rIns="0" tIns="0" bIns="0">
+            <a:spAutoFit/>
+          </a:bodyPr>
+          <a:lstStyle/>
+          <a:p>
+            <a:pPr algn="ctr">
+              <a:lnSpc>
+                <a:spcPct val="112000"/>
+              </a:lnSpc>
+            </a:pPr>
+            <a:r>
+              <a:rPr sz="1300" b="0" i="0">
                 <a:solidFill>
                   <a:srgbClr val="6E665A"/>
                 </a:solidFill>
                 <a:latin typeface="Calibri"/>
               </a:rPr>
-              <a:t>Des campagnes ciblées pour remplir vos tables.</a:t>
-            </a:r>
-          </a:p>
-        </p:txBody>
-      </p:sp>
-      <p:sp>
-        <p:nvSpPr>
-          <p:cNvPr id="23" name="Rounded Rectangle 22"/>
-          <p:cNvSpPr/>
-          <p:nvPr/>
-        </p:nvSpPr>
-        <p:spPr>
-          <a:xfrm>
-            <a:off x="4526280" y="4169664"/>
-            <a:ext cx="3401568" cy="1572768"/>
-          </a:xfrm>
-          <a:prstGeom prst="roundRect">
-            <a:avLst>
-              <a:gd name="adj" fmla="val 7000"/>
-            </a:avLst>
-          </a:prstGeom>
-          <a:solidFill>
-            <a:srgbClr val="FFFDFA"/>
-          </a:solidFill>
-          <a:ln w="12700">
-            <a:solidFill>
-              <a:srgbClr val="E8E0D2"/>
-            </a:solidFill>
-          </a:ln>
-          <a:effectLst/>
-        </p:spPr>
-        <p:style>
-          <a:lnRef idx="1">
-            <a:schemeClr val="accent1"/>
-          </a:lnRef>
-          <a:fillRef idx="3">
-            <a:schemeClr val="accent1"/>
-          </a:fillRef>
-          <a:effectRef idx="2">
-            <a:schemeClr val="accent1"/>
-          </a:effectRef>
-          <a:fontRef idx="minor">
-            <a:schemeClr val="lt1"/>
-          </a:fontRef>
-        </p:style>
-        <p:txBody>
-          <a:bodyPr rtlCol="0" anchor="ctr"/>
-          <a:lstStyle/>
-          <a:p>
-            <a:pPr algn="ctr"/>
-          </a:p>
-        </p:txBody>
-      </p:sp>
-      <p:pic>
-        <p:nvPicPr>
-          <p:cNvPr id="24" name="Picture 23" descr="people.png"/>
-          <p:cNvPicPr>
-            <a:picLocks noChangeAspect="1"/>
-          </p:cNvPicPr>
-          <p:nvPr/>
-        </p:nvPicPr>
-        <p:blipFill>
-          <a:blip r:embed="rId6"/>
-          <a:stretch>
-            <a:fillRect/>
-          </a:stretch>
-        </p:blipFill>
-        <p:spPr>
-          <a:xfrm>
-            <a:off x="4837176" y="4535424"/>
-            <a:ext cx="822960" cy="822960"/>
-          </a:xfrm>
-          <a:prstGeom prst="rect">
-            <a:avLst/>
-          </a:prstGeom>
-        </p:spPr>
-      </p:pic>
-      <p:sp>
-        <p:nvSpPr>
-          <p:cNvPr id="25" name="TextBox 24"/>
-          <p:cNvSpPr txBox="1"/>
-          <p:nvPr/>
-        </p:nvSpPr>
-        <p:spPr>
-          <a:xfrm>
-            <a:off x="5806440" y="4480560"/>
-            <a:ext cx="1984248" cy="365760"/>
-          </a:xfrm>
-          <a:prstGeom prst="rect">
-            <a:avLst/>
-          </a:prstGeom>
-          <a:noFill/>
-        </p:spPr>
-        <p:txBody>
-          <a:bodyPr wrap="square" anchor="t" lIns="0" rIns="0" tIns="0" bIns="0">
-            <a:spAutoFit/>
-          </a:bodyPr>
-          <a:lstStyle/>
-          <a:p>
-            <a:pPr algn="l">
-              <a:lnSpc>
-                <a:spcPct val="100000"/>
-              </a:lnSpc>
-            </a:pPr>
-            <a:r>
-              <a:rPr sz="1650" b="1" i="0">
-                <a:solidFill>
-                  <a:srgbClr val="2B2620"/>
-                </a:solidFill>
-                <a:latin typeface="Cambria"/>
-              </a:rPr>
-              <a:t>CRM</a:t>
-            </a:r>
-          </a:p>
-        </p:txBody>
-      </p:sp>
-      <p:sp>
-        <p:nvSpPr>
-          <p:cNvPr id="26" name="TextBox 25"/>
-          <p:cNvSpPr txBox="1"/>
-          <p:nvPr/>
-        </p:nvSpPr>
-        <p:spPr>
-          <a:xfrm>
-            <a:off x="5806440" y="4919472"/>
-            <a:ext cx="1938528" cy="731520"/>
-          </a:xfrm>
-          <a:prstGeom prst="rect">
-            <a:avLst/>
-          </a:prstGeom>
-          <a:noFill/>
-        </p:spPr>
-        <p:txBody>
-          <a:bodyPr wrap="square" anchor="t" lIns="0" rIns="0" tIns="0" bIns="0">
-            <a:spAutoFit/>
-          </a:bodyPr>
-          <a:lstStyle/>
-          <a:p>
-            <a:pPr algn="l">
-              <a:lnSpc>
-                <a:spcPct val="108000"/>
-              </a:lnSpc>
-            </a:pPr>
-            <a:r>
-              <a:rPr sz="1250" b="0" i="0">
-                <a:solidFill>
-                  <a:srgbClr val="6E665A"/>
-                </a:solidFill>
-                <a:latin typeface="Calibri"/>
-              </a:rPr>
-              <a:t>Gardez le contact et faites revenir vos clients.</a:t>
-            </a:r>
-          </a:p>
-        </p:txBody>
-      </p:sp>
-      <p:sp>
-        <p:nvSpPr>
-          <p:cNvPr id="27" name="Rounded Rectangle 26"/>
-          <p:cNvSpPr/>
-          <p:nvPr/>
-        </p:nvSpPr>
-        <p:spPr>
-          <a:xfrm>
-            <a:off x="8275320" y="4169664"/>
-            <a:ext cx="3401568" cy="1572768"/>
-          </a:xfrm>
-          <a:prstGeom prst="roundRect">
-            <a:avLst>
-              <a:gd name="adj" fmla="val 7000"/>
-            </a:avLst>
-          </a:prstGeom>
-          <a:solidFill>
-            <a:srgbClr val="FFFDFA"/>
-          </a:solidFill>
-          <a:ln w="12700">
-            <a:solidFill>
-              <a:srgbClr val="E8E0D2"/>
-            </a:solidFill>
-          </a:ln>
-          <a:effectLst/>
-        </p:spPr>
-        <p:style>
-          <a:lnRef idx="1">
-            <a:schemeClr val="accent1"/>
-          </a:lnRef>
-          <a:fillRef idx="3">
-            <a:schemeClr val="accent1"/>
-          </a:fillRef>
-          <a:effectRef idx="2">
-            <a:schemeClr val="accent1"/>
-          </a:effectRef>
-          <a:fontRef idx="minor">
-            <a:schemeClr val="lt1"/>
-          </a:fontRef>
-        </p:style>
-        <p:txBody>
-          <a:bodyPr rtlCol="0" anchor="ctr"/>
-          <a:lstStyle/>
-          <a:p>
-            <a:pPr algn="ctr"/>
-          </a:p>
-        </p:txBody>
-      </p:sp>
-      <p:pic>
-        <p:nvPicPr>
-          <p:cNvPr id="28" name="Picture 27" descr="chip.png"/>
-          <p:cNvPicPr>
-            <a:picLocks noChangeAspect="1"/>
-          </p:cNvPicPr>
-          <p:nvPr/>
-        </p:nvPicPr>
-        <p:blipFill>
-          <a:blip r:embed="rId7"/>
-          <a:stretch>
-            <a:fillRect/>
-          </a:stretch>
-        </p:blipFill>
-        <p:spPr>
-          <a:xfrm>
-            <a:off x="8586216" y="4535424"/>
-            <a:ext cx="822960" cy="822960"/>
-          </a:xfrm>
-          <a:prstGeom prst="rect">
-            <a:avLst/>
-          </a:prstGeom>
-        </p:spPr>
-      </p:pic>
-      <p:sp>
-        <p:nvSpPr>
-          <p:cNvPr id="29" name="TextBox 28"/>
-          <p:cNvSpPr txBox="1"/>
-          <p:nvPr/>
-        </p:nvSpPr>
-        <p:spPr>
-          <a:xfrm>
-            <a:off x="9555480" y="4480560"/>
-            <a:ext cx="1984248" cy="365760"/>
-          </a:xfrm>
-          <a:prstGeom prst="rect">
-            <a:avLst/>
-          </a:prstGeom>
-          <a:noFill/>
-        </p:spPr>
-        <p:txBody>
-          <a:bodyPr wrap="square" anchor="t" lIns="0" rIns="0" tIns="0" bIns="0">
-            <a:spAutoFit/>
-          </a:bodyPr>
-          <a:lstStyle/>
-          <a:p>
-            <a:pPr algn="l">
-              <a:lnSpc>
-                <a:spcPct val="100000"/>
-              </a:lnSpc>
-            </a:pPr>
-            <a:r>
-              <a:rPr sz="1650" b="1" i="0">
-                <a:solidFill>
-                  <a:srgbClr val="2B2620"/>
-                </a:solidFill>
-                <a:latin typeface="Cambria"/>
-              </a:rPr>
-              <a:t>Agent IA</a:t>
-            </a:r>
-          </a:p>
-        </p:txBody>
-      </p:sp>
-      <p:sp>
-        <p:nvSpPr>
-          <p:cNvPr id="30" name="TextBox 29"/>
-          <p:cNvSpPr txBox="1"/>
-          <p:nvPr/>
-        </p:nvSpPr>
-        <p:spPr>
-          <a:xfrm>
-            <a:off x="9555480" y="4919472"/>
-            <a:ext cx="1938528" cy="731520"/>
-          </a:xfrm>
-          <a:prstGeom prst="rect">
-            <a:avLst/>
-          </a:prstGeom>
-          <a:noFill/>
-        </p:spPr>
-        <p:txBody>
-          <a:bodyPr wrap="square" anchor="t" lIns="0" rIns="0" tIns="0" bIns="0">
-            <a:spAutoFit/>
-          </a:bodyPr>
-          <a:lstStyle/>
-          <a:p>
-            <a:pPr algn="l">
-              <a:lnSpc>
-                <a:spcPct val="108000"/>
-              </a:lnSpc>
-            </a:pPr>
-            <a:r>
-              <a:rPr sz="1250" b="0" i="0">
-                <a:solidFill>
-                  <a:srgbClr val="6E665A"/>
-                </a:solidFill>
-                <a:latin typeface="Calibri"/>
-              </a:rPr>
-              <a:t>Un assistant qui répond et réserve 24h/24.</a:t>
+              <a:t>Vous êtes tenu informé jusqu'à validation finale.</a:t>
             </a:r>
           </a:p>
         </p:txBody>
@@ -9421,7 +10143,7 @@
             <a:avLst/>
           </a:prstGeom>
           <a:solidFill>
-            <a:srgbClr val="2B2620"/>
+            <a:srgbClr val="F4EEE3"/>
           </a:solidFill>
           <a:ln>
             <a:noFill/>
@@ -9458,51 +10180,7 @@
         </p:nvSpPr>
         <p:spPr>
           <a:xfrm>
-            <a:off x="9966960" y="4297680"/>
-            <a:ext cx="2011680" cy="2011680"/>
-          </a:xfrm>
-          <a:prstGeom prst="ellipse">
-            <a:avLst/>
-          </a:prstGeom>
-          <a:noFill/>
-          <a:ln w="15240">
-            <a:solidFill>
-              <a:srgbClr val="3E382F"/>
-            </a:solidFill>
-          </a:ln>
-          <a:effectLst/>
-        </p:spPr>
-        <p:style>
-          <a:lnRef idx="1">
-            <a:schemeClr val="accent1"/>
-          </a:lnRef>
-          <a:fillRef idx="3">
-            <a:schemeClr val="accent1"/>
-          </a:fillRef>
-          <a:effectRef idx="2">
-            <a:schemeClr val="accent1"/>
-          </a:effectRef>
-          <a:fontRef idx="minor">
-            <a:schemeClr val="lt1"/>
-          </a:fontRef>
-        </p:style>
-        <p:txBody>
-          <a:bodyPr rtlCol="0" anchor="ctr"/>
-          <a:lstStyle/>
-          <a:p>
-            <a:pPr algn="ctr"/>
-          </a:p>
-        </p:txBody>
-      </p:sp>
-      <p:sp>
-        <p:nvSpPr>
-          <p:cNvPr id="4" name="Oval 3"/>
-          <p:cNvSpPr/>
-          <p:nvPr/>
-        </p:nvSpPr>
-        <p:spPr>
-          <a:xfrm>
-            <a:off x="777240" y="1307592"/>
+            <a:off x="777240" y="576072"/>
             <a:ext cx="100584" cy="100584"/>
           </a:xfrm>
           <a:prstGeom prst="ellipse">
@@ -9540,14 +10218,53 @@
       </p:sp>
       <p:sp>
         <p:nvSpPr>
+          <p:cNvPr id="4" name="TextBox 3"/>
+          <p:cNvSpPr txBox="1"/>
+          <p:nvPr/>
+        </p:nvSpPr>
+        <p:spPr>
+          <a:xfrm>
+            <a:off x="996695" y="502919"/>
+            <a:ext cx="5486400" cy="274320"/>
+          </a:xfrm>
+          <a:prstGeom prst="rect">
+            <a:avLst/>
+          </a:prstGeom>
+          <a:noFill/>
+        </p:spPr>
+        <p:txBody>
+          <a:bodyPr wrap="square" anchor="t" lIns="0" rIns="0" tIns="0" bIns="0">
+            <a:spAutoFit/>
+          </a:bodyPr>
+          <a:lstStyle/>
+          <a:p>
+            <a:pPr algn="l">
+              <a:lnSpc>
+                <a:spcPct val="100000"/>
+              </a:lnSpc>
+            </a:pPr>
+            <a:r>
+              <a:rPr sz="1250" b="1" i="0">
+                <a:solidFill>
+                  <a:srgbClr val="E8641B"/>
+                </a:solidFill>
+                <a:latin typeface="Calibri"/>
+              </a:rPr>
+              <a:t>ALLER PLUS LOIN</a:t>
+            </a:r>
+          </a:p>
+        </p:txBody>
+      </p:sp>
+      <p:sp>
+        <p:nvSpPr>
           <p:cNvPr id="5" name="TextBox 4"/>
           <p:cNvSpPr txBox="1"/>
           <p:nvPr/>
         </p:nvSpPr>
         <p:spPr>
           <a:xfrm>
-            <a:off x="996695" y="1234439"/>
-            <a:ext cx="5486400" cy="274320"/>
+            <a:off x="777240" y="868680"/>
+            <a:ext cx="10058400" cy="640080"/>
           </a:xfrm>
           <a:prstGeom prst="rect">
             <a:avLst/>
@@ -9566,426 +10283,79 @@
               </a:lnSpc>
             </a:pPr>
             <a:r>
-              <a:rPr sz="1250" b="1" i="0">
-                <a:solidFill>
-                  <a:srgbClr val="E8641B"/>
+              <a:rPr sz="3300" b="1" i="0">
+                <a:solidFill>
+                  <a:srgbClr val="2B2620"/>
+                </a:solidFill>
+                <a:latin typeface="Cambria"/>
+              </a:rPr>
+              <a:t>Votre site n'est que le début</a:t>
+            </a:r>
+          </a:p>
+        </p:txBody>
+      </p:sp>
+      <p:sp>
+        <p:nvSpPr>
+          <p:cNvPr id="6" name="TextBox 5"/>
+          <p:cNvSpPr txBox="1"/>
+          <p:nvPr/>
+        </p:nvSpPr>
+        <p:spPr>
+          <a:xfrm>
+            <a:off x="795528" y="1536192"/>
+            <a:ext cx="10424160" cy="457200"/>
+          </a:xfrm>
+          <a:prstGeom prst="rect">
+            <a:avLst/>
+          </a:prstGeom>
+          <a:noFill/>
+        </p:spPr>
+        <p:txBody>
+          <a:bodyPr wrap="square" anchor="t" lIns="0" rIns="0" tIns="0" bIns="0">
+            <a:spAutoFit/>
+          </a:bodyPr>
+          <a:lstStyle/>
+          <a:p>
+            <a:pPr algn="l">
+              <a:lnSpc>
+                <a:spcPct val="100000"/>
+              </a:lnSpc>
+            </a:pPr>
+            <a:r>
+              <a:rPr sz="1550" b="0" i="0">
+                <a:solidFill>
+                  <a:srgbClr val="6E665A"/>
                 </a:solidFill>
                 <a:latin typeface="Calibri"/>
               </a:rPr>
-              <a:t>EN RÉSUMÉ</a:t>
-            </a:r>
-          </a:p>
-        </p:txBody>
-      </p:sp>
-      <p:sp>
-        <p:nvSpPr>
-          <p:cNvPr id="6" name="TextBox 5"/>
-          <p:cNvSpPr txBox="1"/>
-          <p:nvPr/>
-        </p:nvSpPr>
-        <p:spPr>
-          <a:xfrm>
-            <a:off x="777240" y="1645920"/>
-            <a:ext cx="10607040" cy="914400"/>
-          </a:xfrm>
-          <a:prstGeom prst="rect">
-            <a:avLst/>
-          </a:prstGeom>
-          <a:noFill/>
-        </p:spPr>
-        <p:txBody>
-          <a:bodyPr wrap="square" anchor="t" lIns="0" rIns="0" tIns="0" bIns="0">
-            <a:spAutoFit/>
-          </a:bodyPr>
-          <a:lstStyle/>
-          <a:p>
-            <a:pPr algn="l">
-              <a:lnSpc>
-                <a:spcPct val="100000"/>
-              </a:lnSpc>
-            </a:pPr>
-            <a:r>
-              <a:rPr sz="4000" b="1" i="0">
-                <a:solidFill>
-                  <a:srgbClr val="F7F1E6"/>
-                </a:solidFill>
-                <a:latin typeface="Cambria"/>
-              </a:rPr>
-              <a:t>Un partenaire, pas un prestataire.</a:t>
-            </a:r>
-          </a:p>
-        </p:txBody>
-      </p:sp>
-      <p:sp>
-        <p:nvSpPr>
-          <p:cNvPr id="7" name="TextBox 6"/>
-          <p:cNvSpPr txBox="1"/>
-          <p:nvPr/>
-        </p:nvSpPr>
-        <p:spPr>
-          <a:xfrm>
-            <a:off x="777240" y="3063240"/>
-            <a:ext cx="3383280" cy="457200"/>
-          </a:xfrm>
-          <a:prstGeom prst="rect">
-            <a:avLst/>
-          </a:prstGeom>
-          <a:noFill/>
-        </p:spPr>
-        <p:txBody>
-          <a:bodyPr wrap="square" anchor="t" lIns="0" rIns="0" tIns="0" bIns="0">
-            <a:spAutoFit/>
-          </a:bodyPr>
-          <a:lstStyle/>
-          <a:p>
-            <a:pPr algn="l">
-              <a:lnSpc>
-                <a:spcPct val="100000"/>
-              </a:lnSpc>
-            </a:pPr>
-            <a:r>
-              <a:rPr sz="1500" b="1" i="0">
-                <a:solidFill>
-                  <a:srgbClr val="E8641B"/>
-                </a:solidFill>
-                <a:latin typeface="Cambria"/>
-              </a:rPr>
-              <a:t>01</a:t>
-            </a:r>
-          </a:p>
-        </p:txBody>
-      </p:sp>
-      <p:sp>
-        <p:nvSpPr>
-          <p:cNvPr id="8" name="TextBox 7"/>
-          <p:cNvSpPr txBox="1"/>
-          <p:nvPr/>
-        </p:nvSpPr>
-        <p:spPr>
-          <a:xfrm>
-            <a:off x="777240" y="3447288"/>
-            <a:ext cx="3383280" cy="457200"/>
-          </a:xfrm>
-          <a:prstGeom prst="rect">
-            <a:avLst/>
-          </a:prstGeom>
-          <a:noFill/>
-        </p:spPr>
-        <p:txBody>
-          <a:bodyPr wrap="square" anchor="t" lIns="0" rIns="0" tIns="0" bIns="0">
-            <a:spAutoFit/>
-          </a:bodyPr>
-          <a:lstStyle/>
-          <a:p>
-            <a:pPr algn="l">
-              <a:lnSpc>
-                <a:spcPct val="100000"/>
-              </a:lnSpc>
-            </a:pPr>
-            <a:r>
-              <a:rPr sz="2100" b="1" i="0">
-                <a:solidFill>
-                  <a:srgbClr val="F7F1E6"/>
-                </a:solidFill>
-                <a:latin typeface="Cambria"/>
-              </a:rPr>
-              <a:t>On crée</a:t>
-            </a:r>
-          </a:p>
-        </p:txBody>
-      </p:sp>
-      <p:sp>
-        <p:nvSpPr>
-          <p:cNvPr id="9" name="TextBox 8"/>
-          <p:cNvSpPr txBox="1"/>
-          <p:nvPr/>
-        </p:nvSpPr>
-        <p:spPr>
-          <a:xfrm>
-            <a:off x="777240" y="3931920"/>
-            <a:ext cx="3383280" cy="548640"/>
-          </a:xfrm>
-          <a:prstGeom prst="rect">
-            <a:avLst/>
-          </a:prstGeom>
-          <a:noFill/>
-        </p:spPr>
-        <p:txBody>
-          <a:bodyPr wrap="square" anchor="t" lIns="0" rIns="0" tIns="0" bIns="0">
-            <a:spAutoFit/>
-          </a:bodyPr>
-          <a:lstStyle/>
-          <a:p>
-            <a:pPr algn="l">
-              <a:lnSpc>
-                <a:spcPct val="110000"/>
-              </a:lnSpc>
-            </a:pPr>
-            <a:r>
-              <a:rPr sz="1400" b="0" i="0">
-                <a:solidFill>
-                  <a:srgbClr val="B7AE9E"/>
-                </a:solidFill>
-                <a:latin typeface="Calibri"/>
-              </a:rPr>
-              <a:t>Un site à votre image.</a:t>
-            </a:r>
-          </a:p>
-        </p:txBody>
-      </p:sp>
-      <p:sp>
-        <p:nvSpPr>
-          <p:cNvPr id="10" name="TextBox 9"/>
-          <p:cNvSpPr txBox="1"/>
-          <p:nvPr/>
-        </p:nvSpPr>
-        <p:spPr>
-          <a:xfrm>
-            <a:off x="4544568" y="3063240"/>
-            <a:ext cx="3383280" cy="457200"/>
-          </a:xfrm>
-          <a:prstGeom prst="rect">
-            <a:avLst/>
-          </a:prstGeom>
-          <a:noFill/>
-        </p:spPr>
-        <p:txBody>
-          <a:bodyPr wrap="square" anchor="t" lIns="0" rIns="0" tIns="0" bIns="0">
-            <a:spAutoFit/>
-          </a:bodyPr>
-          <a:lstStyle/>
-          <a:p>
-            <a:pPr algn="l">
-              <a:lnSpc>
-                <a:spcPct val="100000"/>
-              </a:lnSpc>
-            </a:pPr>
-            <a:r>
-              <a:rPr sz="1500" b="1" i="0">
-                <a:solidFill>
-                  <a:srgbClr val="E8641B"/>
-                </a:solidFill>
-                <a:latin typeface="Cambria"/>
-              </a:rPr>
-              <a:t>02</a:t>
-            </a:r>
-          </a:p>
-        </p:txBody>
-      </p:sp>
-      <p:sp>
-        <p:nvSpPr>
-          <p:cNvPr id="11" name="TextBox 10"/>
-          <p:cNvSpPr txBox="1"/>
-          <p:nvPr/>
-        </p:nvSpPr>
-        <p:spPr>
-          <a:xfrm>
-            <a:off x="4544568" y="3447288"/>
-            <a:ext cx="3383280" cy="457200"/>
-          </a:xfrm>
-          <a:prstGeom prst="rect">
-            <a:avLst/>
-          </a:prstGeom>
-          <a:noFill/>
-        </p:spPr>
-        <p:txBody>
-          <a:bodyPr wrap="square" anchor="t" lIns="0" rIns="0" tIns="0" bIns="0">
-            <a:spAutoFit/>
-          </a:bodyPr>
-          <a:lstStyle/>
-          <a:p>
-            <a:pPr algn="l">
-              <a:lnSpc>
-                <a:spcPct val="100000"/>
-              </a:lnSpc>
-            </a:pPr>
-            <a:r>
-              <a:rPr sz="2100" b="1" i="0">
-                <a:solidFill>
-                  <a:srgbClr val="F7F1E6"/>
-                </a:solidFill>
-                <a:latin typeface="Cambria"/>
-              </a:rPr>
-              <a:t>On garantit</a:t>
-            </a:r>
-          </a:p>
-        </p:txBody>
-      </p:sp>
-      <p:sp>
-        <p:nvSpPr>
-          <p:cNvPr id="12" name="TextBox 11"/>
-          <p:cNvSpPr txBox="1"/>
-          <p:nvPr/>
-        </p:nvSpPr>
-        <p:spPr>
-          <a:xfrm>
-            <a:off x="4544568" y="3931920"/>
-            <a:ext cx="3383280" cy="548640"/>
-          </a:xfrm>
-          <a:prstGeom prst="rect">
-            <a:avLst/>
-          </a:prstGeom>
-          <a:noFill/>
-        </p:spPr>
-        <p:txBody>
-          <a:bodyPr wrap="square" anchor="t" lIns="0" rIns="0" tIns="0" bIns="0">
-            <a:spAutoFit/>
-          </a:bodyPr>
-          <a:lstStyle/>
-          <a:p>
-            <a:pPr algn="l">
-              <a:lnSpc>
-                <a:spcPct val="110000"/>
-              </a:lnSpc>
-            </a:pPr>
-            <a:r>
-              <a:rPr sz="1400" b="0" i="0">
-                <a:solidFill>
-                  <a:srgbClr val="B7AE9E"/>
-                </a:solidFill>
-                <a:latin typeface="Calibri"/>
-              </a:rPr>
-              <a:t>Mises à jour &amp; support inclus.</a:t>
-            </a:r>
-          </a:p>
-        </p:txBody>
-      </p:sp>
-      <p:sp>
-        <p:nvSpPr>
-          <p:cNvPr id="13" name="TextBox 12"/>
-          <p:cNvSpPr txBox="1"/>
-          <p:nvPr/>
-        </p:nvSpPr>
-        <p:spPr>
-          <a:xfrm>
-            <a:off x="8311896" y="3063240"/>
-            <a:ext cx="3383280" cy="457200"/>
-          </a:xfrm>
-          <a:prstGeom prst="rect">
-            <a:avLst/>
-          </a:prstGeom>
-          <a:noFill/>
-        </p:spPr>
-        <p:txBody>
-          <a:bodyPr wrap="square" anchor="t" lIns="0" rIns="0" tIns="0" bIns="0">
-            <a:spAutoFit/>
-          </a:bodyPr>
-          <a:lstStyle/>
-          <a:p>
-            <a:pPr algn="l">
-              <a:lnSpc>
-                <a:spcPct val="100000"/>
-              </a:lnSpc>
-            </a:pPr>
-            <a:r>
-              <a:rPr sz="1500" b="1" i="0">
-                <a:solidFill>
-                  <a:srgbClr val="E8641B"/>
-                </a:solidFill>
-                <a:latin typeface="Cambria"/>
-              </a:rPr>
-              <a:t>03</a:t>
-            </a:r>
-          </a:p>
-        </p:txBody>
-      </p:sp>
-      <p:sp>
-        <p:nvSpPr>
-          <p:cNvPr id="14" name="TextBox 13"/>
-          <p:cNvSpPr txBox="1"/>
-          <p:nvPr/>
-        </p:nvSpPr>
-        <p:spPr>
-          <a:xfrm>
-            <a:off x="8311896" y="3447288"/>
-            <a:ext cx="3383280" cy="457200"/>
-          </a:xfrm>
-          <a:prstGeom prst="rect">
-            <a:avLst/>
-          </a:prstGeom>
-          <a:noFill/>
-        </p:spPr>
-        <p:txBody>
-          <a:bodyPr wrap="square" anchor="t" lIns="0" rIns="0" tIns="0" bIns="0">
-            <a:spAutoFit/>
-          </a:bodyPr>
-          <a:lstStyle/>
-          <a:p>
-            <a:pPr algn="l">
-              <a:lnSpc>
-                <a:spcPct val="100000"/>
-              </a:lnSpc>
-            </a:pPr>
-            <a:r>
-              <a:rPr sz="2100" b="1" i="0">
-                <a:solidFill>
-                  <a:srgbClr val="F7F1E6"/>
-                </a:solidFill>
-                <a:latin typeface="Cambria"/>
-              </a:rPr>
-              <a:t>On fait grandir</a:t>
-            </a:r>
-          </a:p>
-        </p:txBody>
-      </p:sp>
-      <p:sp>
-        <p:nvSpPr>
-          <p:cNvPr id="15" name="TextBox 14"/>
-          <p:cNvSpPr txBox="1"/>
-          <p:nvPr/>
-        </p:nvSpPr>
-        <p:spPr>
-          <a:xfrm>
-            <a:off x="8311896" y="3931920"/>
-            <a:ext cx="3383280" cy="548640"/>
-          </a:xfrm>
-          <a:prstGeom prst="rect">
-            <a:avLst/>
-          </a:prstGeom>
-          <a:noFill/>
-        </p:spPr>
-        <p:txBody>
-          <a:bodyPr wrap="square" anchor="t" lIns="0" rIns="0" tIns="0" bIns="0">
-            <a:spAutoFit/>
-          </a:bodyPr>
-          <a:lstStyle/>
-          <a:p>
-            <a:pPr algn="l">
-              <a:lnSpc>
-                <a:spcPct val="110000"/>
-              </a:lnSpc>
-            </a:pPr>
-            <a:r>
-              <a:rPr sz="1400" b="0" i="0">
-                <a:solidFill>
-                  <a:srgbClr val="B7AE9E"/>
-                </a:solidFill>
-                <a:latin typeface="Calibri"/>
-              </a:rPr>
-              <a:t>Tunnels, ads, CRM, IA.</a:t>
-            </a:r>
-          </a:p>
-        </p:txBody>
-      </p:sp>
-      <p:sp>
-        <p:nvSpPr>
-          <p:cNvPr id="16" name="Rectangle 15"/>
+              <a:t>Quand vous êtes prêt à attirer plus de clients, on active la machine.</a:t>
+            </a:r>
+          </a:p>
+        </p:txBody>
+      </p:sp>
+      <p:sp>
+        <p:nvSpPr>
+          <p:cNvPr id="7" name="Rounded Rectangle 6"/>
           <p:cNvSpPr/>
           <p:nvPr/>
         </p:nvSpPr>
         <p:spPr>
           <a:xfrm>
-            <a:off x="777240" y="4892040"/>
-            <a:ext cx="10607040" cy="12801"/>
-          </a:xfrm>
-          <a:prstGeom prst="rect">
-            <a:avLst/>
+            <a:off x="777240" y="2286000"/>
+            <a:ext cx="3401568" cy="1572768"/>
+          </a:xfrm>
+          <a:prstGeom prst="roundRect">
+            <a:avLst>
+              <a:gd name="adj" fmla="val 7000"/>
+            </a:avLst>
           </a:prstGeom>
           <a:solidFill>
-            <a:srgbClr val="4A433A"/>
+            <a:srgbClr val="FFFDFA"/>
           </a:solidFill>
-          <a:ln>
-            <a:noFill/>
+          <a:ln w="12700">
+            <a:solidFill>
+              <a:srgbClr val="E8E0D2"/>
+            </a:solidFill>
           </a:ln>
           <a:effectLst/>
         </p:spPr>
@@ -10011,6 +10381,330 @@
           </a:p>
         </p:txBody>
       </p:sp>
+      <p:pic>
+        <p:nvPicPr>
+          <p:cNvPr id="8" name="Picture 7" descr="funnel.png"/>
+          <p:cNvPicPr>
+            <a:picLocks noChangeAspect="1"/>
+          </p:cNvPicPr>
+          <p:nvPr/>
+        </p:nvPicPr>
+        <p:blipFill>
+          <a:blip r:embed="rId2"/>
+          <a:stretch>
+            <a:fillRect/>
+          </a:stretch>
+        </p:blipFill>
+        <p:spPr>
+          <a:xfrm>
+            <a:off x="1088136" y="2651760"/>
+            <a:ext cx="822960" cy="822960"/>
+          </a:xfrm>
+          <a:prstGeom prst="rect">
+            <a:avLst/>
+          </a:prstGeom>
+        </p:spPr>
+      </p:pic>
+      <p:sp>
+        <p:nvSpPr>
+          <p:cNvPr id="9" name="TextBox 8"/>
+          <p:cNvSpPr txBox="1"/>
+          <p:nvPr/>
+        </p:nvSpPr>
+        <p:spPr>
+          <a:xfrm>
+            <a:off x="2057400" y="2596896"/>
+            <a:ext cx="1984248" cy="365760"/>
+          </a:xfrm>
+          <a:prstGeom prst="rect">
+            <a:avLst/>
+          </a:prstGeom>
+          <a:noFill/>
+        </p:spPr>
+        <p:txBody>
+          <a:bodyPr wrap="square" anchor="t" lIns="0" rIns="0" tIns="0" bIns="0">
+            <a:spAutoFit/>
+          </a:bodyPr>
+          <a:lstStyle/>
+          <a:p>
+            <a:pPr algn="l">
+              <a:lnSpc>
+                <a:spcPct val="100000"/>
+              </a:lnSpc>
+            </a:pPr>
+            <a:r>
+              <a:rPr sz="1650" b="1" i="0">
+                <a:solidFill>
+                  <a:srgbClr val="2B2620"/>
+                </a:solidFill>
+                <a:latin typeface="Cambria"/>
+              </a:rPr>
+              <a:t>Tunnel de vente</a:t>
+            </a:r>
+          </a:p>
+        </p:txBody>
+      </p:sp>
+      <p:sp>
+        <p:nvSpPr>
+          <p:cNvPr id="10" name="TextBox 9"/>
+          <p:cNvSpPr txBox="1"/>
+          <p:nvPr/>
+        </p:nvSpPr>
+        <p:spPr>
+          <a:xfrm>
+            <a:off x="2057400" y="3035808"/>
+            <a:ext cx="1938528" cy="731520"/>
+          </a:xfrm>
+          <a:prstGeom prst="rect">
+            <a:avLst/>
+          </a:prstGeom>
+          <a:noFill/>
+        </p:spPr>
+        <p:txBody>
+          <a:bodyPr wrap="square" anchor="t" lIns="0" rIns="0" tIns="0" bIns="0">
+            <a:spAutoFit/>
+          </a:bodyPr>
+          <a:lstStyle/>
+          <a:p>
+            <a:pPr algn="l">
+              <a:lnSpc>
+                <a:spcPct val="108000"/>
+              </a:lnSpc>
+            </a:pPr>
+            <a:r>
+              <a:rPr sz="1250" b="0" i="0">
+                <a:solidFill>
+                  <a:srgbClr val="6E665A"/>
+                </a:solidFill>
+                <a:latin typeface="Calibri"/>
+              </a:rPr>
+              <a:t>Un parcours pensé pour transformer le visiteur en client.</a:t>
+            </a:r>
+          </a:p>
+        </p:txBody>
+      </p:sp>
+      <p:sp>
+        <p:nvSpPr>
+          <p:cNvPr id="11" name="Rounded Rectangle 10"/>
+          <p:cNvSpPr/>
+          <p:nvPr/>
+        </p:nvSpPr>
+        <p:spPr>
+          <a:xfrm>
+            <a:off x="4526280" y="2286000"/>
+            <a:ext cx="3401568" cy="1572768"/>
+          </a:xfrm>
+          <a:prstGeom prst="roundRect">
+            <a:avLst>
+              <a:gd name="adj" fmla="val 7000"/>
+            </a:avLst>
+          </a:prstGeom>
+          <a:solidFill>
+            <a:srgbClr val="FFFDFA"/>
+          </a:solidFill>
+          <a:ln w="12700">
+            <a:solidFill>
+              <a:srgbClr val="E8E0D2"/>
+            </a:solidFill>
+          </a:ln>
+          <a:effectLst/>
+        </p:spPr>
+        <p:style>
+          <a:lnRef idx="1">
+            <a:schemeClr val="accent1"/>
+          </a:lnRef>
+          <a:fillRef idx="3">
+            <a:schemeClr val="accent1"/>
+          </a:fillRef>
+          <a:effectRef idx="2">
+            <a:schemeClr val="accent1"/>
+          </a:effectRef>
+          <a:fontRef idx="minor">
+            <a:schemeClr val="lt1"/>
+          </a:fontRef>
+        </p:style>
+        <p:txBody>
+          <a:bodyPr rtlCol="0" anchor="ctr"/>
+          <a:lstStyle/>
+          <a:p>
+            <a:pPr algn="ctr"/>
+          </a:p>
+        </p:txBody>
+      </p:sp>
+      <p:pic>
+        <p:nvPicPr>
+          <p:cNvPr id="12" name="Picture 11" descr="play.png"/>
+          <p:cNvPicPr>
+            <a:picLocks noChangeAspect="1"/>
+          </p:cNvPicPr>
+          <p:nvPr/>
+        </p:nvPicPr>
+        <p:blipFill>
+          <a:blip r:embed="rId3"/>
+          <a:stretch>
+            <a:fillRect/>
+          </a:stretch>
+        </p:blipFill>
+        <p:spPr>
+          <a:xfrm>
+            <a:off x="4837176" y="2651760"/>
+            <a:ext cx="822960" cy="822960"/>
+          </a:xfrm>
+          <a:prstGeom prst="rect">
+            <a:avLst/>
+          </a:prstGeom>
+        </p:spPr>
+      </p:pic>
+      <p:sp>
+        <p:nvSpPr>
+          <p:cNvPr id="13" name="TextBox 12"/>
+          <p:cNvSpPr txBox="1"/>
+          <p:nvPr/>
+        </p:nvSpPr>
+        <p:spPr>
+          <a:xfrm>
+            <a:off x="5806440" y="2596896"/>
+            <a:ext cx="1984248" cy="365760"/>
+          </a:xfrm>
+          <a:prstGeom prst="rect">
+            <a:avLst/>
+          </a:prstGeom>
+          <a:noFill/>
+        </p:spPr>
+        <p:txBody>
+          <a:bodyPr wrap="square" anchor="t" lIns="0" rIns="0" tIns="0" bIns="0">
+            <a:spAutoFit/>
+          </a:bodyPr>
+          <a:lstStyle/>
+          <a:p>
+            <a:pPr algn="l">
+              <a:lnSpc>
+                <a:spcPct val="100000"/>
+              </a:lnSpc>
+            </a:pPr>
+            <a:r>
+              <a:rPr sz="1650" b="1" i="0">
+                <a:solidFill>
+                  <a:srgbClr val="2B2620"/>
+                </a:solidFill>
+                <a:latin typeface="Cambria"/>
+              </a:rPr>
+              <a:t>VSL</a:t>
+            </a:r>
+          </a:p>
+        </p:txBody>
+      </p:sp>
+      <p:sp>
+        <p:nvSpPr>
+          <p:cNvPr id="14" name="TextBox 13"/>
+          <p:cNvSpPr txBox="1"/>
+          <p:nvPr/>
+        </p:nvSpPr>
+        <p:spPr>
+          <a:xfrm>
+            <a:off x="5806440" y="3035808"/>
+            <a:ext cx="1938528" cy="731520"/>
+          </a:xfrm>
+          <a:prstGeom prst="rect">
+            <a:avLst/>
+          </a:prstGeom>
+          <a:noFill/>
+        </p:spPr>
+        <p:txBody>
+          <a:bodyPr wrap="square" anchor="t" lIns="0" rIns="0" tIns="0" bIns="0">
+            <a:spAutoFit/>
+          </a:bodyPr>
+          <a:lstStyle/>
+          <a:p>
+            <a:pPr algn="l">
+              <a:lnSpc>
+                <a:spcPct val="108000"/>
+              </a:lnSpc>
+            </a:pPr>
+            <a:r>
+              <a:rPr sz="1250" b="0" i="0">
+                <a:solidFill>
+                  <a:srgbClr val="6E665A"/>
+                </a:solidFill>
+                <a:latin typeface="Calibri"/>
+              </a:rPr>
+              <a:t>Une vidéo qui vend votre restaurant à votre place.</a:t>
+            </a:r>
+          </a:p>
+        </p:txBody>
+      </p:sp>
+      <p:sp>
+        <p:nvSpPr>
+          <p:cNvPr id="15" name="Rounded Rectangle 14"/>
+          <p:cNvSpPr/>
+          <p:nvPr/>
+        </p:nvSpPr>
+        <p:spPr>
+          <a:xfrm>
+            <a:off x="8275320" y="2286000"/>
+            <a:ext cx="3401568" cy="1572768"/>
+          </a:xfrm>
+          <a:prstGeom prst="roundRect">
+            <a:avLst>
+              <a:gd name="adj" fmla="val 7000"/>
+            </a:avLst>
+          </a:prstGeom>
+          <a:solidFill>
+            <a:srgbClr val="FFFDFA"/>
+          </a:solidFill>
+          <a:ln w="12700">
+            <a:solidFill>
+              <a:srgbClr val="E8E0D2"/>
+            </a:solidFill>
+          </a:ln>
+          <a:effectLst/>
+        </p:spPr>
+        <p:style>
+          <a:lnRef idx="1">
+            <a:schemeClr val="accent1"/>
+          </a:lnRef>
+          <a:fillRef idx="3">
+            <a:schemeClr val="accent1"/>
+          </a:fillRef>
+          <a:effectRef idx="2">
+            <a:schemeClr val="accent1"/>
+          </a:effectRef>
+          <a:fontRef idx="minor">
+            <a:schemeClr val="lt1"/>
+          </a:fontRef>
+        </p:style>
+        <p:txBody>
+          <a:bodyPr rtlCol="0" anchor="ctr"/>
+          <a:lstStyle/>
+          <a:p>
+            <a:pPr algn="ctr"/>
+          </a:p>
+        </p:txBody>
+      </p:sp>
+      <p:pic>
+        <p:nvPicPr>
+          <p:cNvPr id="16" name="Picture 15" descr="doc.png"/>
+          <p:cNvPicPr>
+            <a:picLocks noChangeAspect="1"/>
+          </p:cNvPicPr>
+          <p:nvPr/>
+        </p:nvPicPr>
+        <p:blipFill>
+          <a:blip r:embed="rId4"/>
+          <a:stretch>
+            <a:fillRect/>
+          </a:stretch>
+        </p:blipFill>
+        <p:spPr>
+          <a:xfrm>
+            <a:off x="8586216" y="2651760"/>
+            <a:ext cx="822960" cy="822960"/>
+          </a:xfrm>
+          <a:prstGeom prst="rect">
+            <a:avLst/>
+          </a:prstGeom>
+        </p:spPr>
+      </p:pic>
       <p:sp>
         <p:nvSpPr>
           <p:cNvPr id="17" name="TextBox 16"/>
@@ -10019,8 +10713,8 @@
         </p:nvSpPr>
         <p:spPr>
           <a:xfrm>
-            <a:off x="777240" y="5257800"/>
-            <a:ext cx="10607040" cy="640080"/>
+            <a:off x="9555480" y="2596896"/>
+            <a:ext cx="1984248" cy="365760"/>
           </a:xfrm>
           <a:prstGeom prst="rect">
             <a:avLst/>
@@ -10039,45 +10733,327 @@
               </a:lnSpc>
             </a:pPr>
             <a:r>
-              <a:rPr sz="2600" b="0" i="0">
-                <a:solidFill>
-                  <a:srgbClr val="F7F1E6"/>
+              <a:rPr sz="1650" b="1" i="0">
+                <a:solidFill>
+                  <a:srgbClr val="2B2620"/>
                 </a:solidFill>
                 <a:latin typeface="Cambria"/>
               </a:rPr>
-              <a:t>On construit votre site </a:t>
-            </a:r>
-            <a:r>
-              <a:rPr sz="2600" b="1" i="0">
-                <a:solidFill>
-                  <a:srgbClr val="E8641B"/>
+              <a:t>Copywriting</a:t>
+            </a:r>
+          </a:p>
+        </p:txBody>
+      </p:sp>
+      <p:sp>
+        <p:nvSpPr>
+          <p:cNvPr id="18" name="TextBox 17"/>
+          <p:cNvSpPr txBox="1"/>
+          <p:nvPr/>
+        </p:nvSpPr>
+        <p:spPr>
+          <a:xfrm>
+            <a:off x="9555480" y="3035808"/>
+            <a:ext cx="1938528" cy="731520"/>
+          </a:xfrm>
+          <a:prstGeom prst="rect">
+            <a:avLst/>
+          </a:prstGeom>
+          <a:noFill/>
+        </p:spPr>
+        <p:txBody>
+          <a:bodyPr wrap="square" anchor="t" lIns="0" rIns="0" tIns="0" bIns="0">
+            <a:spAutoFit/>
+          </a:bodyPr>
+          <a:lstStyle/>
+          <a:p>
+            <a:pPr algn="l">
+              <a:lnSpc>
+                <a:spcPct val="108000"/>
+              </a:lnSpc>
+            </a:pPr>
+            <a:r>
+              <a:rPr sz="1250" b="0" i="0">
+                <a:solidFill>
+                  <a:srgbClr val="6E665A"/>
+                </a:solidFill>
+                <a:latin typeface="Calibri"/>
+              </a:rPr>
+              <a:t>Les mots justes qui donnent envie de réserver.</a:t>
+            </a:r>
+          </a:p>
+        </p:txBody>
+      </p:sp>
+      <p:sp>
+        <p:nvSpPr>
+          <p:cNvPr id="19" name="Rounded Rectangle 18"/>
+          <p:cNvSpPr/>
+          <p:nvPr/>
+        </p:nvSpPr>
+        <p:spPr>
+          <a:xfrm>
+            <a:off x="777240" y="4169664"/>
+            <a:ext cx="3401568" cy="1572768"/>
+          </a:xfrm>
+          <a:prstGeom prst="roundRect">
+            <a:avLst>
+              <a:gd name="adj" fmla="val 7000"/>
+            </a:avLst>
+          </a:prstGeom>
+          <a:solidFill>
+            <a:srgbClr val="FFFDFA"/>
+          </a:solidFill>
+          <a:ln w="12700">
+            <a:solidFill>
+              <a:srgbClr val="E8E0D2"/>
+            </a:solidFill>
+          </a:ln>
+          <a:effectLst/>
+        </p:spPr>
+        <p:style>
+          <a:lnRef idx="1">
+            <a:schemeClr val="accent1"/>
+          </a:lnRef>
+          <a:fillRef idx="3">
+            <a:schemeClr val="accent1"/>
+          </a:fillRef>
+          <a:effectRef idx="2">
+            <a:schemeClr val="accent1"/>
+          </a:effectRef>
+          <a:fontRef idx="minor">
+            <a:schemeClr val="lt1"/>
+          </a:fontRef>
+        </p:style>
+        <p:txBody>
+          <a:bodyPr rtlCol="0" anchor="ctr"/>
+          <a:lstStyle/>
+          <a:p>
+            <a:pPr algn="ctr"/>
+          </a:p>
+        </p:txBody>
+      </p:sp>
+      <p:pic>
+        <p:nvPicPr>
+          <p:cNvPr id="20" name="Picture 19" descr="megaphone.png"/>
+          <p:cNvPicPr>
+            <a:picLocks noChangeAspect="1"/>
+          </p:cNvPicPr>
+          <p:nvPr/>
+        </p:nvPicPr>
+        <p:blipFill>
+          <a:blip r:embed="rId5"/>
+          <a:stretch>
+            <a:fillRect/>
+          </a:stretch>
+        </p:blipFill>
+        <p:spPr>
+          <a:xfrm>
+            <a:off x="1088136" y="4535424"/>
+            <a:ext cx="822960" cy="822960"/>
+          </a:xfrm>
+          <a:prstGeom prst="rect">
+            <a:avLst/>
+          </a:prstGeom>
+        </p:spPr>
+      </p:pic>
+      <p:sp>
+        <p:nvSpPr>
+          <p:cNvPr id="21" name="TextBox 20"/>
+          <p:cNvSpPr txBox="1"/>
+          <p:nvPr/>
+        </p:nvSpPr>
+        <p:spPr>
+          <a:xfrm>
+            <a:off x="2057400" y="4480560"/>
+            <a:ext cx="1984248" cy="365760"/>
+          </a:xfrm>
+          <a:prstGeom prst="rect">
+            <a:avLst/>
+          </a:prstGeom>
+          <a:noFill/>
+        </p:spPr>
+        <p:txBody>
+          <a:bodyPr wrap="square" anchor="t" lIns="0" rIns="0" tIns="0" bIns="0">
+            <a:spAutoFit/>
+          </a:bodyPr>
+          <a:lstStyle/>
+          <a:p>
+            <a:pPr algn="l">
+              <a:lnSpc>
+                <a:spcPct val="100000"/>
+              </a:lnSpc>
+            </a:pPr>
+            <a:r>
+              <a:rPr sz="1650" b="1" i="0">
+                <a:solidFill>
+                  <a:srgbClr val="2B2620"/>
                 </a:solidFill>
                 <a:latin typeface="Cambria"/>
               </a:rPr>
-              <a:t>cette semaine</a:t>
-            </a:r>
-            <a:r>
-              <a:rPr sz="2600" b="0" i="0">
-                <a:solidFill>
-                  <a:srgbClr val="F7F1E6"/>
+              <a:t>Publicité / Ads</a:t>
+            </a:r>
+          </a:p>
+        </p:txBody>
+      </p:sp>
+      <p:sp>
+        <p:nvSpPr>
+          <p:cNvPr id="22" name="TextBox 21"/>
+          <p:cNvSpPr txBox="1"/>
+          <p:nvPr/>
+        </p:nvSpPr>
+        <p:spPr>
+          <a:xfrm>
+            <a:off x="2057400" y="4919472"/>
+            <a:ext cx="1938528" cy="731520"/>
+          </a:xfrm>
+          <a:prstGeom prst="rect">
+            <a:avLst/>
+          </a:prstGeom>
+          <a:noFill/>
+        </p:spPr>
+        <p:txBody>
+          <a:bodyPr wrap="square" anchor="t" lIns="0" rIns="0" tIns="0" bIns="0">
+            <a:spAutoFit/>
+          </a:bodyPr>
+          <a:lstStyle/>
+          <a:p>
+            <a:pPr algn="l">
+              <a:lnSpc>
+                <a:spcPct val="108000"/>
+              </a:lnSpc>
+            </a:pPr>
+            <a:r>
+              <a:rPr sz="1250" b="0" i="0">
+                <a:solidFill>
+                  <a:srgbClr val="6E665A"/>
+                </a:solidFill>
+                <a:latin typeface="Calibri"/>
+              </a:rPr>
+              <a:t>Des campagnes ciblées pour remplir vos tables.</a:t>
+            </a:r>
+          </a:p>
+        </p:txBody>
+      </p:sp>
+      <p:sp>
+        <p:nvSpPr>
+          <p:cNvPr id="23" name="Rounded Rectangle 22"/>
+          <p:cNvSpPr/>
+          <p:nvPr/>
+        </p:nvSpPr>
+        <p:spPr>
+          <a:xfrm>
+            <a:off x="4526280" y="4169664"/>
+            <a:ext cx="3401568" cy="1572768"/>
+          </a:xfrm>
+          <a:prstGeom prst="roundRect">
+            <a:avLst>
+              <a:gd name="adj" fmla="val 7000"/>
+            </a:avLst>
+          </a:prstGeom>
+          <a:solidFill>
+            <a:srgbClr val="FFFDFA"/>
+          </a:solidFill>
+          <a:ln w="12700">
+            <a:solidFill>
+              <a:srgbClr val="E8E0D2"/>
+            </a:solidFill>
+          </a:ln>
+          <a:effectLst/>
+        </p:spPr>
+        <p:style>
+          <a:lnRef idx="1">
+            <a:schemeClr val="accent1"/>
+          </a:lnRef>
+          <a:fillRef idx="3">
+            <a:schemeClr val="accent1"/>
+          </a:fillRef>
+          <a:effectRef idx="2">
+            <a:schemeClr val="accent1"/>
+          </a:effectRef>
+          <a:fontRef idx="minor">
+            <a:schemeClr val="lt1"/>
+          </a:fontRef>
+        </p:style>
+        <p:txBody>
+          <a:bodyPr rtlCol="0" anchor="ctr"/>
+          <a:lstStyle/>
+          <a:p>
+            <a:pPr algn="ctr"/>
+          </a:p>
+        </p:txBody>
+      </p:sp>
+      <p:pic>
+        <p:nvPicPr>
+          <p:cNvPr id="24" name="Picture 23" descr="people.png"/>
+          <p:cNvPicPr>
+            <a:picLocks noChangeAspect="1"/>
+          </p:cNvPicPr>
+          <p:nvPr/>
+        </p:nvPicPr>
+        <p:blipFill>
+          <a:blip r:embed="rId6"/>
+          <a:stretch>
+            <a:fillRect/>
+          </a:stretch>
+        </p:blipFill>
+        <p:spPr>
+          <a:xfrm>
+            <a:off x="4837176" y="4535424"/>
+            <a:ext cx="822960" cy="822960"/>
+          </a:xfrm>
+          <a:prstGeom prst="rect">
+            <a:avLst/>
+          </a:prstGeom>
+        </p:spPr>
+      </p:pic>
+      <p:sp>
+        <p:nvSpPr>
+          <p:cNvPr id="25" name="TextBox 24"/>
+          <p:cNvSpPr txBox="1"/>
+          <p:nvPr/>
+        </p:nvSpPr>
+        <p:spPr>
+          <a:xfrm>
+            <a:off x="5806440" y="4480560"/>
+            <a:ext cx="1984248" cy="365760"/>
+          </a:xfrm>
+          <a:prstGeom prst="rect">
+            <a:avLst/>
+          </a:prstGeom>
+          <a:noFill/>
+        </p:spPr>
+        <p:txBody>
+          <a:bodyPr wrap="square" anchor="t" lIns="0" rIns="0" tIns="0" bIns="0">
+            <a:spAutoFit/>
+          </a:bodyPr>
+          <a:lstStyle/>
+          <a:p>
+            <a:pPr algn="l">
+              <a:lnSpc>
+                <a:spcPct val="100000"/>
+              </a:lnSpc>
+            </a:pPr>
+            <a:r>
+              <a:rPr sz="1650" b="1" i="0">
+                <a:solidFill>
+                  <a:srgbClr val="2B2620"/>
                 </a:solidFill>
                 <a:latin typeface="Cambria"/>
               </a:rPr>
-              <a:t> ?</a:t>
-            </a:r>
-          </a:p>
-        </p:txBody>
-      </p:sp>
-      <p:sp>
-        <p:nvSpPr>
-          <p:cNvPr id="18" name="TextBox 17"/>
-          <p:cNvSpPr txBox="1"/>
-          <p:nvPr/>
-        </p:nvSpPr>
-        <p:spPr>
-          <a:xfrm>
-            <a:off x="777240" y="5989320"/>
-            <a:ext cx="10607040" cy="365760"/>
+              <a:t>CRM</a:t>
+            </a:r>
+          </a:p>
+        </p:txBody>
+      </p:sp>
+      <p:sp>
+        <p:nvSpPr>
+          <p:cNvPr id="26" name="TextBox 25"/>
+          <p:cNvSpPr txBox="1"/>
+          <p:nvPr/>
+        </p:nvSpPr>
+        <p:spPr>
+          <a:xfrm>
+            <a:off x="5806440" y="4919472"/>
+            <a:ext cx="1938528" cy="731520"/>
           </a:xfrm>
           <a:prstGeom prst="rect">
             <a:avLst/>
@@ -10092,17 +11068,167 @@
           <a:p>
             <a:pPr algn="l">
               <a:lnSpc>
+                <a:spcPct val="108000"/>
+              </a:lnSpc>
+            </a:pPr>
+            <a:r>
+              <a:rPr sz="1250" b="0" i="0">
+                <a:solidFill>
+                  <a:srgbClr val="6E665A"/>
+                </a:solidFill>
+                <a:latin typeface="Calibri"/>
+              </a:rPr>
+              <a:t>Gardez le contact et faites revenir vos clients.</a:t>
+            </a:r>
+          </a:p>
+        </p:txBody>
+      </p:sp>
+      <p:sp>
+        <p:nvSpPr>
+          <p:cNvPr id="27" name="Rounded Rectangle 26"/>
+          <p:cNvSpPr/>
+          <p:nvPr/>
+        </p:nvSpPr>
+        <p:spPr>
+          <a:xfrm>
+            <a:off x="8275320" y="4169664"/>
+            <a:ext cx="3401568" cy="1572768"/>
+          </a:xfrm>
+          <a:prstGeom prst="roundRect">
+            <a:avLst>
+              <a:gd name="adj" fmla="val 7000"/>
+            </a:avLst>
+          </a:prstGeom>
+          <a:solidFill>
+            <a:srgbClr val="FFFDFA"/>
+          </a:solidFill>
+          <a:ln w="12700">
+            <a:solidFill>
+              <a:srgbClr val="E8E0D2"/>
+            </a:solidFill>
+          </a:ln>
+          <a:effectLst/>
+        </p:spPr>
+        <p:style>
+          <a:lnRef idx="1">
+            <a:schemeClr val="accent1"/>
+          </a:lnRef>
+          <a:fillRef idx="3">
+            <a:schemeClr val="accent1"/>
+          </a:fillRef>
+          <a:effectRef idx="2">
+            <a:schemeClr val="accent1"/>
+          </a:effectRef>
+          <a:fontRef idx="minor">
+            <a:schemeClr val="lt1"/>
+          </a:fontRef>
+        </p:style>
+        <p:txBody>
+          <a:bodyPr rtlCol="0" anchor="ctr"/>
+          <a:lstStyle/>
+          <a:p>
+            <a:pPr algn="ctr"/>
+          </a:p>
+        </p:txBody>
+      </p:sp>
+      <p:pic>
+        <p:nvPicPr>
+          <p:cNvPr id="28" name="Picture 27" descr="chip.png"/>
+          <p:cNvPicPr>
+            <a:picLocks noChangeAspect="1"/>
+          </p:cNvPicPr>
+          <p:nvPr/>
+        </p:nvPicPr>
+        <p:blipFill>
+          <a:blip r:embed="rId7"/>
+          <a:stretch>
+            <a:fillRect/>
+          </a:stretch>
+        </p:blipFill>
+        <p:spPr>
+          <a:xfrm>
+            <a:off x="8586216" y="4535424"/>
+            <a:ext cx="822960" cy="822960"/>
+          </a:xfrm>
+          <a:prstGeom prst="rect">
+            <a:avLst/>
+          </a:prstGeom>
+        </p:spPr>
+      </p:pic>
+      <p:sp>
+        <p:nvSpPr>
+          <p:cNvPr id="29" name="TextBox 28"/>
+          <p:cNvSpPr txBox="1"/>
+          <p:nvPr/>
+        </p:nvSpPr>
+        <p:spPr>
+          <a:xfrm>
+            <a:off x="9555480" y="4480560"/>
+            <a:ext cx="1984248" cy="365760"/>
+          </a:xfrm>
+          <a:prstGeom prst="rect">
+            <a:avLst/>
+          </a:prstGeom>
+          <a:noFill/>
+        </p:spPr>
+        <p:txBody>
+          <a:bodyPr wrap="square" anchor="t" lIns="0" rIns="0" tIns="0" bIns="0">
+            <a:spAutoFit/>
+          </a:bodyPr>
+          <a:lstStyle/>
+          <a:p>
+            <a:pPr algn="l">
+              <a:lnSpc>
                 <a:spcPct val="100000"/>
               </a:lnSpc>
             </a:pPr>
             <a:r>
-              <a:rPr sz="1250" b="1" i="0">
-                <a:solidFill>
-                  <a:srgbClr val="9A9384"/>
+              <a:rPr sz="1650" b="1" i="0">
+                <a:solidFill>
+                  <a:srgbClr val="2B2620"/>
+                </a:solidFill>
+                <a:latin typeface="Cambria"/>
+              </a:rPr>
+              <a:t>Agent IA</a:t>
+            </a:r>
+          </a:p>
+        </p:txBody>
+      </p:sp>
+      <p:sp>
+        <p:nvSpPr>
+          <p:cNvPr id="30" name="TextBox 29"/>
+          <p:cNvSpPr txBox="1"/>
+          <p:nvPr/>
+        </p:nvSpPr>
+        <p:spPr>
+          <a:xfrm>
+            <a:off x="9555480" y="4919472"/>
+            <a:ext cx="1938528" cy="731520"/>
+          </a:xfrm>
+          <a:prstGeom prst="rect">
+            <a:avLst/>
+          </a:prstGeom>
+          <a:noFill/>
+        </p:spPr>
+        <p:txBody>
+          <a:bodyPr wrap="square" anchor="t" lIns="0" rIns="0" tIns="0" bIns="0">
+            <a:spAutoFit/>
+          </a:bodyPr>
+          <a:lstStyle/>
+          <a:p>
+            <a:pPr algn="l">
+              <a:lnSpc>
+                <a:spcPct val="108000"/>
+              </a:lnSpc>
+            </a:pPr>
+            <a:r>
+              <a:rPr sz="1250" b="0" i="0">
+                <a:solidFill>
+                  <a:srgbClr val="6E665A"/>
                 </a:solidFill>
                 <a:latin typeface="Calibri"/>
               </a:rPr>
-              <a:t>UNIT — L'Atelier</a:t>
+              <a:t>Un assistant qui répond et réserve 24h/24.</a:t>
             </a:r>
           </a:p>
         </p:txBody>
@@ -10177,8 +11303,8 @@
         </p:nvSpPr>
         <p:spPr>
           <a:xfrm>
-            <a:off x="9692640" y="640080"/>
-            <a:ext cx="1920240" cy="1920240"/>
+            <a:off x="9966960" y="4297680"/>
+            <a:ext cx="2011680" cy="2011680"/>
           </a:xfrm>
           <a:prstGeom prst="ellipse">
             <a:avLst/>
@@ -10221,51 +11347,7 @@
         </p:nvSpPr>
         <p:spPr>
           <a:xfrm>
-            <a:off x="10424160" y="4480560"/>
-            <a:ext cx="1828800" cy="1828800"/>
-          </a:xfrm>
-          <a:prstGeom prst="ellipse">
-            <a:avLst/>
-          </a:prstGeom>
-          <a:noFill/>
-          <a:ln w="15240">
-            <a:solidFill>
-              <a:srgbClr val="3E382F"/>
-            </a:solidFill>
-          </a:ln>
-          <a:effectLst/>
-        </p:spPr>
-        <p:style>
-          <a:lnRef idx="1">
-            <a:schemeClr val="accent1"/>
-          </a:lnRef>
-          <a:fillRef idx="3">
-            <a:schemeClr val="accent1"/>
-          </a:fillRef>
-          <a:effectRef idx="2">
-            <a:schemeClr val="accent1"/>
-          </a:effectRef>
-          <a:fontRef idx="minor">
-            <a:schemeClr val="lt1"/>
-          </a:fontRef>
-        </p:style>
-        <p:txBody>
-          <a:bodyPr rtlCol="0" anchor="ctr"/>
-          <a:lstStyle/>
-          <a:p>
-            <a:pPr algn="ctr"/>
-          </a:p>
-        </p:txBody>
-      </p:sp>
-      <p:sp>
-        <p:nvSpPr>
-          <p:cNvPr id="5" name="Oval 4"/>
-          <p:cNvSpPr/>
-          <p:nvPr/>
-        </p:nvSpPr>
-        <p:spPr>
-          <a:xfrm>
-            <a:off x="777240" y="1856231"/>
+            <a:off x="777240" y="1307592"/>
             <a:ext cx="100584" cy="100584"/>
           </a:xfrm>
           <a:prstGeom prst="ellipse">
@@ -10303,14 +11385,53 @@
       </p:sp>
       <p:sp>
         <p:nvSpPr>
+          <p:cNvPr id="5" name="TextBox 4"/>
+          <p:cNvSpPr txBox="1"/>
+          <p:nvPr/>
+        </p:nvSpPr>
+        <p:spPr>
+          <a:xfrm>
+            <a:off x="996695" y="1234439"/>
+            <a:ext cx="5486400" cy="274320"/>
+          </a:xfrm>
+          <a:prstGeom prst="rect">
+            <a:avLst/>
+          </a:prstGeom>
+          <a:noFill/>
+        </p:spPr>
+        <p:txBody>
+          <a:bodyPr wrap="square" anchor="t" lIns="0" rIns="0" tIns="0" bIns="0">
+            <a:spAutoFit/>
+          </a:bodyPr>
+          <a:lstStyle/>
+          <a:p>
+            <a:pPr algn="l">
+              <a:lnSpc>
+                <a:spcPct val="100000"/>
+              </a:lnSpc>
+            </a:pPr>
+            <a:r>
+              <a:rPr sz="1250" b="1" i="0">
+                <a:solidFill>
+                  <a:srgbClr val="E8641B"/>
+                </a:solidFill>
+                <a:latin typeface="Calibri"/>
+              </a:rPr>
+              <a:t>EN RÉSUMÉ</a:t>
+            </a:r>
+          </a:p>
+        </p:txBody>
+      </p:sp>
+      <p:sp>
+        <p:nvSpPr>
           <p:cNvPr id="6" name="TextBox 5"/>
           <p:cNvSpPr txBox="1"/>
           <p:nvPr/>
         </p:nvSpPr>
         <p:spPr>
           <a:xfrm>
-            <a:off x="996695" y="1783080"/>
-            <a:ext cx="5486400" cy="274320"/>
+            <a:off x="777240" y="1645920"/>
+            <a:ext cx="10607040" cy="914400"/>
           </a:xfrm>
           <a:prstGeom prst="rect">
             <a:avLst/>
@@ -10329,27 +11450,144 @@
               </a:lnSpc>
             </a:pPr>
             <a:r>
-              <a:rPr sz="1250" b="1" i="0">
+              <a:rPr sz="4000" b="1" i="0">
+                <a:solidFill>
+                  <a:srgbClr val="F7F1E6"/>
+                </a:solidFill>
+                <a:latin typeface="Cambria"/>
+              </a:rPr>
+              <a:t>Un partenaire, pas un prestataire.</a:t>
+            </a:r>
+          </a:p>
+        </p:txBody>
+      </p:sp>
+      <p:sp>
+        <p:nvSpPr>
+          <p:cNvPr id="7" name="TextBox 6"/>
+          <p:cNvSpPr txBox="1"/>
+          <p:nvPr/>
+        </p:nvSpPr>
+        <p:spPr>
+          <a:xfrm>
+            <a:off x="777240" y="3063240"/>
+            <a:ext cx="3383280" cy="457200"/>
+          </a:xfrm>
+          <a:prstGeom prst="rect">
+            <a:avLst/>
+          </a:prstGeom>
+          <a:noFill/>
+        </p:spPr>
+        <p:txBody>
+          <a:bodyPr wrap="square" anchor="t" lIns="0" rIns="0" tIns="0" bIns="0">
+            <a:spAutoFit/>
+          </a:bodyPr>
+          <a:lstStyle/>
+          <a:p>
+            <a:pPr algn="l">
+              <a:lnSpc>
+                <a:spcPct val="100000"/>
+              </a:lnSpc>
+            </a:pPr>
+            <a:r>
+              <a:rPr sz="1500" b="1" i="0">
                 <a:solidFill>
                   <a:srgbClr val="E8641B"/>
                 </a:solidFill>
+                <a:latin typeface="Cambria"/>
+              </a:rPr>
+              <a:t>01</a:t>
+            </a:r>
+          </a:p>
+        </p:txBody>
+      </p:sp>
+      <p:sp>
+        <p:nvSpPr>
+          <p:cNvPr id="8" name="TextBox 7"/>
+          <p:cNvSpPr txBox="1"/>
+          <p:nvPr/>
+        </p:nvSpPr>
+        <p:spPr>
+          <a:xfrm>
+            <a:off x="777240" y="3447288"/>
+            <a:ext cx="3383280" cy="457200"/>
+          </a:xfrm>
+          <a:prstGeom prst="rect">
+            <a:avLst/>
+          </a:prstGeom>
+          <a:noFill/>
+        </p:spPr>
+        <p:txBody>
+          <a:bodyPr wrap="square" anchor="t" lIns="0" rIns="0" tIns="0" bIns="0">
+            <a:spAutoFit/>
+          </a:bodyPr>
+          <a:lstStyle/>
+          <a:p>
+            <a:pPr algn="l">
+              <a:lnSpc>
+                <a:spcPct val="100000"/>
+              </a:lnSpc>
+            </a:pPr>
+            <a:r>
+              <a:rPr sz="2100" b="1" i="0">
+                <a:solidFill>
+                  <a:srgbClr val="F7F1E6"/>
+                </a:solidFill>
+                <a:latin typeface="Cambria"/>
+              </a:rPr>
+              <a:t>On crée</a:t>
+            </a:r>
+          </a:p>
+        </p:txBody>
+      </p:sp>
+      <p:sp>
+        <p:nvSpPr>
+          <p:cNvPr id="9" name="TextBox 8"/>
+          <p:cNvSpPr txBox="1"/>
+          <p:nvPr/>
+        </p:nvSpPr>
+        <p:spPr>
+          <a:xfrm>
+            <a:off x="777240" y="3931920"/>
+            <a:ext cx="3383280" cy="548640"/>
+          </a:xfrm>
+          <a:prstGeom prst="rect">
+            <a:avLst/>
+          </a:prstGeom>
+          <a:noFill/>
+        </p:spPr>
+        <p:txBody>
+          <a:bodyPr wrap="square" anchor="t" lIns="0" rIns="0" tIns="0" bIns="0">
+            <a:spAutoFit/>
+          </a:bodyPr>
+          <a:lstStyle/>
+          <a:p>
+            <a:pPr algn="l">
+              <a:lnSpc>
+                <a:spcPct val="110000"/>
+              </a:lnSpc>
+            </a:pPr>
+            <a:r>
+              <a:rPr sz="1400" b="0" i="0">
+                <a:solidFill>
+                  <a:srgbClr val="B7AE9E"/>
+                </a:solidFill>
                 <a:latin typeface="Calibri"/>
               </a:rPr>
-              <a:t>SUPPORT COMMERCIAL · INTERNE</a:t>
-            </a:r>
-          </a:p>
-        </p:txBody>
-      </p:sp>
-      <p:sp>
-        <p:nvSpPr>
-          <p:cNvPr id="7" name="TextBox 6"/>
-          <p:cNvSpPr txBox="1"/>
-          <p:nvPr/>
-        </p:nvSpPr>
-        <p:spPr>
-          <a:xfrm>
-            <a:off x="777240" y="2194560"/>
-            <a:ext cx="10607040" cy="1097280"/>
+              <a:t>Un site à votre image.</a:t>
+            </a:r>
+          </a:p>
+        </p:txBody>
+      </p:sp>
+      <p:sp>
+        <p:nvSpPr>
+          <p:cNvPr id="10" name="TextBox 9"/>
+          <p:cNvSpPr txBox="1"/>
+          <p:nvPr/>
+        </p:nvSpPr>
+        <p:spPr>
+          <a:xfrm>
+            <a:off x="4544568" y="3063240"/>
+            <a:ext cx="3383280" cy="457200"/>
           </a:xfrm>
           <a:prstGeom prst="rect">
             <a:avLst/>
@@ -10368,27 +11606,66 @@
               </a:lnSpc>
             </a:pPr>
             <a:r>
-              <a:rPr sz="4600" b="1" i="0">
+              <a:rPr sz="1500" b="1" i="0">
+                <a:solidFill>
+                  <a:srgbClr val="E8641B"/>
+                </a:solidFill>
+                <a:latin typeface="Cambria"/>
+              </a:rPr>
+              <a:t>02</a:t>
+            </a:r>
+          </a:p>
+        </p:txBody>
+      </p:sp>
+      <p:sp>
+        <p:nvSpPr>
+          <p:cNvPr id="11" name="TextBox 10"/>
+          <p:cNvSpPr txBox="1"/>
+          <p:nvPr/>
+        </p:nvSpPr>
+        <p:spPr>
+          <a:xfrm>
+            <a:off x="4544568" y="3447288"/>
+            <a:ext cx="3383280" cy="457200"/>
+          </a:xfrm>
+          <a:prstGeom prst="rect">
+            <a:avLst/>
+          </a:prstGeom>
+          <a:noFill/>
+        </p:spPr>
+        <p:txBody>
+          <a:bodyPr wrap="square" anchor="t" lIns="0" rIns="0" tIns="0" bIns="0">
+            <a:spAutoFit/>
+          </a:bodyPr>
+          <a:lstStyle/>
+          <a:p>
+            <a:pPr algn="l">
+              <a:lnSpc>
+                <a:spcPct val="100000"/>
+              </a:lnSpc>
+            </a:pPr>
+            <a:r>
+              <a:rPr sz="2100" b="1" i="0">
                 <a:solidFill>
                   <a:srgbClr val="F7F1E6"/>
                 </a:solidFill>
                 <a:latin typeface="Cambria"/>
               </a:rPr>
-              <a:t>Face aux objections</a:t>
-            </a:r>
-          </a:p>
-        </p:txBody>
-      </p:sp>
-      <p:sp>
-        <p:nvSpPr>
-          <p:cNvPr id="8" name="TextBox 7"/>
-          <p:cNvSpPr txBox="1"/>
-          <p:nvPr/>
-        </p:nvSpPr>
-        <p:spPr>
-          <a:xfrm>
-            <a:off x="795528" y="3429000"/>
-            <a:ext cx="10058400" cy="548640"/>
+              <a:t>On garantit</a:t>
+            </a:r>
+          </a:p>
+        </p:txBody>
+      </p:sp>
+      <p:sp>
+        <p:nvSpPr>
+          <p:cNvPr id="12" name="TextBox 11"/>
+          <p:cNvSpPr txBox="1"/>
+          <p:nvPr/>
+        </p:nvSpPr>
+        <p:spPr>
+          <a:xfrm>
+            <a:off x="4544568" y="3931920"/>
+            <a:ext cx="3383280" cy="548640"/>
           </a:xfrm>
           <a:prstGeom prst="rect">
             <a:avLst/>
@@ -10403,31 +11680,148 @@
           <a:p>
             <a:pPr algn="l">
               <a:lnSpc>
+                <a:spcPct val="110000"/>
+              </a:lnSpc>
+            </a:pPr>
+            <a:r>
+              <a:rPr sz="1400" b="0" i="0">
+                <a:solidFill>
+                  <a:srgbClr val="B7AE9E"/>
+                </a:solidFill>
+                <a:latin typeface="Calibri"/>
+              </a:rPr>
+              <a:t>Mises à jour &amp; support inclus.</a:t>
+            </a:r>
+          </a:p>
+        </p:txBody>
+      </p:sp>
+      <p:sp>
+        <p:nvSpPr>
+          <p:cNvPr id="13" name="TextBox 12"/>
+          <p:cNvSpPr txBox="1"/>
+          <p:nvPr/>
+        </p:nvSpPr>
+        <p:spPr>
+          <a:xfrm>
+            <a:off x="8311896" y="3063240"/>
+            <a:ext cx="3383280" cy="457200"/>
+          </a:xfrm>
+          <a:prstGeom prst="rect">
+            <a:avLst/>
+          </a:prstGeom>
+          <a:noFill/>
+        </p:spPr>
+        <p:txBody>
+          <a:bodyPr wrap="square" anchor="t" lIns="0" rIns="0" tIns="0" bIns="0">
+            <a:spAutoFit/>
+          </a:bodyPr>
+          <a:lstStyle/>
+          <a:p>
+            <a:pPr algn="l">
+              <a:lnSpc>
                 <a:spcPct val="100000"/>
               </a:lnSpc>
             </a:pPr>
             <a:r>
-              <a:rPr sz="1700" b="0" i="0">
+              <a:rPr sz="1500" b="1" i="0">
+                <a:solidFill>
+                  <a:srgbClr val="E8641B"/>
+                </a:solidFill>
+                <a:latin typeface="Cambria"/>
+              </a:rPr>
+              <a:t>03</a:t>
+            </a:r>
+          </a:p>
+        </p:txBody>
+      </p:sp>
+      <p:sp>
+        <p:nvSpPr>
+          <p:cNvPr id="14" name="TextBox 13"/>
+          <p:cNvSpPr txBox="1"/>
+          <p:nvPr/>
+        </p:nvSpPr>
+        <p:spPr>
+          <a:xfrm>
+            <a:off x="8311896" y="3447288"/>
+            <a:ext cx="3383280" cy="457200"/>
+          </a:xfrm>
+          <a:prstGeom prst="rect">
+            <a:avLst/>
+          </a:prstGeom>
+          <a:noFill/>
+        </p:spPr>
+        <p:txBody>
+          <a:bodyPr wrap="square" anchor="t" lIns="0" rIns="0" tIns="0" bIns="0">
+            <a:spAutoFit/>
+          </a:bodyPr>
+          <a:lstStyle/>
+          <a:p>
+            <a:pPr algn="l">
+              <a:lnSpc>
+                <a:spcPct val="100000"/>
+              </a:lnSpc>
+            </a:pPr>
+            <a:r>
+              <a:rPr sz="2100" b="1" i="0">
+                <a:solidFill>
+                  <a:srgbClr val="F7F1E6"/>
+                </a:solidFill>
+                <a:latin typeface="Cambria"/>
+              </a:rPr>
+              <a:t>On fait grandir</a:t>
+            </a:r>
+          </a:p>
+        </p:txBody>
+      </p:sp>
+      <p:sp>
+        <p:nvSpPr>
+          <p:cNvPr id="15" name="TextBox 14"/>
+          <p:cNvSpPr txBox="1"/>
+          <p:nvPr/>
+        </p:nvSpPr>
+        <p:spPr>
+          <a:xfrm>
+            <a:off x="8311896" y="3931920"/>
+            <a:ext cx="3383280" cy="548640"/>
+          </a:xfrm>
+          <a:prstGeom prst="rect">
+            <a:avLst/>
+          </a:prstGeom>
+          <a:noFill/>
+        </p:spPr>
+        <p:txBody>
+          <a:bodyPr wrap="square" anchor="t" lIns="0" rIns="0" tIns="0" bIns="0">
+            <a:spAutoFit/>
+          </a:bodyPr>
+          <a:lstStyle/>
+          <a:p>
+            <a:pPr algn="l">
+              <a:lnSpc>
+                <a:spcPct val="110000"/>
+              </a:lnSpc>
+            </a:pPr>
+            <a:r>
+              <a:rPr sz="1400" b="0" i="0">
                 <a:solidFill>
                   <a:srgbClr val="B7AE9E"/>
                 </a:solidFill>
                 <a:latin typeface="Calibri"/>
               </a:rPr>
-              <a:t>Ce que vous entendrez en rendez-vous — et comment y répondre, calmement.</a:t>
-            </a:r>
-          </a:p>
-        </p:txBody>
-      </p:sp>
-      <p:sp>
-        <p:nvSpPr>
-          <p:cNvPr id="9" name="Rectangle 8"/>
+              <a:t>Tunnels, ads, CRM, IA.</a:t>
+            </a:r>
+          </a:p>
+        </p:txBody>
+      </p:sp>
+      <p:sp>
+        <p:nvSpPr>
+          <p:cNvPr id="16" name="Rectangle 15"/>
           <p:cNvSpPr/>
           <p:nvPr/>
         </p:nvSpPr>
         <p:spPr>
           <a:xfrm>
-            <a:off x="777240" y="5806440"/>
-            <a:ext cx="3657600" cy="18288"/>
+            <a:off x="777240" y="4892040"/>
+            <a:ext cx="10607040" cy="12801"/>
           </a:xfrm>
           <a:prstGeom prst="rect">
             <a:avLst/>
@@ -10464,14 +11858,71 @@
       </p:sp>
       <p:sp>
         <p:nvSpPr>
-          <p:cNvPr id="10" name="TextBox 9"/>
+          <p:cNvPr id="17" name="TextBox 16"/>
+          <p:cNvSpPr txBox="1"/>
+          <p:nvPr/>
+        </p:nvSpPr>
+        <p:spPr>
+          <a:xfrm>
+            <a:off x="777240" y="5257800"/>
+            <a:ext cx="10607040" cy="640080"/>
+          </a:xfrm>
+          <a:prstGeom prst="rect">
+            <a:avLst/>
+          </a:prstGeom>
+          <a:noFill/>
+        </p:spPr>
+        <p:txBody>
+          <a:bodyPr wrap="square" anchor="t" lIns="0" rIns="0" tIns="0" bIns="0">
+            <a:spAutoFit/>
+          </a:bodyPr>
+          <a:lstStyle/>
+          <a:p>
+            <a:pPr algn="l">
+              <a:lnSpc>
+                <a:spcPct val="100000"/>
+              </a:lnSpc>
+            </a:pPr>
+            <a:r>
+              <a:rPr sz="2600" b="0" i="0">
+                <a:solidFill>
+                  <a:srgbClr val="F7F1E6"/>
+                </a:solidFill>
+                <a:latin typeface="Cambria"/>
+              </a:rPr>
+              <a:t>On construit votre site </a:t>
+            </a:r>
+            <a:r>
+              <a:rPr sz="2600" b="1" i="0">
+                <a:solidFill>
+                  <a:srgbClr val="E8641B"/>
+                </a:solidFill>
+                <a:latin typeface="Cambria"/>
+              </a:rPr>
+              <a:t>cette semaine</a:t>
+            </a:r>
+            <a:r>
+              <a:rPr sz="2600" b="0" i="0">
+                <a:solidFill>
+                  <a:srgbClr val="F7F1E6"/>
+                </a:solidFill>
+                <a:latin typeface="Cambria"/>
+              </a:rPr>
+              <a:t> ?</a:t>
+            </a:r>
+          </a:p>
+        </p:txBody>
+      </p:sp>
+      <p:sp>
+        <p:nvSpPr>
+          <p:cNvPr id="18" name="TextBox 17"/>
           <p:cNvSpPr txBox="1"/>
           <p:nvPr/>
         </p:nvSpPr>
         <p:spPr>
           <a:xfrm>
             <a:off x="777240" y="5989320"/>
-            <a:ext cx="8229600" cy="365760"/>
+            <a:ext cx="10607040" cy="365760"/>
           </a:xfrm>
           <a:prstGeom prst="rect">
             <a:avLst/>
@@ -10490,13 +11941,13 @@
               </a:lnSpc>
             </a:pPr>
             <a:r>
-              <a:rPr sz="1250" b="0" i="1">
+              <a:rPr sz="1250" b="1" i="0">
                 <a:solidFill>
                   <a:srgbClr val="9A9384"/>
                 </a:solidFill>
                 <a:latin typeface="Calibri"/>
               </a:rPr>
-              <a:t>Slides internes — support de vente, à ne pas projeter au client.</a:t>
+              <a:t>UNIT — L'Atelier</a:t>
             </a:r>
           </a:p>
         </p:txBody>
@@ -10534,7 +11985,7 @@
             <a:avLst/>
           </a:prstGeom>
           <a:solidFill>
-            <a:srgbClr val="F4EEE3"/>
+            <a:srgbClr val="2B2620"/>
           </a:solidFill>
           <a:ln>
             <a:noFill/>
@@ -10571,7 +12022,95 @@
         </p:nvSpPr>
         <p:spPr>
           <a:xfrm>
-            <a:off x="777240" y="594360"/>
+            <a:off x="9692640" y="640080"/>
+            <a:ext cx="1920240" cy="1920240"/>
+          </a:xfrm>
+          <a:prstGeom prst="ellipse">
+            <a:avLst/>
+          </a:prstGeom>
+          <a:noFill/>
+          <a:ln w="15240">
+            <a:solidFill>
+              <a:srgbClr val="3E382F"/>
+            </a:solidFill>
+          </a:ln>
+          <a:effectLst/>
+        </p:spPr>
+        <p:style>
+          <a:lnRef idx="1">
+            <a:schemeClr val="accent1"/>
+          </a:lnRef>
+          <a:fillRef idx="3">
+            <a:schemeClr val="accent1"/>
+          </a:fillRef>
+          <a:effectRef idx="2">
+            <a:schemeClr val="accent1"/>
+          </a:effectRef>
+          <a:fontRef idx="minor">
+            <a:schemeClr val="lt1"/>
+          </a:fontRef>
+        </p:style>
+        <p:txBody>
+          <a:bodyPr rtlCol="0" anchor="ctr"/>
+          <a:lstStyle/>
+          <a:p>
+            <a:pPr algn="ctr"/>
+          </a:p>
+        </p:txBody>
+      </p:sp>
+      <p:sp>
+        <p:nvSpPr>
+          <p:cNvPr id="4" name="Oval 3"/>
+          <p:cNvSpPr/>
+          <p:nvPr/>
+        </p:nvSpPr>
+        <p:spPr>
+          <a:xfrm>
+            <a:off x="10424160" y="4480560"/>
+            <a:ext cx="1828800" cy="1828800"/>
+          </a:xfrm>
+          <a:prstGeom prst="ellipse">
+            <a:avLst/>
+          </a:prstGeom>
+          <a:noFill/>
+          <a:ln w="15240">
+            <a:solidFill>
+              <a:srgbClr val="3E382F"/>
+            </a:solidFill>
+          </a:ln>
+          <a:effectLst/>
+        </p:spPr>
+        <p:style>
+          <a:lnRef idx="1">
+            <a:schemeClr val="accent1"/>
+          </a:lnRef>
+          <a:fillRef idx="3">
+            <a:schemeClr val="accent1"/>
+          </a:fillRef>
+          <a:effectRef idx="2">
+            <a:schemeClr val="accent1"/>
+          </a:effectRef>
+          <a:fontRef idx="minor">
+            <a:schemeClr val="lt1"/>
+          </a:fontRef>
+        </p:style>
+        <p:txBody>
+          <a:bodyPr rtlCol="0" anchor="ctr"/>
+          <a:lstStyle/>
+          <a:p>
+            <a:pPr algn="ctr"/>
+          </a:p>
+        </p:txBody>
+      </p:sp>
+      <p:sp>
+        <p:nvSpPr>
+          <p:cNvPr id="5" name="Oval 4"/>
+          <p:cNvSpPr/>
+          <p:nvPr/>
+        </p:nvSpPr>
+        <p:spPr>
+          <a:xfrm>
+            <a:off x="777240" y="1856231"/>
             <a:ext cx="100584" cy="100584"/>
           </a:xfrm>
           <a:prstGeom prst="ellipse">
@@ -10609,13 +12148,13 @@
       </p:sp>
       <p:sp>
         <p:nvSpPr>
-          <p:cNvPr id="4" name="TextBox 3"/>
-          <p:cNvSpPr txBox="1"/>
-          <p:nvPr/>
-        </p:nvSpPr>
-        <p:spPr>
-          <a:xfrm>
-            <a:off x="996695" y="521207"/>
+          <p:cNvPr id="6" name="TextBox 5"/>
+          <p:cNvSpPr txBox="1"/>
+          <p:nvPr/>
+        </p:nvSpPr>
+        <p:spPr>
+          <a:xfrm>
+            <a:off x="996695" y="1783080"/>
             <a:ext cx="5486400" cy="274320"/>
           </a:xfrm>
           <a:prstGeom prst="rect">
@@ -10641,21 +12180,21 @@
                 </a:solidFill>
                 <a:latin typeface="Calibri"/>
               </a:rPr>
-              <a:t>FACE AUX OBJECTIONS</a:t>
-            </a:r>
-          </a:p>
-        </p:txBody>
-      </p:sp>
-      <p:sp>
-        <p:nvSpPr>
-          <p:cNvPr id="5" name="TextBox 4"/>
-          <p:cNvSpPr txBox="1"/>
-          <p:nvPr/>
-        </p:nvSpPr>
-        <p:spPr>
-          <a:xfrm>
-            <a:off x="777240" y="886968"/>
-            <a:ext cx="8229600" cy="640080"/>
+              <a:t>SUPPORT COMMERCIAL · INTERNE</a:t>
+            </a:r>
+          </a:p>
+        </p:txBody>
+      </p:sp>
+      <p:sp>
+        <p:nvSpPr>
+          <p:cNvPr id="7" name="TextBox 6"/>
+          <p:cNvSpPr txBox="1"/>
+          <p:nvPr/>
+        </p:nvSpPr>
+        <p:spPr>
+          <a:xfrm>
+            <a:off x="777240" y="2194560"/>
+            <a:ext cx="10607040" cy="1097280"/>
           </a:xfrm>
           <a:prstGeom prst="rect">
             <a:avLst/>
@@ -10674,79 +12213,75 @@
               </a:lnSpc>
             </a:pPr>
             <a:r>
-              <a:rPr sz="3200" b="1" i="0">
-                <a:solidFill>
-                  <a:srgbClr val="2B2620"/>
+              <a:rPr sz="4600" b="1" i="0">
+                <a:solidFill>
+                  <a:srgbClr val="F7F1E6"/>
                 </a:solidFill>
                 <a:latin typeface="Cambria"/>
               </a:rPr>
-              <a:t>Objection → Réponse</a:t>
-            </a:r>
-          </a:p>
-        </p:txBody>
-      </p:sp>
-      <p:sp>
-        <p:nvSpPr>
-          <p:cNvPr id="6" name="TextBox 5"/>
-          <p:cNvSpPr txBox="1"/>
-          <p:nvPr/>
-        </p:nvSpPr>
-        <p:spPr>
-          <a:xfrm>
-            <a:off x="10149840" y="1024128"/>
-            <a:ext cx="1463040" cy="457200"/>
-          </a:xfrm>
-          <a:prstGeom prst="rect">
-            <a:avLst/>
-          </a:prstGeom>
-          <a:noFill/>
-        </p:spPr>
-        <p:txBody>
-          <a:bodyPr wrap="square" anchor="t" lIns="0" rIns="0" tIns="0" bIns="0">
-            <a:spAutoFit/>
-          </a:bodyPr>
-          <a:lstStyle/>
-          <a:p>
-            <a:pPr algn="r">
+              <a:t>Face aux objections</a:t>
+            </a:r>
+          </a:p>
+        </p:txBody>
+      </p:sp>
+      <p:sp>
+        <p:nvSpPr>
+          <p:cNvPr id="8" name="TextBox 7"/>
+          <p:cNvSpPr txBox="1"/>
+          <p:nvPr/>
+        </p:nvSpPr>
+        <p:spPr>
+          <a:xfrm>
+            <a:off x="795528" y="3429000"/>
+            <a:ext cx="10058400" cy="548640"/>
+          </a:xfrm>
+          <a:prstGeom prst="rect">
+            <a:avLst/>
+          </a:prstGeom>
+          <a:noFill/>
+        </p:spPr>
+        <p:txBody>
+          <a:bodyPr wrap="square" anchor="t" lIns="0" rIns="0" tIns="0" bIns="0">
+            <a:spAutoFit/>
+          </a:bodyPr>
+          <a:lstStyle/>
+          <a:p>
+            <a:pPr algn="l">
               <a:lnSpc>
                 <a:spcPct val="100000"/>
               </a:lnSpc>
             </a:pPr>
             <a:r>
-              <a:rPr sz="1500" b="1" i="0">
-                <a:solidFill>
-                  <a:srgbClr val="8C8478"/>
-                </a:solidFill>
-                <a:latin typeface="Cambria"/>
-              </a:rPr>
-              <a:t>1 / 2</a:t>
-            </a:r>
-          </a:p>
-        </p:txBody>
-      </p:sp>
-      <p:sp>
-        <p:nvSpPr>
-          <p:cNvPr id="7" name="Rounded Rectangle 6"/>
+              <a:rPr sz="1700" b="0" i="0">
+                <a:solidFill>
+                  <a:srgbClr val="B7AE9E"/>
+                </a:solidFill>
+                <a:latin typeface="Calibri"/>
+              </a:rPr>
+              <a:t>Ce que vous entendrez en rendez-vous — et comment y répondre, calmement.</a:t>
+            </a:r>
+          </a:p>
+        </p:txBody>
+      </p:sp>
+      <p:sp>
+        <p:nvSpPr>
+          <p:cNvPr id="9" name="Rectangle 8"/>
           <p:cNvSpPr/>
           <p:nvPr/>
         </p:nvSpPr>
         <p:spPr>
           <a:xfrm>
-            <a:off x="777240" y="1965960"/>
-            <a:ext cx="5349240" cy="1965960"/>
-          </a:xfrm>
-          <a:prstGeom prst="roundRect">
-            <a:avLst>
-              <a:gd name="adj" fmla="val 5000"/>
-            </a:avLst>
+            <a:off x="777240" y="5806440"/>
+            <a:ext cx="3657600" cy="18288"/>
+          </a:xfrm>
+          <a:prstGeom prst="rect">
+            <a:avLst/>
           </a:prstGeom>
           <a:solidFill>
-            <a:srgbClr val="FFFDFA"/>
+            <a:srgbClr val="4A433A"/>
           </a:solidFill>
-          <a:ln w="12700">
-            <a:solidFill>
-              <a:srgbClr val="E8E0D2"/>
-            </a:solidFill>
+          <a:ln>
+            <a:noFill/>
           </a:ln>
           <a:effectLst/>
         </p:spPr>
@@ -10774,14 +12309,14 @@
       </p:sp>
       <p:sp>
         <p:nvSpPr>
-          <p:cNvPr id="8" name="TextBox 7"/>
-          <p:cNvSpPr txBox="1"/>
-          <p:nvPr/>
-        </p:nvSpPr>
-        <p:spPr>
-          <a:xfrm>
-            <a:off x="1161288" y="2221991"/>
-            <a:ext cx="4581144" cy="548640"/>
+          <p:cNvPr id="10" name="TextBox 9"/>
+          <p:cNvSpPr txBox="1"/>
+          <p:nvPr/>
+        </p:nvSpPr>
+        <p:spPr>
+          <a:xfrm>
+            <a:off x="777240" y="5989320"/>
+            <a:ext cx="8229600" cy="365760"/>
           </a:xfrm>
           <a:prstGeom prst="rect">
             <a:avLst/>
@@ -10796,590 +12331,17 @@
           <a:p>
             <a:pPr algn="l">
               <a:lnSpc>
-                <a:spcPct val="102000"/>
-              </a:lnSpc>
-            </a:pPr>
-            <a:r>
-              <a:rPr sz="1550" b="1" i="1">
-                <a:solidFill>
-                  <a:srgbClr val="2B2620"/>
-                </a:solidFill>
-                <a:latin typeface="Cambria"/>
-              </a:rPr>
-              <a:t>« C'est trop cher. »</a:t>
-            </a:r>
-          </a:p>
-        </p:txBody>
-      </p:sp>
-      <p:sp>
-        <p:nvSpPr>
-          <p:cNvPr id="9" name="TextBox 8"/>
-          <p:cNvSpPr txBox="1"/>
-          <p:nvPr/>
-        </p:nvSpPr>
-        <p:spPr>
-          <a:xfrm>
-            <a:off x="1161288" y="2807208"/>
-            <a:ext cx="4581144" cy="274320"/>
-          </a:xfrm>
-          <a:prstGeom prst="rect">
-            <a:avLst/>
-          </a:prstGeom>
-          <a:noFill/>
-        </p:spPr>
-        <p:txBody>
-          <a:bodyPr wrap="square" anchor="t" lIns="0" rIns="0" tIns="0" bIns="0">
-            <a:spAutoFit/>
-          </a:bodyPr>
-          <a:lstStyle/>
-          <a:p>
-            <a:pPr algn="l">
-              <a:lnSpc>
                 <a:spcPct val="100000"/>
               </a:lnSpc>
             </a:pPr>
             <a:r>
-              <a:rPr sz="1050" b="1" i="0">
-                <a:solidFill>
-                  <a:srgbClr val="E8641B"/>
+              <a:rPr sz="1250" b="0" i="1">
+                <a:solidFill>
+                  <a:srgbClr val="9A9384"/>
                 </a:solidFill>
                 <a:latin typeface="Calibri"/>
               </a:rPr>
-              <a:t>VOTRE RÉPONSE</a:t>
-            </a:r>
-          </a:p>
-        </p:txBody>
-      </p:sp>
-      <p:sp>
-        <p:nvSpPr>
-          <p:cNvPr id="10" name="TextBox 9"/>
-          <p:cNvSpPr txBox="1"/>
-          <p:nvPr/>
-        </p:nvSpPr>
-        <p:spPr>
-          <a:xfrm>
-            <a:off x="1161288" y="3063239"/>
-            <a:ext cx="4617720" cy="822960"/>
-          </a:xfrm>
-          <a:prstGeom prst="rect">
-            <a:avLst/>
-          </a:prstGeom>
-          <a:noFill/>
-        </p:spPr>
-        <p:txBody>
-          <a:bodyPr wrap="square" anchor="t" lIns="0" rIns="0" tIns="0" bIns="0">
-            <a:spAutoFit/>
-          </a:bodyPr>
-          <a:lstStyle/>
-          <a:p>
-            <a:pPr algn="l">
-              <a:lnSpc>
-                <a:spcPct val="110000"/>
-              </a:lnSpc>
-            </a:pPr>
-            <a:r>
-              <a:rPr sz="1200" b="0" i="0">
-                <a:solidFill>
-                  <a:srgbClr val="6E665A"/>
-                </a:solidFill>
-                <a:latin typeface="Calibri"/>
-              </a:rPr>
-              <a:t>Une seule table réservée en plus par semaine rembourse le site dans l'année. Ce n'est pas une dépense : c'est un commercial qui travaille 24/7 — garanties incluses, sans surcoût caché.</a:t>
-            </a:r>
-          </a:p>
-        </p:txBody>
-      </p:sp>
-      <p:sp>
-        <p:nvSpPr>
-          <p:cNvPr id="11" name="Rounded Rectangle 10"/>
-          <p:cNvSpPr/>
-          <p:nvPr/>
-        </p:nvSpPr>
-        <p:spPr>
-          <a:xfrm>
-            <a:off x="6492240" y="1965960"/>
-            <a:ext cx="5349240" cy="1965960"/>
-          </a:xfrm>
-          <a:prstGeom prst="roundRect">
-            <a:avLst>
-              <a:gd name="adj" fmla="val 5000"/>
-            </a:avLst>
-          </a:prstGeom>
-          <a:solidFill>
-            <a:srgbClr val="FFFDFA"/>
-          </a:solidFill>
-          <a:ln w="12700">
-            <a:solidFill>
-              <a:srgbClr val="E8E0D2"/>
-            </a:solidFill>
-          </a:ln>
-          <a:effectLst/>
-        </p:spPr>
-        <p:style>
-          <a:lnRef idx="1">
-            <a:schemeClr val="accent1"/>
-          </a:lnRef>
-          <a:fillRef idx="3">
-            <a:schemeClr val="accent1"/>
-          </a:fillRef>
-          <a:effectRef idx="2">
-            <a:schemeClr val="accent1"/>
-          </a:effectRef>
-          <a:fontRef idx="minor">
-            <a:schemeClr val="lt1"/>
-          </a:fontRef>
-        </p:style>
-        <p:txBody>
-          <a:bodyPr rtlCol="0" anchor="ctr"/>
-          <a:lstStyle/>
-          <a:p>
-            <a:pPr algn="ctr"/>
-          </a:p>
-        </p:txBody>
-      </p:sp>
-      <p:sp>
-        <p:nvSpPr>
-          <p:cNvPr id="12" name="TextBox 11"/>
-          <p:cNvSpPr txBox="1"/>
-          <p:nvPr/>
-        </p:nvSpPr>
-        <p:spPr>
-          <a:xfrm>
-            <a:off x="6876288" y="2221991"/>
-            <a:ext cx="4581144" cy="548640"/>
-          </a:xfrm>
-          <a:prstGeom prst="rect">
-            <a:avLst/>
-          </a:prstGeom>
-          <a:noFill/>
-        </p:spPr>
-        <p:txBody>
-          <a:bodyPr wrap="square" anchor="t" lIns="0" rIns="0" tIns="0" bIns="0">
-            <a:spAutoFit/>
-          </a:bodyPr>
-          <a:lstStyle/>
-          <a:p>
-            <a:pPr algn="l">
-              <a:lnSpc>
-                <a:spcPct val="102000"/>
-              </a:lnSpc>
-            </a:pPr>
-            <a:r>
-              <a:rPr sz="1550" b="1" i="1">
-                <a:solidFill>
-                  <a:srgbClr val="2B2620"/>
-                </a:solidFill>
-                <a:latin typeface="Cambria"/>
-              </a:rPr>
-              <a:t>« J'ai déjà Facebook / Insta, ça suffit. »</a:t>
-            </a:r>
-          </a:p>
-        </p:txBody>
-      </p:sp>
-      <p:sp>
-        <p:nvSpPr>
-          <p:cNvPr id="13" name="TextBox 12"/>
-          <p:cNvSpPr txBox="1"/>
-          <p:nvPr/>
-        </p:nvSpPr>
-        <p:spPr>
-          <a:xfrm>
-            <a:off x="6876288" y="2807208"/>
-            <a:ext cx="4581144" cy="274320"/>
-          </a:xfrm>
-          <a:prstGeom prst="rect">
-            <a:avLst/>
-          </a:prstGeom>
-          <a:noFill/>
-        </p:spPr>
-        <p:txBody>
-          <a:bodyPr wrap="square" anchor="t" lIns="0" rIns="0" tIns="0" bIns="0">
-            <a:spAutoFit/>
-          </a:bodyPr>
-          <a:lstStyle/>
-          <a:p>
-            <a:pPr algn="l">
-              <a:lnSpc>
-                <a:spcPct val="100000"/>
-              </a:lnSpc>
-            </a:pPr>
-            <a:r>
-              <a:rPr sz="1050" b="1" i="0">
-                <a:solidFill>
-                  <a:srgbClr val="E8641B"/>
-                </a:solidFill>
-                <a:latin typeface="Calibri"/>
-              </a:rPr>
-              <a:t>VOTRE RÉPONSE</a:t>
-            </a:r>
-          </a:p>
-        </p:txBody>
-      </p:sp>
-      <p:sp>
-        <p:nvSpPr>
-          <p:cNvPr id="14" name="TextBox 13"/>
-          <p:cNvSpPr txBox="1"/>
-          <p:nvPr/>
-        </p:nvSpPr>
-        <p:spPr>
-          <a:xfrm>
-            <a:off x="6876288" y="3063239"/>
-            <a:ext cx="4617720" cy="822960"/>
-          </a:xfrm>
-          <a:prstGeom prst="rect">
-            <a:avLst/>
-          </a:prstGeom>
-          <a:noFill/>
-        </p:spPr>
-        <p:txBody>
-          <a:bodyPr wrap="square" anchor="t" lIns="0" rIns="0" tIns="0" bIns="0">
-            <a:spAutoFit/>
-          </a:bodyPr>
-          <a:lstStyle/>
-          <a:p>
-            <a:pPr algn="l">
-              <a:lnSpc>
-                <a:spcPct val="110000"/>
-              </a:lnSpc>
-            </a:pPr>
-            <a:r>
-              <a:rPr sz="1200" b="0" i="0">
-                <a:solidFill>
-                  <a:srgbClr val="6E665A"/>
-                </a:solidFill>
-                <a:latin typeface="Calibri"/>
-              </a:rPr>
-              <a:t>Les réseaux, c'est loué : l'algorithme décide qui vous voit. Votre site, c'est chez vous — en tête de Google quand on cherche un resto dans votre ville, menu et réservation en un clic.</a:t>
-            </a:r>
-          </a:p>
-        </p:txBody>
-      </p:sp>
-      <p:sp>
-        <p:nvSpPr>
-          <p:cNvPr id="15" name="Rounded Rectangle 14"/>
-          <p:cNvSpPr/>
-          <p:nvPr/>
-        </p:nvSpPr>
-        <p:spPr>
-          <a:xfrm>
-            <a:off x="777240" y="4242816"/>
-            <a:ext cx="5349240" cy="1965960"/>
-          </a:xfrm>
-          <a:prstGeom prst="roundRect">
-            <a:avLst>
-              <a:gd name="adj" fmla="val 5000"/>
-            </a:avLst>
-          </a:prstGeom>
-          <a:solidFill>
-            <a:srgbClr val="FFFDFA"/>
-          </a:solidFill>
-          <a:ln w="12700">
-            <a:solidFill>
-              <a:srgbClr val="E8E0D2"/>
-            </a:solidFill>
-          </a:ln>
-          <a:effectLst/>
-        </p:spPr>
-        <p:style>
-          <a:lnRef idx="1">
-            <a:schemeClr val="accent1"/>
-          </a:lnRef>
-          <a:fillRef idx="3">
-            <a:schemeClr val="accent1"/>
-          </a:fillRef>
-          <a:effectRef idx="2">
-            <a:schemeClr val="accent1"/>
-          </a:effectRef>
-          <a:fontRef idx="minor">
-            <a:schemeClr val="lt1"/>
-          </a:fontRef>
-        </p:style>
-        <p:txBody>
-          <a:bodyPr rtlCol="0" anchor="ctr"/>
-          <a:lstStyle/>
-          <a:p>
-            <a:pPr algn="ctr"/>
-          </a:p>
-        </p:txBody>
-      </p:sp>
-      <p:sp>
-        <p:nvSpPr>
-          <p:cNvPr id="16" name="TextBox 15"/>
-          <p:cNvSpPr txBox="1"/>
-          <p:nvPr/>
-        </p:nvSpPr>
-        <p:spPr>
-          <a:xfrm>
-            <a:off x="1161288" y="4498848"/>
-            <a:ext cx="4581144" cy="548640"/>
-          </a:xfrm>
-          <a:prstGeom prst="rect">
-            <a:avLst/>
-          </a:prstGeom>
-          <a:noFill/>
-        </p:spPr>
-        <p:txBody>
-          <a:bodyPr wrap="square" anchor="t" lIns="0" rIns="0" tIns="0" bIns="0">
-            <a:spAutoFit/>
-          </a:bodyPr>
-          <a:lstStyle/>
-          <a:p>
-            <a:pPr algn="l">
-              <a:lnSpc>
-                <a:spcPct val="102000"/>
-              </a:lnSpc>
-            </a:pPr>
-            <a:r>
-              <a:rPr sz="1550" b="1" i="1">
-                <a:solidFill>
-                  <a:srgbClr val="2B2620"/>
-                </a:solidFill>
-                <a:latin typeface="Cambria"/>
-              </a:rPr>
-              <a:t>« Je n'ai pas le temps de m'en occuper. »</a:t>
-            </a:r>
-          </a:p>
-        </p:txBody>
-      </p:sp>
-      <p:sp>
-        <p:nvSpPr>
-          <p:cNvPr id="17" name="TextBox 16"/>
-          <p:cNvSpPr txBox="1"/>
-          <p:nvPr/>
-        </p:nvSpPr>
-        <p:spPr>
-          <a:xfrm>
-            <a:off x="1161288" y="5084064"/>
-            <a:ext cx="4581144" cy="274320"/>
-          </a:xfrm>
-          <a:prstGeom prst="rect">
-            <a:avLst/>
-          </a:prstGeom>
-          <a:noFill/>
-        </p:spPr>
-        <p:txBody>
-          <a:bodyPr wrap="square" anchor="t" lIns="0" rIns="0" tIns="0" bIns="0">
-            <a:spAutoFit/>
-          </a:bodyPr>
-          <a:lstStyle/>
-          <a:p>
-            <a:pPr algn="l">
-              <a:lnSpc>
-                <a:spcPct val="100000"/>
-              </a:lnSpc>
-            </a:pPr>
-            <a:r>
-              <a:rPr sz="1050" b="1" i="0">
-                <a:solidFill>
-                  <a:srgbClr val="E8641B"/>
-                </a:solidFill>
-                <a:latin typeface="Calibri"/>
-              </a:rPr>
-              <a:t>VOTRE RÉPONSE</a:t>
-            </a:r>
-          </a:p>
-        </p:txBody>
-      </p:sp>
-      <p:sp>
-        <p:nvSpPr>
-          <p:cNvPr id="18" name="TextBox 17"/>
-          <p:cNvSpPr txBox="1"/>
-          <p:nvPr/>
-        </p:nvSpPr>
-        <p:spPr>
-          <a:xfrm>
-            <a:off x="1161288" y="5340096"/>
-            <a:ext cx="4617720" cy="822960"/>
-          </a:xfrm>
-          <a:prstGeom prst="rect">
-            <a:avLst/>
-          </a:prstGeom>
-          <a:noFill/>
-        </p:spPr>
-        <p:txBody>
-          <a:bodyPr wrap="square" anchor="t" lIns="0" rIns="0" tIns="0" bIns="0">
-            <a:spAutoFit/>
-          </a:bodyPr>
-          <a:lstStyle/>
-          <a:p>
-            <a:pPr algn="l">
-              <a:lnSpc>
-                <a:spcPct val="110000"/>
-              </a:lnSpc>
-            </a:pPr>
-            <a:r>
-              <a:rPr sz="1200" b="0" i="0">
-                <a:solidFill>
-                  <a:srgbClr val="6E665A"/>
-                </a:solidFill>
-                <a:latin typeface="Calibri"/>
-              </a:rPr>
-              <a:t>C'est justement notre métier : vous ne touchez à rien. Nouveau menu, photo, promo ? Un simple message, on s'en occupe. Zéro charge pour vous.</a:t>
-            </a:r>
-          </a:p>
-        </p:txBody>
-      </p:sp>
-      <p:sp>
-        <p:nvSpPr>
-          <p:cNvPr id="19" name="Rounded Rectangle 18"/>
-          <p:cNvSpPr/>
-          <p:nvPr/>
-        </p:nvSpPr>
-        <p:spPr>
-          <a:xfrm>
-            <a:off x="6492240" y="4242816"/>
-            <a:ext cx="5349240" cy="1965960"/>
-          </a:xfrm>
-          <a:prstGeom prst="roundRect">
-            <a:avLst>
-              <a:gd name="adj" fmla="val 5000"/>
-            </a:avLst>
-          </a:prstGeom>
-          <a:solidFill>
-            <a:srgbClr val="FFFDFA"/>
-          </a:solidFill>
-          <a:ln w="12700">
-            <a:solidFill>
-              <a:srgbClr val="E8E0D2"/>
-            </a:solidFill>
-          </a:ln>
-          <a:effectLst/>
-        </p:spPr>
-        <p:style>
-          <a:lnRef idx="1">
-            <a:schemeClr val="accent1"/>
-          </a:lnRef>
-          <a:fillRef idx="3">
-            <a:schemeClr val="accent1"/>
-          </a:fillRef>
-          <a:effectRef idx="2">
-            <a:schemeClr val="accent1"/>
-          </a:effectRef>
-          <a:fontRef idx="minor">
-            <a:schemeClr val="lt1"/>
-          </a:fontRef>
-        </p:style>
-        <p:txBody>
-          <a:bodyPr rtlCol="0" anchor="ctr"/>
-          <a:lstStyle/>
-          <a:p>
-            <a:pPr algn="ctr"/>
-          </a:p>
-        </p:txBody>
-      </p:sp>
-      <p:sp>
-        <p:nvSpPr>
-          <p:cNvPr id="20" name="TextBox 19"/>
-          <p:cNvSpPr txBox="1"/>
-          <p:nvPr/>
-        </p:nvSpPr>
-        <p:spPr>
-          <a:xfrm>
-            <a:off x="6876288" y="4498848"/>
-            <a:ext cx="4581144" cy="548640"/>
-          </a:xfrm>
-          <a:prstGeom prst="rect">
-            <a:avLst/>
-          </a:prstGeom>
-          <a:noFill/>
-        </p:spPr>
-        <p:txBody>
-          <a:bodyPr wrap="square" anchor="t" lIns="0" rIns="0" tIns="0" bIns="0">
-            <a:spAutoFit/>
-          </a:bodyPr>
-          <a:lstStyle/>
-          <a:p>
-            <a:pPr algn="l">
-              <a:lnSpc>
-                <a:spcPct val="102000"/>
-              </a:lnSpc>
-            </a:pPr>
-            <a:r>
-              <a:rPr sz="1550" b="1" i="1">
-                <a:solidFill>
-                  <a:srgbClr val="2B2620"/>
-                </a:solidFill>
-                <a:latin typeface="Cambria"/>
-              </a:rPr>
-              <a:t>« Mes clients sont des habitués. »</a:t>
-            </a:r>
-          </a:p>
-        </p:txBody>
-      </p:sp>
-      <p:sp>
-        <p:nvSpPr>
-          <p:cNvPr id="21" name="TextBox 20"/>
-          <p:cNvSpPr txBox="1"/>
-          <p:nvPr/>
-        </p:nvSpPr>
-        <p:spPr>
-          <a:xfrm>
-            <a:off x="6876288" y="5084064"/>
-            <a:ext cx="4581144" cy="274320"/>
-          </a:xfrm>
-          <a:prstGeom prst="rect">
-            <a:avLst/>
-          </a:prstGeom>
-          <a:noFill/>
-        </p:spPr>
-        <p:txBody>
-          <a:bodyPr wrap="square" anchor="t" lIns="0" rIns="0" tIns="0" bIns="0">
-            <a:spAutoFit/>
-          </a:bodyPr>
-          <a:lstStyle/>
-          <a:p>
-            <a:pPr algn="l">
-              <a:lnSpc>
-                <a:spcPct val="100000"/>
-              </a:lnSpc>
-            </a:pPr>
-            <a:r>
-              <a:rPr sz="1050" b="1" i="0">
-                <a:solidFill>
-                  <a:srgbClr val="E8641B"/>
-                </a:solidFill>
-                <a:latin typeface="Calibri"/>
-              </a:rPr>
-              <a:t>VOTRE RÉPONSE</a:t>
-            </a:r>
-          </a:p>
-        </p:txBody>
-      </p:sp>
-      <p:sp>
-        <p:nvSpPr>
-          <p:cNvPr id="22" name="TextBox 21"/>
-          <p:cNvSpPr txBox="1"/>
-          <p:nvPr/>
-        </p:nvSpPr>
-        <p:spPr>
-          <a:xfrm>
-            <a:off x="6876288" y="5340096"/>
-            <a:ext cx="4617720" cy="822960"/>
-          </a:xfrm>
-          <a:prstGeom prst="rect">
-            <a:avLst/>
-          </a:prstGeom>
-          <a:noFill/>
-        </p:spPr>
-        <p:txBody>
-          <a:bodyPr wrap="square" anchor="t" lIns="0" rIns="0" tIns="0" bIns="0">
-            <a:spAutoFit/>
-          </a:bodyPr>
-          <a:lstStyle/>
-          <a:p>
-            <a:pPr algn="l">
-              <a:lnSpc>
-                <a:spcPct val="110000"/>
-              </a:lnSpc>
-            </a:pPr>
-            <a:r>
-              <a:rPr sz="1200" b="0" i="0">
-                <a:solidFill>
-                  <a:srgbClr val="6E665A"/>
-                </a:solidFill>
-                <a:latin typeface="Calibri"/>
-              </a:rPr>
-              <a:t>Les habitués font tourner la boutique, les nouveaux la font grandir. Et 8 clients sur 10 regardent le menu et les avis en ligne avant de pousser la porte.</a:t>
+              <a:t>Slides internes — support de vente, à ne pas projeter au client.</a:t>
             </a:r>
           </a:p>
         </p:txBody>
